--- a/course/ASR2023Fall/slides/DFT.pptx
+++ b/course/ASR2023Fall/slides/DFT.pptx
@@ -5,7 +5,7 @@
     <p:sldMasterId id="2147483660" r:id="rId1"/>
   </p:sldMasterIdLst>
   <p:notesMasterIdLst>
-    <p:notesMasterId r:id="rId38"/>
+    <p:notesMasterId r:id="rId40"/>
   </p:notesMasterIdLst>
   <p:sldIdLst>
     <p:sldId id="256" r:id="rId2"/>
@@ -25,25 +25,27 @@
     <p:sldId id="564" r:id="rId16"/>
     <p:sldId id="565" r:id="rId17"/>
     <p:sldId id="566" r:id="rId18"/>
-    <p:sldId id="585" r:id="rId19"/>
-    <p:sldId id="608" r:id="rId20"/>
-    <p:sldId id="260" r:id="rId21"/>
-    <p:sldId id="261" r:id="rId22"/>
-    <p:sldId id="266" r:id="rId23"/>
-    <p:sldId id="257" r:id="rId24"/>
-    <p:sldId id="258" r:id="rId25"/>
-    <p:sldId id="259" r:id="rId26"/>
-    <p:sldId id="267" r:id="rId27"/>
-    <p:sldId id="262" r:id="rId28"/>
-    <p:sldId id="263" r:id="rId29"/>
-    <p:sldId id="264" r:id="rId30"/>
-    <p:sldId id="265" r:id="rId31"/>
-    <p:sldId id="268" r:id="rId32"/>
-    <p:sldId id="269" r:id="rId33"/>
-    <p:sldId id="270" r:id="rId34"/>
-    <p:sldId id="271" r:id="rId35"/>
-    <p:sldId id="272" r:id="rId36"/>
-    <p:sldId id="273" r:id="rId37"/>
+    <p:sldId id="611" r:id="rId19"/>
+    <p:sldId id="612" r:id="rId20"/>
+    <p:sldId id="585" r:id="rId21"/>
+    <p:sldId id="608" r:id="rId22"/>
+    <p:sldId id="260" r:id="rId23"/>
+    <p:sldId id="261" r:id="rId24"/>
+    <p:sldId id="266" r:id="rId25"/>
+    <p:sldId id="257" r:id="rId26"/>
+    <p:sldId id="258" r:id="rId27"/>
+    <p:sldId id="259" r:id="rId28"/>
+    <p:sldId id="267" r:id="rId29"/>
+    <p:sldId id="262" r:id="rId30"/>
+    <p:sldId id="263" r:id="rId31"/>
+    <p:sldId id="264" r:id="rId32"/>
+    <p:sldId id="265" r:id="rId33"/>
+    <p:sldId id="268" r:id="rId34"/>
+    <p:sldId id="269" r:id="rId35"/>
+    <p:sldId id="270" r:id="rId36"/>
+    <p:sldId id="271" r:id="rId37"/>
+    <p:sldId id="272" r:id="rId38"/>
+    <p:sldId id="273" r:id="rId39"/>
   </p:sldIdLst>
   <p:sldSz cx="12192000" cy="6858000"/>
   <p:notesSz cx="6858000" cy="9144000"/>
@@ -232,7 +234,7 @@
           <a:p>
             <a:fld id="{59529AA2-9184-4FD8-85F6-F3AB8DE8AA23}" type="datetimeFigureOut">
               <a:rPr lang="zh-CN" altLang="en-US" smtClean="0"/>
-              <a:t>2023/10/6</a:t>
+              <a:t>2025/10/15</a:t>
             </a:fld>
             <a:endParaRPr lang="zh-CN" altLang="en-US"/>
           </a:p>
@@ -704,7 +706,7 @@
           <a:p>
             <a:fld id="{443BBFFC-21AA-48E1-BBEA-3CD4665B2D1F}" type="slidenum">
               <a:rPr lang="zh-CN" altLang="en-US" smtClean="0"/>
-              <a:t>23</a:t>
+              <a:t>25</a:t>
             </a:fld>
             <a:endParaRPr lang="zh-CN" altLang="en-US"/>
           </a:p>
@@ -900,7 +902,7 @@
           <a:p>
             <a:fld id="{443BBFFC-21AA-48E1-BBEA-3CD4665B2D1F}" type="slidenum">
               <a:rPr lang="zh-CN" altLang="en-US" smtClean="0"/>
-              <a:t>32</a:t>
+              <a:t>34</a:t>
             </a:fld>
             <a:endParaRPr lang="zh-CN" altLang="en-US"/>
           </a:p>
@@ -984,7 +986,7 @@
           <a:p>
             <a:fld id="{443BBFFC-21AA-48E1-BBEA-3CD4665B2D1F}" type="slidenum">
               <a:rPr lang="zh-CN" altLang="en-US" smtClean="0"/>
-              <a:t>35</a:t>
+              <a:t>37</a:t>
             </a:fld>
             <a:endParaRPr lang="zh-CN" altLang="en-US"/>
           </a:p>
@@ -1112,7 +1114,7 @@
           <a:p>
             <a:fld id="{443BBFFC-21AA-48E1-BBEA-3CD4665B2D1F}" type="slidenum">
               <a:rPr lang="zh-CN" altLang="en-US" smtClean="0"/>
-              <a:t>36</a:t>
+              <a:t>38</a:t>
             </a:fld>
             <a:endParaRPr lang="zh-CN" altLang="en-US"/>
           </a:p>
@@ -1364,7 +1366,7 @@
               <a:pPr>
                 <a:defRPr/>
               </a:pPr>
-              <a:t>10/6/2023</a:t>
+              <a:t>10/15/2025</a:t>
             </a:fld>
             <a:endParaRPr lang="en-US" altLang="zh-TW"/>
           </a:p>
@@ -1590,7 +1592,7 @@
               <a:pPr>
                 <a:defRPr/>
               </a:pPr>
-              <a:t>10/6/2023</a:t>
+              <a:t>10/15/2025</a:t>
             </a:fld>
             <a:endParaRPr lang="en-US" altLang="zh-TW"/>
           </a:p>
@@ -1864,7 +1866,7 @@
               <a:pPr>
                 <a:defRPr/>
               </a:pPr>
-              <a:t>10/6/2023</a:t>
+              <a:t>10/15/2025</a:t>
             </a:fld>
             <a:endParaRPr lang="en-US" altLang="zh-TW"/>
           </a:p>
@@ -2290,7 +2292,7 @@
               <a:pPr>
                 <a:defRPr/>
               </a:pPr>
-              <a:t>10/6/2023</a:t>
+              <a:t>10/15/2025</a:t>
             </a:fld>
             <a:endParaRPr lang="en-US" altLang="zh-TW"/>
           </a:p>
@@ -2502,7 +2504,7 @@
               <a:pPr>
                 <a:defRPr/>
               </a:pPr>
-              <a:t>10/6/2023</a:t>
+              <a:t>10/15/2025</a:t>
             </a:fld>
             <a:endParaRPr lang="en-US" altLang="zh-TW"/>
           </a:p>
@@ -2863,7 +2865,7 @@
               <a:pPr>
                 <a:defRPr/>
               </a:pPr>
-              <a:t>10/6/2023</a:t>
+              <a:t>10/15/2025</a:t>
             </a:fld>
             <a:endParaRPr lang="en-US" altLang="zh-TW"/>
           </a:p>
@@ -3156,7 +3158,7 @@
               <a:pPr>
                 <a:defRPr/>
               </a:pPr>
-              <a:t>10/6/2023</a:t>
+              <a:t>10/15/2025</a:t>
             </a:fld>
             <a:endParaRPr lang="en-US" altLang="zh-TW"/>
           </a:p>
@@ -3553,7 +3555,7 @@
               <a:pPr>
                 <a:defRPr/>
               </a:pPr>
-              <a:t>10/6/2023</a:t>
+              <a:t>10/15/2025</a:t>
             </a:fld>
             <a:endParaRPr lang="en-US" altLang="zh-TW"/>
           </a:p>
@@ -3689,7 +3691,7 @@
               <a:pPr>
                 <a:defRPr/>
               </a:pPr>
-              <a:t>10/6/2023</a:t>
+              <a:t>10/15/2025</a:t>
             </a:fld>
             <a:endParaRPr lang="en-US" altLang="zh-TW"/>
           </a:p>
@@ -3878,7 +3880,7 @@
               <a:pPr>
                 <a:defRPr/>
               </a:pPr>
-              <a:t>10/6/2023</a:t>
+              <a:t>10/15/2025</a:t>
             </a:fld>
             <a:endParaRPr lang="en-US" altLang="zh-TW"/>
           </a:p>
@@ -4250,7 +4252,7 @@
               <a:pPr>
                 <a:defRPr/>
               </a:pPr>
-              <a:t>10/6/2023</a:t>
+              <a:t>10/15/2025</a:t>
             </a:fld>
             <a:endParaRPr lang="en-US" altLang="zh-TW"/>
           </a:p>
@@ -4662,7 +4664,7 @@
               <a:pPr>
                 <a:defRPr/>
               </a:pPr>
-              <a:t>10/6/2023</a:t>
+              <a:t>10/15/2025</a:t>
             </a:fld>
             <a:endParaRPr lang="en-US" altLang="zh-TW"/>
           </a:p>
@@ -4891,7 +4893,7 @@
               <a:pPr>
                 <a:defRPr/>
               </a:pPr>
-              <a:t>10/6/2023</a:t>
+              <a:t>10/15/2025</a:t>
             </a:fld>
             <a:endParaRPr lang="en-US" altLang="zh-TW"/>
           </a:p>
@@ -5828,7 +5830,7 @@
           <a:graphicData uri="http://schemas.openxmlformats.org/presentationml/2006/ole">
             <mc:AlternateContent xmlns:mc="http://schemas.openxmlformats.org/markup-compatibility/2006">
               <mc:Choice xmlns:v="urn:schemas-microsoft-com:vml" Requires="v">
-                <p:oleObj spid="_x0000_s4347" name="Equation" r:id="rId3" imgW="1206500" imgH="228600" progId="Equation.DSMT4">
+                <p:oleObj spid="_x0000_s4365" name="Equation" r:id="rId3" imgW="1206500" imgH="228600" progId="Equation.DSMT4">
                   <p:embed/>
                 </p:oleObj>
               </mc:Choice>
@@ -6109,7 +6111,7 @@
           <a:graphicData uri="http://schemas.openxmlformats.org/presentationml/2006/ole">
             <mc:AlternateContent xmlns:mc="http://schemas.openxmlformats.org/markup-compatibility/2006">
               <mc:Choice xmlns:v="urn:schemas-microsoft-com:vml" Requires="v">
-                <p:oleObj spid="_x0000_s4348" name="Equation" r:id="rId5" imgW="2946400" imgH="419100" progId="Equation.DSMT4">
+                <p:oleObj spid="_x0000_s4366" name="Equation" r:id="rId5" imgW="2946400" imgH="419100" progId="Equation.DSMT4">
                   <p:embed/>
                 </p:oleObj>
               </mc:Choice>
@@ -6396,7 +6398,7 @@
           <a:graphicData uri="http://schemas.openxmlformats.org/presentationml/2006/ole">
             <mc:AlternateContent xmlns:mc="http://schemas.openxmlformats.org/markup-compatibility/2006">
               <mc:Choice xmlns:v="urn:schemas-microsoft-com:vml" Requires="v">
-                <p:oleObj spid="_x0000_s4349" name="Equation" r:id="rId7" imgW="2374900" imgH="431800" progId="Equation.DSMT4">
+                <p:oleObj spid="_x0000_s4367" name="Equation" r:id="rId7" imgW="2374900" imgH="431800" progId="Equation.DSMT4">
                   <p:embed/>
                 </p:oleObj>
               </mc:Choice>
@@ -6630,7 +6632,7 @@
           <a:graphicData uri="http://schemas.openxmlformats.org/presentationml/2006/ole">
             <mc:AlternateContent xmlns:mc="http://schemas.openxmlformats.org/markup-compatibility/2006">
               <mc:Choice xmlns:v="urn:schemas-microsoft-com:vml" Requires="v">
-                <p:oleObj spid="_x0000_s5537" name="Equation" r:id="rId3" imgW="3086100" imgH="914400" progId="Equation.DSMT4">
+                <p:oleObj spid="_x0000_s5567" name="Equation" r:id="rId3" imgW="3086100" imgH="914400" progId="Equation.DSMT4">
                   <p:embed/>
                 </p:oleObj>
               </mc:Choice>
@@ -6731,7 +6733,7 @@
           <a:graphicData uri="http://schemas.openxmlformats.org/presentationml/2006/ole">
             <mc:AlternateContent xmlns:mc="http://schemas.openxmlformats.org/markup-compatibility/2006">
               <mc:Choice xmlns:v="urn:schemas-microsoft-com:vml" Requires="v">
-                <p:oleObj spid="_x0000_s5538" name="Equation" r:id="rId5" imgW="2184400" imgH="393700" progId="Equation.DSMT4">
+                <p:oleObj spid="_x0000_s5568" name="Equation" r:id="rId5" imgW="2184400" imgH="393700" progId="Equation.DSMT4">
                   <p:embed/>
                 </p:oleObj>
               </mc:Choice>
@@ -6832,7 +6834,7 @@
           <a:graphicData uri="http://schemas.openxmlformats.org/presentationml/2006/ole">
             <mc:AlternateContent xmlns:mc="http://schemas.openxmlformats.org/markup-compatibility/2006">
               <mc:Choice xmlns:v="urn:schemas-microsoft-com:vml" Requires="v">
-                <p:oleObj spid="_x0000_s5539" name="Equation" r:id="rId7" imgW="2209800" imgH="431800" progId="Equation.DSMT4">
+                <p:oleObj spid="_x0000_s5569" name="Equation" r:id="rId7" imgW="2209800" imgH="431800" progId="Equation.DSMT4">
                   <p:embed/>
                 </p:oleObj>
               </mc:Choice>
@@ -6933,7 +6935,7 @@
           <a:graphicData uri="http://schemas.openxmlformats.org/presentationml/2006/ole">
             <mc:AlternateContent xmlns:mc="http://schemas.openxmlformats.org/markup-compatibility/2006">
               <mc:Choice xmlns:v="urn:schemas-microsoft-com:vml" Requires="v">
-                <p:oleObj spid="_x0000_s5540" name="Equation" r:id="rId9" imgW="1206500" imgH="228600" progId="Equation.DSMT4">
+                <p:oleObj spid="_x0000_s5570" name="Equation" r:id="rId9" imgW="1206500" imgH="228600" progId="Equation.DSMT4">
                   <p:embed/>
                 </p:oleObj>
               </mc:Choice>
@@ -7028,7 +7030,7 @@
           <a:graphicData uri="http://schemas.openxmlformats.org/presentationml/2006/ole">
             <mc:AlternateContent xmlns:mc="http://schemas.openxmlformats.org/markup-compatibility/2006">
               <mc:Choice xmlns:v="urn:schemas-microsoft-com:vml" Requires="v">
-                <p:oleObj spid="_x0000_s5541" name="Equation" r:id="rId11" imgW="2946400" imgH="419100" progId="Equation.DSMT4">
+                <p:oleObj spid="_x0000_s5571" name="Equation" r:id="rId11" imgW="2946400" imgH="419100" progId="Equation.DSMT4">
                   <p:embed/>
                 </p:oleObj>
               </mc:Choice>
@@ -7966,7 +7968,7 @@
           <a:graphicData uri="http://schemas.openxmlformats.org/presentationml/2006/ole">
             <mc:AlternateContent xmlns:mc="http://schemas.openxmlformats.org/markup-compatibility/2006">
               <mc:Choice xmlns:v="urn:schemas-microsoft-com:vml" Requires="v">
-                <p:oleObj spid="_x0000_s6395" name="Equation" r:id="rId3" imgW="3733800" imgH="1397000" progId="Equation.DSMT4">
+                <p:oleObj spid="_x0000_s6413" name="Equation" r:id="rId3" imgW="3733800" imgH="1397000" progId="Equation.DSMT4">
                   <p:embed/>
                 </p:oleObj>
               </mc:Choice>
@@ -8448,7 +8450,7 @@
           <a:graphicData uri="http://schemas.openxmlformats.org/presentationml/2006/ole">
             <mc:AlternateContent xmlns:mc="http://schemas.openxmlformats.org/markup-compatibility/2006">
               <mc:Choice xmlns:v="urn:schemas-microsoft-com:vml" Requires="v">
-                <p:oleObj spid="_x0000_s6396" name="Equation" r:id="rId5" imgW="508000" imgH="228600" progId="Equation.DSMT4">
+                <p:oleObj spid="_x0000_s6414" name="Equation" r:id="rId5" imgW="508000" imgH="228600" progId="Equation.DSMT4">
                   <p:embed/>
                 </p:oleObj>
               </mc:Choice>
@@ -8736,7 +8738,7 @@
           <a:graphicData uri="http://schemas.openxmlformats.org/presentationml/2006/ole">
             <mc:AlternateContent xmlns:mc="http://schemas.openxmlformats.org/markup-compatibility/2006">
               <mc:Choice xmlns:v="urn:schemas-microsoft-com:vml" Requires="v">
-                <p:oleObj spid="_x0000_s6397" name="Equation" r:id="rId7" imgW="2489200" imgH="431800" progId="Equation.DSMT4">
+                <p:oleObj spid="_x0000_s6415" name="Equation" r:id="rId7" imgW="2489200" imgH="431800" progId="Equation.DSMT4">
                   <p:embed/>
                 </p:oleObj>
               </mc:Choice>
@@ -9133,7 +9135,7 @@
           <a:graphicData uri="http://schemas.openxmlformats.org/presentationml/2006/ole">
             <mc:AlternateContent xmlns:mc="http://schemas.openxmlformats.org/markup-compatibility/2006">
               <mc:Choice xmlns:v="urn:schemas-microsoft-com:vml" Requires="v">
-                <p:oleObj spid="_x0000_s7269" name="Equation" r:id="rId3" imgW="3124200" imgH="1778000" progId="Equation.DSMT4">
+                <p:oleObj spid="_x0000_s7275" name="Equation" r:id="rId3" imgW="3124200" imgH="1778000" progId="Equation.DSMT4">
                   <p:embed/>
                 </p:oleObj>
               </mc:Choice>
@@ -10678,7 +10680,7 @@
           <a:graphicData uri="http://schemas.openxmlformats.org/presentationml/2006/ole">
             <mc:AlternateContent xmlns:mc="http://schemas.openxmlformats.org/markup-compatibility/2006">
               <mc:Choice xmlns:v="urn:schemas-microsoft-com:vml" Requires="v">
-                <p:oleObj spid="_x0000_s8638" name="Equation" r:id="rId4" imgW="1968500" imgH="228600" progId="Equation.DSMT4">
+                <p:oleObj spid="_x0000_s8656" name="Equation" r:id="rId4" imgW="1968500" imgH="228600" progId="Equation.DSMT4">
                   <p:embed/>
                 </p:oleObj>
               </mc:Choice>
@@ -11340,7 +11342,7 @@
           <a:graphicData uri="http://schemas.openxmlformats.org/presentationml/2006/ole">
             <mc:AlternateContent xmlns:mc="http://schemas.openxmlformats.org/markup-compatibility/2006">
               <mc:Choice xmlns:v="urn:schemas-microsoft-com:vml" Requires="v">
-                <p:oleObj spid="_x0000_s8639" name="Equation" r:id="rId6" imgW="2603500" imgH="457200" progId="Equation.DSMT4">
+                <p:oleObj spid="_x0000_s8657" name="Equation" r:id="rId6" imgW="2603500" imgH="457200" progId="Equation.DSMT4">
                   <p:embed/>
                 </p:oleObj>
               </mc:Choice>
@@ -11622,7 +11624,7 @@
           <a:graphicData uri="http://schemas.openxmlformats.org/presentationml/2006/ole">
             <mc:AlternateContent xmlns:mc="http://schemas.openxmlformats.org/markup-compatibility/2006">
               <mc:Choice xmlns:v="urn:schemas-microsoft-com:vml" Requires="v">
-                <p:oleObj spid="_x0000_s8640" name="Equation" r:id="rId8" imgW="4051300" imgH="482600" progId="Equation.DSMT4">
+                <p:oleObj spid="_x0000_s8658" name="Equation" r:id="rId8" imgW="4051300" imgH="482600" progId="Equation.DSMT4">
                   <p:embed/>
                 </p:oleObj>
               </mc:Choice>
@@ -12093,7 +12095,7 @@
           <a:graphicData uri="http://schemas.openxmlformats.org/presentationml/2006/ole">
             <mc:AlternateContent xmlns:mc="http://schemas.openxmlformats.org/markup-compatibility/2006">
               <mc:Choice xmlns:v="urn:schemas-microsoft-com:vml" Requires="v">
-                <p:oleObj spid="_x0000_s9695" name="Equation" r:id="rId4" imgW="2209800" imgH="482600" progId="Equation.DSMT4">
+                <p:oleObj spid="_x0000_s9725" name="Equation" r:id="rId4" imgW="2209800" imgH="482600" progId="Equation.DSMT4">
                   <p:embed/>
                 </p:oleObj>
               </mc:Choice>
@@ -12381,7 +12383,7 @@
           <a:graphicData uri="http://schemas.openxmlformats.org/presentationml/2006/ole">
             <mc:AlternateContent xmlns:mc="http://schemas.openxmlformats.org/markup-compatibility/2006">
               <mc:Choice xmlns:v="urn:schemas-microsoft-com:vml" Requires="v">
-                <p:oleObj spid="_x0000_s9696" name="Equation" r:id="rId6" imgW="3200400" imgH="482600" progId="Equation.DSMT4">
+                <p:oleObj spid="_x0000_s9726" name="Equation" r:id="rId6" imgW="3200400" imgH="482600" progId="Equation.DSMT4">
                   <p:embed/>
                 </p:oleObj>
               </mc:Choice>
@@ -12482,7 +12484,7 @@
           <a:graphicData uri="http://schemas.openxmlformats.org/presentationml/2006/ole">
             <mc:AlternateContent xmlns:mc="http://schemas.openxmlformats.org/markup-compatibility/2006">
               <mc:Choice xmlns:v="urn:schemas-microsoft-com:vml" Requires="v">
-                <p:oleObj spid="_x0000_s9697" name="Equation" r:id="rId8" imgW="1435100" imgH="393700" progId="Equation.DSMT4">
+                <p:oleObj spid="_x0000_s9727" name="Equation" r:id="rId8" imgW="1435100" imgH="393700" progId="Equation.DSMT4">
                   <p:embed/>
                 </p:oleObj>
               </mc:Choice>
@@ -12583,7 +12585,7 @@
           <a:graphicData uri="http://schemas.openxmlformats.org/presentationml/2006/ole">
             <mc:AlternateContent xmlns:mc="http://schemas.openxmlformats.org/markup-compatibility/2006">
               <mc:Choice xmlns:v="urn:schemas-microsoft-com:vml" Requires="v">
-                <p:oleObj spid="_x0000_s9698" name="Equation" r:id="rId10" imgW="495085" imgH="393529" progId="Equation.DSMT4">
+                <p:oleObj spid="_x0000_s9728" name="Equation" r:id="rId10" imgW="495085" imgH="393529" progId="Equation.DSMT4">
                   <p:embed/>
                 </p:oleObj>
               </mc:Choice>
@@ -12869,7 +12871,7 @@
           <a:graphicData uri="http://schemas.openxmlformats.org/presentationml/2006/ole">
             <mc:AlternateContent xmlns:mc="http://schemas.openxmlformats.org/markup-compatibility/2006">
               <mc:Choice xmlns:v="urn:schemas-microsoft-com:vml" Requires="v">
-                <p:oleObj spid="_x0000_s9699" name="Equation" r:id="rId12" imgW="2476500" imgH="990600" progId="Equation.DSMT4">
+                <p:oleObj spid="_x0000_s9729" name="Equation" r:id="rId12" imgW="2476500" imgH="990600" progId="Equation.DSMT4">
                   <p:embed/>
                 </p:oleObj>
               </mc:Choice>
@@ -14062,7 +14064,7 @@
           <a:graphicData uri="http://schemas.openxmlformats.org/presentationml/2006/ole">
             <mc:AlternateContent xmlns:mc="http://schemas.openxmlformats.org/markup-compatibility/2006">
               <mc:Choice xmlns:v="urn:schemas-microsoft-com:vml" Requires="v">
-                <p:oleObj spid="_x0000_s11243" name="Equation" r:id="rId3" imgW="2628900" imgH="482600" progId="Equation.DSMT4">
+                <p:oleObj spid="_x0000_s15417" name="Equation" r:id="rId3" imgW="2628900" imgH="482600" progId="Equation.DSMT4">
                   <p:embed/>
                 </p:oleObj>
               </mc:Choice>
@@ -14356,7 +14358,7 @@
           <a:graphicData uri="http://schemas.openxmlformats.org/presentationml/2006/ole">
             <mc:AlternateContent xmlns:mc="http://schemas.openxmlformats.org/markup-compatibility/2006">
               <mc:Choice xmlns:v="urn:schemas-microsoft-com:vml" Requires="v">
-                <p:oleObj spid="_x0000_s11244" name="Equation" r:id="rId5" imgW="1104900" imgH="203200" progId="Equation.DSMT4">
+                <p:oleObj spid="_x0000_s15418" name="Equation" r:id="rId5" imgW="1104900" imgH="203200" progId="Equation.DSMT4">
                   <p:embed/>
                 </p:oleObj>
               </mc:Choice>
@@ -14457,7 +14459,7 @@
           <a:graphicData uri="http://schemas.openxmlformats.org/presentationml/2006/ole">
             <mc:AlternateContent xmlns:mc="http://schemas.openxmlformats.org/markup-compatibility/2006">
               <mc:Choice xmlns:v="urn:schemas-microsoft-com:vml" Requires="v">
-                <p:oleObj spid="_x0000_s11245" name="Equation" r:id="rId7" imgW="152334" imgH="228501" progId="Equation.DSMT4">
+                <p:oleObj spid="_x0000_s15419" name="Equation" r:id="rId7" imgW="152334" imgH="228501" progId="Equation.DSMT4">
                   <p:embed/>
                 </p:oleObj>
               </mc:Choice>
@@ -14558,7 +14560,7 @@
           <a:graphicData uri="http://schemas.openxmlformats.org/presentationml/2006/ole">
             <mc:AlternateContent xmlns:mc="http://schemas.openxmlformats.org/markup-compatibility/2006">
               <mc:Choice xmlns:v="urn:schemas-microsoft-com:vml" Requires="v">
-                <p:oleObj spid="_x0000_s11246" name="Equation" r:id="rId9" imgW="202936" imgH="177569" progId="Equation.DSMT4">
+                <p:oleObj spid="_x0000_s15420" name="Equation" r:id="rId9" imgW="202936" imgH="177569" progId="Equation.DSMT4">
                   <p:embed/>
                 </p:oleObj>
               </mc:Choice>
@@ -14844,7 +14846,7 @@
           <a:graphicData uri="http://schemas.openxmlformats.org/presentationml/2006/ole">
             <mc:AlternateContent xmlns:mc="http://schemas.openxmlformats.org/markup-compatibility/2006">
               <mc:Choice xmlns:v="urn:schemas-microsoft-com:vml" Requires="v">
-                <p:oleObj spid="_x0000_s11247" name="Equation" r:id="rId11" imgW="114201" imgH="139579" progId="Equation.DSMT4">
+                <p:oleObj spid="_x0000_s15421" name="Equation" r:id="rId11" imgW="114201" imgH="139579" progId="Equation.DSMT4">
                   <p:embed/>
                 </p:oleObj>
               </mc:Choice>
@@ -15130,7 +15132,7 @@
           <a:graphicData uri="http://schemas.openxmlformats.org/presentationml/2006/ole">
             <mc:AlternateContent xmlns:mc="http://schemas.openxmlformats.org/markup-compatibility/2006">
               <mc:Choice xmlns:v="urn:schemas-microsoft-com:vml" Requires="v">
-                <p:oleObj spid="_x0000_s11248" name="Equation" r:id="rId13" imgW="190335" imgH="177646" progId="Equation.DSMT4">
+                <p:oleObj spid="_x0000_s15422" name="Equation" r:id="rId13" imgW="190335" imgH="177646" progId="Equation.DSMT4">
                   <p:embed/>
                 </p:oleObj>
               </mc:Choice>
@@ -15617,7 +15619,7 @@
           <a:graphicData uri="http://schemas.openxmlformats.org/presentationml/2006/ole">
             <mc:AlternateContent xmlns:mc="http://schemas.openxmlformats.org/markup-compatibility/2006">
               <mc:Choice xmlns:v="urn:schemas-microsoft-com:vml" Requires="v">
-                <p:oleObj spid="_x0000_s11249" name="Equation" r:id="rId15" imgW="291973" imgH="253890" progId="Equation.DSMT4">
+                <p:oleObj spid="_x0000_s15423" name="Equation" r:id="rId15" imgW="291973" imgH="253890" progId="Equation.DSMT4">
                   <p:embed/>
                 </p:oleObj>
               </mc:Choice>
@@ -15903,7 +15905,7 @@
           <a:graphicData uri="http://schemas.openxmlformats.org/presentationml/2006/ole">
             <mc:AlternateContent xmlns:mc="http://schemas.openxmlformats.org/markup-compatibility/2006">
               <mc:Choice xmlns:v="urn:schemas-microsoft-com:vml" Requires="v">
-                <p:oleObj spid="_x0000_s11250" name="Equation" r:id="rId17" imgW="253890" imgH="330057" progId="Equation.DSMT4">
+                <p:oleObj spid="_x0000_s15424" name="Equation" r:id="rId17" imgW="253890" imgH="330057" progId="Equation.DSMT4">
                   <p:embed/>
                 </p:oleObj>
               </mc:Choice>
@@ -16004,7 +16006,7 @@
           <a:graphicData uri="http://schemas.openxmlformats.org/presentationml/2006/ole">
             <mc:AlternateContent xmlns:mc="http://schemas.openxmlformats.org/markup-compatibility/2006">
               <mc:Choice xmlns:v="urn:schemas-microsoft-com:vml" Requires="v">
-                <p:oleObj spid="_x0000_s11251" name="Equation" r:id="rId19" imgW="2171700" imgH="393700" progId="Equation.DSMT4">
+                <p:oleObj spid="_x0000_s15425" name="Equation" r:id="rId19" imgW="2171700" imgH="393700" progId="Equation.DSMT4">
                   <p:embed/>
                 </p:oleObj>
               </mc:Choice>
@@ -16289,7 +16291,7 @@
           <a:graphicData uri="http://schemas.openxmlformats.org/presentationml/2006/ole">
             <mc:AlternateContent xmlns:mc="http://schemas.openxmlformats.org/markup-compatibility/2006">
               <mc:Choice xmlns:v="urn:schemas-microsoft-com:vml" Requires="v">
-                <p:oleObj spid="_x0000_s11252" name="Equation" r:id="rId21" imgW="342751" imgH="203112" progId="Equation.DSMT4">
+                <p:oleObj spid="_x0000_s15426" name="Equation" r:id="rId21" imgW="342751" imgH="203112" progId="Equation.DSMT4">
                   <p:embed/>
                 </p:oleObj>
               </mc:Choice>
@@ -16390,7 +16392,7 @@
           <a:graphicData uri="http://schemas.openxmlformats.org/presentationml/2006/ole">
             <mc:AlternateContent xmlns:mc="http://schemas.openxmlformats.org/markup-compatibility/2006">
               <mc:Choice xmlns:v="urn:schemas-microsoft-com:vml" Requires="v">
-                <p:oleObj spid="_x0000_s11253" name="Equation" r:id="rId23" imgW="1587500" imgH="762000" progId="Equation.DSMT4">
+                <p:oleObj spid="_x0000_s15427" name="Equation" r:id="rId23" imgW="1587500" imgH="762000" progId="Equation.DSMT4">
                   <p:embed/>
                 </p:oleObj>
               </mc:Choice>
@@ -17140,7 +17142,7 @@
             <a:graphicData uri="http://schemas.openxmlformats.org/presentationml/2006/ole">
               <mc:AlternateContent xmlns:mc="http://schemas.openxmlformats.org/markup-compatibility/2006">
                 <mc:Choice xmlns:v="urn:schemas-microsoft-com:vml" Requires="v">
-                  <p:oleObj spid="_x0000_s11254" name="Equation" r:id="rId25" imgW="1498600" imgH="330200" progId="Equation.DSMT4">
+                  <p:oleObj spid="_x0000_s15428" name="Equation" r:id="rId25" imgW="1498600" imgH="330200" progId="Equation.DSMT4">
                     <p:embed/>
                   </p:oleObj>
                 </mc:Choice>
@@ -17251,7 +17253,7 @@
             <a:graphicData uri="http://schemas.openxmlformats.org/presentationml/2006/ole">
               <mc:AlternateContent xmlns:mc="http://schemas.openxmlformats.org/markup-compatibility/2006">
                 <mc:Choice xmlns:v="urn:schemas-microsoft-com:vml" Requires="v">
-                  <p:oleObj spid="_x0000_s11255" name="Equation" r:id="rId27" imgW="1511300" imgH="330200" progId="Equation.DSMT4">
+                  <p:oleObj spid="_x0000_s15429" name="Equation" r:id="rId27" imgW="1511300" imgH="330200" progId="Equation.DSMT4">
                     <p:embed/>
                   </p:oleObj>
                 </mc:Choice>
@@ -18322,7 +18324,7 @@
           <a:graphicData uri="http://schemas.openxmlformats.org/presentationml/2006/ole">
             <mc:AlternateContent xmlns:mc="http://schemas.openxmlformats.org/markup-compatibility/2006">
               <mc:Choice xmlns:v="urn:schemas-microsoft-com:vml" Requires="v">
-                <p:oleObj spid="_x0000_s11598" name="Equation" r:id="rId3" imgW="1587500" imgH="762000" progId="Equation.DSMT4">
+                <p:oleObj spid="_x0000_s11622" name="Equation" r:id="rId3" imgW="1587500" imgH="762000" progId="Equation.DSMT4">
                   <p:embed/>
                 </p:oleObj>
               </mc:Choice>
@@ -18929,7 +18931,7 @@
             <a:graphicData uri="http://schemas.openxmlformats.org/presentationml/2006/ole">
               <mc:AlternateContent xmlns:mc="http://schemas.openxmlformats.org/markup-compatibility/2006">
                 <mc:Choice xmlns:v="urn:schemas-microsoft-com:vml" Requires="v">
-                  <p:oleObj spid="_x0000_s11599" name="Equation" r:id="rId6" imgW="520474" imgH="203112" progId="Equation.DSMT4">
+                  <p:oleObj spid="_x0000_s11623" name="Equation" r:id="rId6" imgW="520474" imgH="203112" progId="Equation.DSMT4">
                     <p:embed/>
                   </p:oleObj>
                 </mc:Choice>
@@ -19034,7 +19036,7 @@
             <a:graphicData uri="http://schemas.openxmlformats.org/presentationml/2006/ole">
               <mc:AlternateContent xmlns:mc="http://schemas.openxmlformats.org/markup-compatibility/2006">
                 <mc:Choice xmlns:v="urn:schemas-microsoft-com:vml" Requires="v">
-                  <p:oleObj spid="_x0000_s11600" name="Equation" r:id="rId8" imgW="152268" imgH="164957" progId="Equation.DSMT4">
+                  <p:oleObj spid="_x0000_s11624" name="Equation" r:id="rId8" imgW="152268" imgH="164957" progId="Equation.DSMT4">
                     <p:embed/>
                   </p:oleObj>
                 </mc:Choice>
@@ -19139,7 +19141,7 @@
             <a:graphicData uri="http://schemas.openxmlformats.org/presentationml/2006/ole">
               <mc:AlternateContent xmlns:mc="http://schemas.openxmlformats.org/markup-compatibility/2006">
                 <mc:Choice xmlns:v="urn:schemas-microsoft-com:vml" Requires="v">
-                  <p:oleObj spid="_x0000_s11601" name="Equation" r:id="rId10" imgW="1587500" imgH="711200" progId="Equation.DSMT4">
+                  <p:oleObj spid="_x0000_s11625" name="Equation" r:id="rId10" imgW="1587500" imgH="711200" progId="Equation.DSMT4">
                     <p:embed/>
                   </p:oleObj>
                 </mc:Choice>
@@ -19677,52 +19679,6 @@
             </a:r>
           </a:p>
           <a:p>
-            <a:r>
-              <a:rPr lang="en-US" altLang="zh-CN" dirty="0"/>
-              <a:t>For its frequency components, the frequencies are,</a:t>
-            </a:r>
-          </a:p>
-          <a:p>
-            <a:endParaRPr lang="en-US" altLang="zh-CN" dirty="0"/>
-          </a:p>
-          <a:p>
-            <a:endParaRPr lang="en-US" altLang="zh-CN" dirty="0">
-              <a:solidFill>
-                <a:srgbClr val="000000"/>
-              </a:solidFill>
-            </a:endParaRPr>
-          </a:p>
-          <a:p>
-            <a:r>
-              <a:rPr lang="en-US" altLang="zh-CN" dirty="0">
-                <a:solidFill>
-                  <a:srgbClr val="000000"/>
-                </a:solidFill>
-              </a:rPr>
-              <a:t>Its DFT is computed as</a:t>
-            </a:r>
-          </a:p>
-          <a:p>
-            <a:endParaRPr lang="en-US" altLang="zh-CN" dirty="0">
-              <a:solidFill>
-                <a:srgbClr val="000000"/>
-              </a:solidFill>
-            </a:endParaRPr>
-          </a:p>
-          <a:p>
-            <a:r>
-              <a:rPr lang="en-US" altLang="zh-CN" dirty="0">
-                <a:solidFill>
-                  <a:srgbClr val="000000"/>
-                </a:solidFill>
-              </a:rPr>
-              <a:t>Usually, we write it as, </a:t>
-            </a:r>
-          </a:p>
-          <a:p>
-            <a:endParaRPr lang="en-US" altLang="zh-CN" dirty="0"/>
-          </a:p>
-          <a:p>
             <a:endParaRPr lang="zh-CN" altLang="en-US" dirty="0"/>
           </a:p>
         </p:txBody>
@@ -19935,7 +19891,7 @@
           <a:graphicData uri="http://schemas.openxmlformats.org/presentationml/2006/ole">
             <mc:AlternateContent xmlns:mc="http://schemas.openxmlformats.org/markup-compatibility/2006">
               <mc:Choice xmlns:v="urn:schemas-microsoft-com:vml" Requires="v">
-                <p:oleObj spid="_x0000_s12622" name="Equation" r:id="rId3" imgW="1257300" imgH="228600" progId="Equation.DSMT4">
+                <p:oleObj spid="_x0000_s16395" name="Equation" r:id="rId3" imgW="1257300" imgH="228600" progId="Equation.DSMT4">
                   <p:embed/>
                 </p:oleObj>
               </mc:Choice>
@@ -20078,12 +20034,406 @@
           </a:extLst>
         </p:spPr>
       </p:pic>
+      <p:pic>
+        <p:nvPicPr>
+          <p:cNvPr id="16388" name="Picture 4" descr="https://i-blog.csdnimg.cn/blog_migrate/a90f029b5a1b4e7f4b66c435ee012b4c.png">
+            <a:extLst>
+              <a:ext uri="{FF2B5EF4-FFF2-40B4-BE49-F238E27FC236}">
+                <a16:creationId xmlns:a16="http://schemas.microsoft.com/office/drawing/2014/main" id="{08F793C6-CA82-46AA-9622-AEC1E79B6442}"/>
+              </a:ext>
+            </a:extLst>
+          </p:cNvPr>
+          <p:cNvPicPr>
+            <a:picLocks noChangeAspect="1" noChangeArrowheads="1"/>
+          </p:cNvPicPr>
+          <p:nvPr/>
+        </p:nvPicPr>
+        <p:blipFill>
+          <a:blip r:embed="rId6">
+            <a:extLst>
+              <a:ext uri="{28A0092B-C50C-407E-A947-70E740481C1C}">
+                <a14:useLocalDpi xmlns:a14="http://schemas.microsoft.com/office/drawing/2010/main" val="0"/>
+              </a:ext>
+            </a:extLst>
+          </a:blip>
+          <a:srcRect/>
+          <a:stretch>
+            <a:fillRect/>
+          </a:stretch>
+        </p:blipFill>
+        <p:spPr bwMode="auto">
+          <a:xfrm>
+            <a:off x="266148" y="2358138"/>
+            <a:ext cx="5334000" cy="4000500"/>
+          </a:xfrm>
+          <a:prstGeom prst="rect">
+            <a:avLst/>
+          </a:prstGeom>
+          <a:noFill/>
+          <a:extLst>
+            <a:ext uri="{909E8E84-426E-40DD-AFC4-6F175D3DCCD1}">
+              <a14:hiddenFill xmlns:a14="http://schemas.microsoft.com/office/drawing/2010/main">
+                <a:solidFill>
+                  <a:srgbClr val="FFFFFF"/>
+                </a:solidFill>
+              </a14:hiddenFill>
+            </a:ext>
+          </a:extLst>
+        </p:spPr>
+      </p:pic>
+      <p:pic>
+        <p:nvPicPr>
+          <p:cNvPr id="16390" name="Picture 6" descr="https://i-blog.csdnimg.cn/blog_migrate/957ed6f05d6fe1e01482832e347daffe.png">
+            <a:extLst>
+              <a:ext uri="{FF2B5EF4-FFF2-40B4-BE49-F238E27FC236}">
+                <a16:creationId xmlns:a16="http://schemas.microsoft.com/office/drawing/2014/main" id="{CD7620BB-F11D-4535-A954-5EED875AAB0E}"/>
+              </a:ext>
+            </a:extLst>
+          </p:cNvPr>
+          <p:cNvPicPr>
+            <a:picLocks noChangeAspect="1" noChangeArrowheads="1"/>
+          </p:cNvPicPr>
+          <p:nvPr/>
+        </p:nvPicPr>
+        <p:blipFill>
+          <a:blip r:embed="rId7">
+            <a:extLst>
+              <a:ext uri="{28A0092B-C50C-407E-A947-70E740481C1C}">
+                <a14:useLocalDpi xmlns:a14="http://schemas.microsoft.com/office/drawing/2010/main" val="0"/>
+              </a:ext>
+            </a:extLst>
+          </a:blip>
+          <a:srcRect/>
+          <a:stretch>
+            <a:fillRect/>
+          </a:stretch>
+        </p:blipFill>
+        <p:spPr bwMode="auto">
+          <a:xfrm>
+            <a:off x="5367129" y="2433638"/>
+            <a:ext cx="5334000" cy="4000500"/>
+          </a:xfrm>
+          <a:prstGeom prst="rect">
+            <a:avLst/>
+          </a:prstGeom>
+          <a:noFill/>
+          <a:extLst>
+            <a:ext uri="{909E8E84-426E-40DD-AFC4-6F175D3DCCD1}">
+              <a14:hiddenFill xmlns:a14="http://schemas.microsoft.com/office/drawing/2010/main">
+                <a:solidFill>
+                  <a:srgbClr val="FFFFFF"/>
+                </a:solidFill>
+              </a14:hiddenFill>
+            </a:ext>
+          </a:extLst>
+        </p:spPr>
+      </p:pic>
+    </p:spTree>
+    <p:extLst>
+      <p:ext uri="{BB962C8B-B14F-4D97-AF65-F5344CB8AC3E}">
+        <p14:creationId xmlns:p14="http://schemas.microsoft.com/office/powerpoint/2010/main" val="3460330556"/>
+      </p:ext>
+    </p:extLst>
+  </p:cSld>
+  <p:clrMapOvr>
+    <a:masterClrMapping/>
+  </p:clrMapOvr>
+</p:sld>
+</file>
+
+<file path=ppt/slides/slide19.xml><?xml version="1.0" encoding="utf-8"?>
+<p:sld xmlns:a="http://schemas.openxmlformats.org/drawingml/2006/main" xmlns:r="http://schemas.openxmlformats.org/officeDocument/2006/relationships" xmlns:p="http://schemas.openxmlformats.org/presentationml/2006/main">
+  <p:cSld>
+    <p:spTree>
+      <p:nvGrpSpPr>
+        <p:cNvPr id="1" name=""/>
+        <p:cNvGrpSpPr/>
+        <p:nvPr/>
+      </p:nvGrpSpPr>
+      <p:grpSpPr>
+        <a:xfrm>
+          <a:off x="0" y="0"/>
+          <a:ext cx="0" cy="0"/>
+          <a:chOff x="0" y="0"/>
+          <a:chExt cx="0" cy="0"/>
+        </a:xfrm>
+      </p:grpSpPr>
+      <p:sp>
+        <p:nvSpPr>
+          <p:cNvPr id="19458" name="Rectangle 2">
+            <a:extLst>
+              <a:ext uri="{FF2B5EF4-FFF2-40B4-BE49-F238E27FC236}">
+                <a16:creationId xmlns:a16="http://schemas.microsoft.com/office/drawing/2014/main" id="{10D893F2-C47B-4750-855D-7998CBF53E89}"/>
+              </a:ext>
+            </a:extLst>
+          </p:cNvPr>
+          <p:cNvSpPr>
+            <a:spLocks noGrp="1" noChangeArrowheads="1"/>
+          </p:cNvSpPr>
+          <p:nvPr>
+            <p:ph type="title"/>
+          </p:nvPr>
+        </p:nvSpPr>
+        <p:spPr/>
+        <p:txBody>
+          <a:bodyPr>
+            <a:normAutofit/>
+          </a:bodyPr>
+          <a:lstStyle/>
+          <a:p>
+            <a:r>
+              <a:rPr lang="en-US" altLang="zh-CN" dirty="0">
+                <a:ea typeface="宋体" panose="02010600030101010101" pitchFamily="2" charset="-122"/>
+              </a:rPr>
+              <a:t>Discrete Fourier Transform (DFT) in 1D Case</a:t>
+            </a:r>
+          </a:p>
+        </p:txBody>
+      </p:sp>
+      <p:sp>
+        <p:nvSpPr>
+          <p:cNvPr id="2" name="内容占位符 1">
+            <a:extLst>
+              <a:ext uri="{FF2B5EF4-FFF2-40B4-BE49-F238E27FC236}">
+                <a16:creationId xmlns:a16="http://schemas.microsoft.com/office/drawing/2014/main" id="{197230B4-ED24-4105-BB5D-4C0F9C214080}"/>
+              </a:ext>
+            </a:extLst>
+          </p:cNvPr>
+          <p:cNvSpPr>
+            <a:spLocks noGrp="1"/>
+          </p:cNvSpPr>
+          <p:nvPr>
+            <p:ph idx="1"/>
+          </p:nvPr>
+        </p:nvSpPr>
+        <p:spPr/>
+        <p:txBody>
+          <a:bodyPr>
+            <a:normAutofit/>
+          </a:bodyPr>
+          <a:lstStyle/>
+          <a:p>
+            <a:r>
+              <a:rPr lang="en-US" altLang="zh-CN" dirty="0"/>
+              <a:t>Given a discrete sequence with </a:t>
+            </a:r>
+            <a:r>
+              <a:rPr lang="en-US" altLang="zh-CN" i="1" dirty="0">
+                <a:latin typeface="Times New Roman" panose="02020603050405020304" pitchFamily="18" charset="0"/>
+              </a:rPr>
+              <a:t>M</a:t>
+            </a:r>
+            <a:r>
+              <a:rPr lang="en-US" altLang="zh-CN" dirty="0"/>
+              <a:t> points</a:t>
+            </a:r>
+          </a:p>
+          <a:p>
+            <a:endParaRPr lang="en-US" altLang="zh-CN" dirty="0"/>
+          </a:p>
+          <a:p>
+            <a:r>
+              <a:rPr lang="en-US" altLang="zh-CN" dirty="0"/>
+              <a:t>Regard it as a periodic signal, thus its basis frequency is</a:t>
+            </a:r>
+          </a:p>
+          <a:p>
+            <a:endParaRPr lang="zh-CN" altLang="en-US" dirty="0"/>
+          </a:p>
+        </p:txBody>
+      </p:sp>
+      <p:sp>
+        <p:nvSpPr>
+          <p:cNvPr id="19459" name="Rectangle 5">
+            <a:extLst>
+              <a:ext uri="{FF2B5EF4-FFF2-40B4-BE49-F238E27FC236}">
+                <a16:creationId xmlns:a16="http://schemas.microsoft.com/office/drawing/2014/main" id="{D69ECB22-44AA-43F6-B743-7492D71B5CCC}"/>
+              </a:ext>
+            </a:extLst>
+          </p:cNvPr>
+          <p:cNvSpPr>
+            <a:spLocks noChangeArrowheads="1"/>
+          </p:cNvSpPr>
+          <p:nvPr/>
+        </p:nvSpPr>
+        <p:spPr bwMode="auto">
+          <a:xfrm>
+            <a:off x="2209800" y="914400"/>
+            <a:ext cx="7772400" cy="3429000"/>
+          </a:xfrm>
+          <a:prstGeom prst="rect">
+            <a:avLst/>
+          </a:prstGeom>
+          <a:noFill/>
+          <a:ln>
+            <a:noFill/>
+          </a:ln>
+          <a:effectLst/>
+          <a:extLst>
+            <a:ext uri="{909E8E84-426E-40DD-AFC4-6F175D3DCCD1}">
+              <a14:hiddenFill xmlns:a14="http://schemas.microsoft.com/office/drawing/2010/main">
+                <a:solidFill>
+                  <a:schemeClr val="accent1"/>
+                </a:solidFill>
+              </a14:hiddenFill>
+            </a:ext>
+            <a:ext uri="{91240B29-F687-4F45-9708-019B960494DF}">
+              <a14:hiddenLine xmlns:a14="http://schemas.microsoft.com/office/drawing/2010/main" w="9525">
+                <a:solidFill>
+                  <a:schemeClr val="tx1"/>
+                </a:solidFill>
+                <a:miter lim="800000"/>
+                <a:headEnd/>
+                <a:tailEnd/>
+              </a14:hiddenLine>
+            </a:ext>
+            <a:ext uri="{AF507438-7753-43E0-B8FC-AC1667EBCBE1}">
+              <a14:hiddenEffects xmlns:a14="http://schemas.microsoft.com/office/drawing/2010/main">
+                <a:effectLst>
+                  <a:outerShdw dist="35921" dir="2700000" algn="ctr" rotWithShape="0">
+                    <a:schemeClr val="bg2"/>
+                  </a:outerShdw>
+                </a:effectLst>
+              </a14:hiddenEffects>
+            </a:ext>
+          </a:extLst>
+        </p:spPr>
+        <p:txBody>
+          <a:bodyPr/>
+          <a:lstStyle>
+            <a:lvl1pPr marL="342900" indent="-342900">
+              <a:spcBef>
+                <a:spcPct val="20000"/>
+              </a:spcBef>
+              <a:defRPr sz="2800">
+                <a:solidFill>
+                  <a:schemeClr val="tx1"/>
+                </a:solidFill>
+                <a:latin typeface="Calibri" panose="020F0502020204030204" pitchFamily="34" charset="0"/>
+              </a:defRPr>
+            </a:lvl1pPr>
+            <a:lvl2pPr marL="742950" indent="-285750">
+              <a:spcBef>
+                <a:spcPct val="20000"/>
+              </a:spcBef>
+              <a:buChar char="•"/>
+              <a:defRPr sz="2000">
+                <a:solidFill>
+                  <a:schemeClr val="tx1"/>
+                </a:solidFill>
+                <a:latin typeface="Calibri" panose="020F0502020204030204" pitchFamily="34" charset="0"/>
+              </a:defRPr>
+            </a:lvl2pPr>
+            <a:lvl3pPr marL="1143000" indent="-228600">
+              <a:spcBef>
+                <a:spcPct val="20000"/>
+              </a:spcBef>
+              <a:buChar char="–"/>
+              <a:defRPr>
+                <a:solidFill>
+                  <a:schemeClr val="tx1"/>
+                </a:solidFill>
+                <a:latin typeface="Calibri" panose="020F0502020204030204" pitchFamily="34" charset="0"/>
+              </a:defRPr>
+            </a:lvl3pPr>
+            <a:lvl4pPr marL="1600200" indent="-228600">
+              <a:spcBef>
+                <a:spcPct val="20000"/>
+              </a:spcBef>
+              <a:buChar char="»"/>
+              <a:defRPr sz="1600">
+                <a:solidFill>
+                  <a:schemeClr val="tx1"/>
+                </a:solidFill>
+                <a:latin typeface="Calibri" panose="020F0502020204030204" pitchFamily="34" charset="0"/>
+              </a:defRPr>
+            </a:lvl4pPr>
+            <a:lvl5pPr marL="2057400" indent="-228600">
+              <a:spcBef>
+                <a:spcPct val="20000"/>
+              </a:spcBef>
+              <a:buChar char="»"/>
+              <a:defRPr sz="1400">
+                <a:solidFill>
+                  <a:schemeClr val="tx1"/>
+                </a:solidFill>
+                <a:latin typeface="Calibri" panose="020F0502020204030204" pitchFamily="34" charset="0"/>
+              </a:defRPr>
+            </a:lvl5pPr>
+            <a:lvl6pPr marL="2514600" indent="-228600" eaLnBrk="0" fontAlgn="base" hangingPunct="0">
+              <a:spcBef>
+                <a:spcPct val="20000"/>
+              </a:spcBef>
+              <a:spcAft>
+                <a:spcPct val="0"/>
+              </a:spcAft>
+              <a:buChar char="»"/>
+              <a:defRPr sz="1400">
+                <a:solidFill>
+                  <a:schemeClr val="tx1"/>
+                </a:solidFill>
+                <a:latin typeface="Calibri" panose="020F0502020204030204" pitchFamily="34" charset="0"/>
+              </a:defRPr>
+            </a:lvl6pPr>
+            <a:lvl7pPr marL="2971800" indent="-228600" eaLnBrk="0" fontAlgn="base" hangingPunct="0">
+              <a:spcBef>
+                <a:spcPct val="20000"/>
+              </a:spcBef>
+              <a:spcAft>
+                <a:spcPct val="0"/>
+              </a:spcAft>
+              <a:buChar char="»"/>
+              <a:defRPr sz="1400">
+                <a:solidFill>
+                  <a:schemeClr val="tx1"/>
+                </a:solidFill>
+                <a:latin typeface="Calibri" panose="020F0502020204030204" pitchFamily="34" charset="0"/>
+              </a:defRPr>
+            </a:lvl7pPr>
+            <a:lvl8pPr marL="3429000" indent="-228600" eaLnBrk="0" fontAlgn="base" hangingPunct="0">
+              <a:spcBef>
+                <a:spcPct val="20000"/>
+              </a:spcBef>
+              <a:spcAft>
+                <a:spcPct val="0"/>
+              </a:spcAft>
+              <a:buChar char="»"/>
+              <a:defRPr sz="1400">
+                <a:solidFill>
+                  <a:schemeClr val="tx1"/>
+                </a:solidFill>
+                <a:latin typeface="Calibri" panose="020F0502020204030204" pitchFamily="34" charset="0"/>
+              </a:defRPr>
+            </a:lvl8pPr>
+            <a:lvl9pPr marL="3886200" indent="-228600" eaLnBrk="0" fontAlgn="base" hangingPunct="0">
+              <a:spcBef>
+                <a:spcPct val="20000"/>
+              </a:spcBef>
+              <a:spcAft>
+                <a:spcPct val="0"/>
+              </a:spcAft>
+              <a:buChar char="»"/>
+              <a:defRPr sz="1400">
+                <a:solidFill>
+                  <a:schemeClr val="tx1"/>
+                </a:solidFill>
+                <a:latin typeface="Calibri" panose="020F0502020204030204" pitchFamily="34" charset="0"/>
+              </a:defRPr>
+            </a:lvl9pPr>
+          </a:lstStyle>
+          <a:p>
+            <a:endParaRPr lang="en-US" altLang="zh-CN" sz="2600" dirty="0">
+              <a:ea typeface="宋体" panose="02010600030101010101" pitchFamily="2" charset="-122"/>
+            </a:endParaRPr>
+          </a:p>
+        </p:txBody>
+      </p:sp>
       <p:graphicFrame>
         <p:nvGraphicFramePr>
-          <p:cNvPr id="19462" name="Object 8">
+          <p:cNvPr id="19460" name="Object 6">
             <a:extLst>
               <a:ext uri="{FF2B5EF4-FFF2-40B4-BE49-F238E27FC236}">
-                <a16:creationId xmlns:a16="http://schemas.microsoft.com/office/drawing/2014/main" id="{71D6309F-0167-4CB8-805D-20A037586BFE}"/>
+                <a16:creationId xmlns:a16="http://schemas.microsoft.com/office/drawing/2014/main" id="{85F7E8CE-8B2C-4596-BE50-3BBC088067CA}"/>
               </a:ext>
             </a:extLst>
           </p:cNvPr>
@@ -20093,26 +20443,26 @@
           <p:nvPr/>
         </p:nvGraphicFramePr>
         <p:xfrm>
-          <a:off x="4013201" y="2740026"/>
-          <a:ext cx="4056063" cy="862013"/>
+          <a:off x="4191000" y="1401763"/>
+          <a:ext cx="2749550" cy="500062"/>
         </p:xfrm>
         <a:graphic>
           <a:graphicData uri="http://schemas.openxmlformats.org/presentationml/2006/ole">
             <mc:AlternateContent xmlns:mc="http://schemas.openxmlformats.org/markup-compatibility/2006">
               <mc:Choice xmlns:v="urn:schemas-microsoft-com:vml" Requires="v">
-                <p:oleObj spid="_x0000_s12623" name="Equation" r:id="rId6" imgW="1854200" imgH="393700" progId="Equation.DSMT4">
+                <p:oleObj spid="_x0000_s17420" name="Equation" r:id="rId3" imgW="1257300" imgH="228600" progId="Equation.DSMT4">
                   <p:embed/>
                 </p:oleObj>
               </mc:Choice>
               <mc:Fallback>
-                <p:oleObj name="Equation" r:id="rId6" imgW="1854200" imgH="393700" progId="Equation.DSMT4">
+                <p:oleObj name="Equation" r:id="rId3" imgW="1257300" imgH="228600" progId="Equation.DSMT4">
                   <p:embed/>
                   <p:pic>
                     <p:nvPicPr>
-                      <p:cNvPr id="19462" name="Object 8">
+                      <p:cNvPr id="19460" name="Object 6">
                         <a:extLst>
                           <a:ext uri="{FF2B5EF4-FFF2-40B4-BE49-F238E27FC236}">
-                            <a16:creationId xmlns:a16="http://schemas.microsoft.com/office/drawing/2014/main" id="{71D6309F-0167-4CB8-805D-20A037586BFE}"/>
+                            <a16:creationId xmlns:a16="http://schemas.microsoft.com/office/drawing/2014/main" id="{85F7E8CE-8B2C-4596-BE50-3BBC088067CA}"/>
                           </a:ext>
                         </a:extLst>
                       </p:cNvPr>
@@ -20122,7 +20472,7 @@
                       <p:nvPr/>
                     </p:nvPicPr>
                     <p:blipFill>
-                      <a:blip r:embed="rId7">
+                      <a:blip r:embed="rId4">
                         <a:extLst>
                           <a:ext uri="{28A0092B-C50C-407E-A947-70E740481C1C}">
                             <a14:useLocalDpi xmlns:a14="http://schemas.microsoft.com/office/drawing/2010/main" val="0"/>
@@ -20136,8 +20486,8 @@
                     </p:blipFill>
                     <p:spPr bwMode="auto">
                       <a:xfrm>
-                        <a:off x="4013201" y="2740026"/>
-                        <a:ext cx="4056063" cy="862013"/>
+                        <a:off x="4191000" y="1401763"/>
+                        <a:ext cx="2749550" cy="500062"/>
                       </a:xfrm>
                       <a:prstGeom prst="rect">
                         <a:avLst/>
@@ -20183,430 +20533,37 @@
           </a:graphicData>
         </a:graphic>
       </p:graphicFrame>
-      <p:graphicFrame>
-        <p:nvGraphicFramePr>
-          <p:cNvPr id="19463" name="Object 8">
+      <p:pic>
+        <p:nvPicPr>
+          <p:cNvPr id="19461" name="图片 3">
             <a:extLst>
               <a:ext uri="{FF2B5EF4-FFF2-40B4-BE49-F238E27FC236}">
-                <a16:creationId xmlns:a16="http://schemas.microsoft.com/office/drawing/2014/main" id="{575627D3-DF2D-4152-BFD4-CEE0D2E5318C}"/>
+                <a16:creationId xmlns:a16="http://schemas.microsoft.com/office/drawing/2014/main" id="{BBBF2200-18AE-4F9A-84D7-51790DC294FF}"/>
               </a:ext>
             </a:extLst>
           </p:cNvPr>
-          <p:cNvGraphicFramePr>
-            <a:graphicFrameLocks noChangeAspect="1"/>
-          </p:cNvGraphicFramePr>
-          <p:nvPr>
-            <p:extLst>
-              <p:ext uri="{D42A27DB-BD31-4B8C-83A1-F6EECF244321}">
-                <p14:modId xmlns:p14="http://schemas.microsoft.com/office/powerpoint/2010/main" val="1339284563"/>
-              </p:ext>
-            </p:extLst>
-          </p:nvPr>
-        </p:nvGraphicFramePr>
-        <p:xfrm>
-          <a:off x="3595689" y="4135302"/>
-          <a:ext cx="5083175" cy="973137"/>
-        </p:xfrm>
-        <a:graphic>
-          <a:graphicData uri="http://schemas.openxmlformats.org/presentationml/2006/ole">
-            <mc:AlternateContent xmlns:mc="http://schemas.openxmlformats.org/markup-compatibility/2006">
-              <mc:Choice xmlns:v="urn:schemas-microsoft-com:vml" Requires="v">
-                <p:oleObj spid="_x0000_s12624" name="Equation" r:id="rId8" imgW="2324100" imgH="444500" progId="Equation.DSMT4">
-                  <p:embed/>
-                </p:oleObj>
-              </mc:Choice>
-              <mc:Fallback>
-                <p:oleObj name="Equation" r:id="rId8" imgW="2324100" imgH="444500" progId="Equation.DSMT4">
-                  <p:embed/>
-                  <p:pic>
-                    <p:nvPicPr>
-                      <p:cNvPr id="19463" name="Object 8">
-                        <a:extLst>
-                          <a:ext uri="{FF2B5EF4-FFF2-40B4-BE49-F238E27FC236}">
-                            <a16:creationId xmlns:a16="http://schemas.microsoft.com/office/drawing/2014/main" id="{575627D3-DF2D-4152-BFD4-CEE0D2E5318C}"/>
-                          </a:ext>
-                        </a:extLst>
-                      </p:cNvPr>
-                      <p:cNvPicPr>
-                        <a:picLocks noChangeAspect="1" noChangeArrowheads="1"/>
-                      </p:cNvPicPr>
-                      <p:nvPr/>
-                    </p:nvPicPr>
-                    <p:blipFill>
-                      <a:blip r:embed="rId9">
-                        <a:extLst>
-                          <a:ext uri="{28A0092B-C50C-407E-A947-70E740481C1C}">
-                            <a14:useLocalDpi xmlns:a14="http://schemas.microsoft.com/office/drawing/2010/main" val="0"/>
-                          </a:ext>
-                        </a:extLst>
-                      </a:blip>
-                      <a:srcRect/>
-                      <a:stretch>
-                        <a:fillRect/>
-                      </a:stretch>
-                    </p:blipFill>
-                    <p:spPr bwMode="auto">
-                      <a:xfrm>
-                        <a:off x="3595689" y="4135302"/>
-                        <a:ext cx="5083175" cy="973137"/>
-                      </a:xfrm>
-                      <a:prstGeom prst="rect">
-                        <a:avLst/>
-                      </a:prstGeom>
-                      <a:noFill/>
-                      <a:ln>
-                        <a:noFill/>
-                      </a:ln>
-                      <a:effectLst/>
-                      <a:extLst>
-                        <a:ext uri="{909E8E84-426E-40DD-AFC4-6F175D3DCCD1}">
-                          <a14:hiddenFill xmlns:a14="http://schemas.microsoft.com/office/drawing/2010/main">
-                            <a:solidFill>
-                              <a:schemeClr val="accent1"/>
-                            </a:solidFill>
-                          </a14:hiddenFill>
-                        </a:ext>
-                        <a:ext uri="{91240B29-F687-4F45-9708-019B960494DF}">
-                          <a14:hiddenLine xmlns:a14="http://schemas.microsoft.com/office/drawing/2010/main" w="9525">
-                            <a:solidFill>
-                              <a:schemeClr val="tx1"/>
-                            </a:solidFill>
-                            <a:miter lim="800000"/>
-                            <a:headEnd/>
-                            <a:tailEnd/>
-                          </a14:hiddenLine>
-                        </a:ext>
-                        <a:ext uri="{AF507438-7753-43E0-B8FC-AC1667EBCBE1}">
-                          <a14:hiddenEffects xmlns:a14="http://schemas.microsoft.com/office/drawing/2010/main">
-                            <a:effectLst>
-                              <a:outerShdw dist="35921" dir="2700000" algn="ctr" rotWithShape="0">
-                                <a:schemeClr val="bg2"/>
-                              </a:outerShdw>
-                            </a:effectLst>
-                          </a14:hiddenEffects>
-                        </a:ext>
-                      </a:extLst>
-                    </p:spPr>
-                  </p:pic>
-                </p:oleObj>
-              </mc:Fallback>
-            </mc:AlternateContent>
-          </a:graphicData>
-        </a:graphic>
-      </p:graphicFrame>
-      <p:graphicFrame>
-        <p:nvGraphicFramePr>
-          <p:cNvPr id="19466" name="Object 8">
+          <p:cNvPicPr>
+            <a:picLocks noChangeAspect="1"/>
+          </p:cNvPicPr>
+          <p:nvPr/>
+        </p:nvPicPr>
+        <p:blipFill>
+          <a:blip r:embed="rId5">
             <a:extLst>
-              <a:ext uri="{FF2B5EF4-FFF2-40B4-BE49-F238E27FC236}">
-                <a16:creationId xmlns:a16="http://schemas.microsoft.com/office/drawing/2014/main" id="{9D4CF967-37EC-4AB5-BD9B-A2FB42427365}"/>
+              <a:ext uri="{28A0092B-C50C-407E-A947-70E740481C1C}">
+                <a14:useLocalDpi xmlns:a14="http://schemas.microsoft.com/office/drawing/2010/main" val="0"/>
               </a:ext>
             </a:extLst>
-          </p:cNvPr>
-          <p:cNvGraphicFramePr>
-            <a:graphicFrameLocks noChangeAspect="1"/>
-          </p:cNvGraphicFramePr>
-          <p:nvPr>
-            <p:extLst>
-              <p:ext uri="{D42A27DB-BD31-4B8C-83A1-F6EECF244321}">
-                <p14:modId xmlns:p14="http://schemas.microsoft.com/office/powerpoint/2010/main" val="685721215"/>
-              </p:ext>
-            </p:extLst>
-          </p:nvPr>
-        </p:nvGraphicFramePr>
-        <p:xfrm>
-          <a:off x="3275014" y="5519602"/>
-          <a:ext cx="5749925" cy="973137"/>
-        </p:xfrm>
-        <a:graphic>
-          <a:graphicData uri="http://schemas.openxmlformats.org/presentationml/2006/ole">
-            <mc:AlternateContent xmlns:mc="http://schemas.openxmlformats.org/markup-compatibility/2006">
-              <mc:Choice xmlns:v="urn:schemas-microsoft-com:vml" Requires="v">
-                <p:oleObj spid="_x0000_s12625" name="Equation" r:id="rId10" imgW="2628900" imgH="444500" progId="Equation.DSMT4">
-                  <p:embed/>
-                </p:oleObj>
-              </mc:Choice>
-              <mc:Fallback>
-                <p:oleObj name="Equation" r:id="rId10" imgW="2628900" imgH="444500" progId="Equation.DSMT4">
-                  <p:embed/>
-                  <p:pic>
-                    <p:nvPicPr>
-                      <p:cNvPr id="19466" name="Object 8">
-                        <a:extLst>
-                          <a:ext uri="{FF2B5EF4-FFF2-40B4-BE49-F238E27FC236}">
-                            <a16:creationId xmlns:a16="http://schemas.microsoft.com/office/drawing/2014/main" id="{9D4CF967-37EC-4AB5-BD9B-A2FB42427365}"/>
-                          </a:ext>
-                        </a:extLst>
-                      </p:cNvPr>
-                      <p:cNvPicPr>
-                        <a:picLocks noChangeAspect="1" noChangeArrowheads="1"/>
-                      </p:cNvPicPr>
-                      <p:nvPr/>
-                    </p:nvPicPr>
-                    <p:blipFill>
-                      <a:blip r:embed="rId11">
-                        <a:extLst>
-                          <a:ext uri="{28A0092B-C50C-407E-A947-70E740481C1C}">
-                            <a14:useLocalDpi xmlns:a14="http://schemas.microsoft.com/office/drawing/2010/main" val="0"/>
-                          </a:ext>
-                        </a:extLst>
-                      </a:blip>
-                      <a:srcRect/>
-                      <a:stretch>
-                        <a:fillRect/>
-                      </a:stretch>
-                    </p:blipFill>
-                    <p:spPr bwMode="auto">
-                      <a:xfrm>
-                        <a:off x="3275014" y="5519602"/>
-                        <a:ext cx="5749925" cy="973137"/>
-                      </a:xfrm>
-                      <a:prstGeom prst="rect">
-                        <a:avLst/>
-                      </a:prstGeom>
-                      <a:noFill/>
-                      <a:ln>
-                        <a:noFill/>
-                      </a:ln>
-                      <a:effectLst/>
-                      <a:extLst>
-                        <a:ext uri="{909E8E84-426E-40DD-AFC4-6F175D3DCCD1}">
-                          <a14:hiddenFill xmlns:a14="http://schemas.microsoft.com/office/drawing/2010/main">
-                            <a:solidFill>
-                              <a:schemeClr val="accent1"/>
-                            </a:solidFill>
-                          </a14:hiddenFill>
-                        </a:ext>
-                        <a:ext uri="{91240B29-F687-4F45-9708-019B960494DF}">
-                          <a14:hiddenLine xmlns:a14="http://schemas.microsoft.com/office/drawing/2010/main" w="9525">
-                            <a:solidFill>
-                              <a:schemeClr val="tx1"/>
-                            </a:solidFill>
-                            <a:miter lim="800000"/>
-                            <a:headEnd/>
-                            <a:tailEnd/>
-                          </a14:hiddenLine>
-                        </a:ext>
-                        <a:ext uri="{AF507438-7753-43E0-B8FC-AC1667EBCBE1}">
-                          <a14:hiddenEffects xmlns:a14="http://schemas.microsoft.com/office/drawing/2010/main">
-                            <a:effectLst>
-                              <a:outerShdw dist="35921" dir="2700000" algn="ctr" rotWithShape="0">
-                                <a:schemeClr val="bg2"/>
-                              </a:outerShdw>
-                            </a:effectLst>
-                          </a14:hiddenEffects>
-                        </a:ext>
-                      </a:extLst>
-                    </p:spPr>
-                  </p:pic>
-                </p:oleObj>
-              </mc:Fallback>
-            </mc:AlternateContent>
-          </a:graphicData>
-        </a:graphic>
-      </p:graphicFrame>
-    </p:spTree>
-  </p:cSld>
-  <p:clrMapOvr>
-    <a:masterClrMapping/>
-  </p:clrMapOvr>
-</p:sld>
-</file>
-
-<file path=ppt/slides/slide19.xml><?xml version="1.0" encoding="utf-8"?>
-<p:sld xmlns:a="http://schemas.openxmlformats.org/drawingml/2006/main" xmlns:r="http://schemas.openxmlformats.org/officeDocument/2006/relationships" xmlns:p="http://schemas.openxmlformats.org/presentationml/2006/main">
-  <p:cSld>
-    <p:spTree>
-      <p:nvGrpSpPr>
-        <p:cNvPr id="1" name=""/>
-        <p:cNvGrpSpPr/>
-        <p:nvPr/>
-      </p:nvGrpSpPr>
-      <p:grpSpPr>
-        <a:xfrm>
-          <a:off x="0" y="0"/>
-          <a:ext cx="0" cy="0"/>
-          <a:chOff x="0" y="0"/>
-          <a:chExt cx="0" cy="0"/>
-        </a:xfrm>
-      </p:grpSpPr>
-      <p:sp>
-        <p:nvSpPr>
-          <p:cNvPr id="20482" name="Rectangle 2">
-            <a:extLst>
-              <a:ext uri="{FF2B5EF4-FFF2-40B4-BE49-F238E27FC236}">
-                <a16:creationId xmlns:a16="http://schemas.microsoft.com/office/drawing/2014/main" id="{8495A4B3-9DAA-436A-967C-DB761E7C0E8F}"/>
-              </a:ext>
-            </a:extLst>
-          </p:cNvPr>
-          <p:cNvSpPr>
-            <a:spLocks noGrp="1" noChangeArrowheads="1"/>
-          </p:cNvSpPr>
-          <p:nvPr>
-            <p:ph type="title"/>
-          </p:nvPr>
-        </p:nvSpPr>
-        <p:spPr/>
-        <p:txBody>
-          <a:bodyPr>
-            <a:normAutofit/>
-          </a:bodyPr>
-          <a:lstStyle/>
-          <a:p>
-            <a:r>
-              <a:rPr lang="en-US" altLang="zh-CN" dirty="0">
-                <a:ea typeface="宋体" panose="02010600030101010101" pitchFamily="2" charset="-122"/>
-              </a:rPr>
-              <a:t>Discrete Fourier Transform (DFT) in 1D Case</a:t>
-            </a:r>
-          </a:p>
-        </p:txBody>
-      </p:sp>
-      <mc:AlternateContent xmlns:mc="http://schemas.openxmlformats.org/markup-compatibility/2006" xmlns:a14="http://schemas.microsoft.com/office/drawing/2010/main">
-        <mc:Choice Requires="a14">
-          <p:sp>
-            <p:nvSpPr>
-              <p:cNvPr id="2" name="内容占位符 1">
-                <a:extLst>
-                  <a:ext uri="{FF2B5EF4-FFF2-40B4-BE49-F238E27FC236}">
-                    <a16:creationId xmlns:a16="http://schemas.microsoft.com/office/drawing/2014/main" id="{42DDF648-D2EB-43EE-9C19-F27F94E3B2B7}"/>
-                  </a:ext>
-                </a:extLst>
-              </p:cNvPr>
-              <p:cNvSpPr>
-                <a:spLocks noGrp="1"/>
-              </p:cNvSpPr>
-              <p:nvPr>
-                <p:ph idx="1"/>
-              </p:nvPr>
-            </p:nvSpPr>
-            <p:spPr/>
-            <p:txBody>
-              <a:bodyPr/>
-              <a:lstStyle/>
-              <a:p>
-                <a:r>
-                  <a:rPr lang="en-US" altLang="zh-CN" dirty="0"/>
-                  <a:t>Thus, </a:t>
-                </a:r>
-                <a14:m>
-                  <m:oMath xmlns:m="http://schemas.openxmlformats.org/officeDocument/2006/math">
-                    <m:r>
-                      <a:rPr lang="en-US" altLang="zh-CN" i="1" dirty="0">
-                        <a:latin typeface="Cambria Math" panose="02040503050406030204" pitchFamily="18" charset="0"/>
-                        <a:cs typeface="Times New Roman" panose="02020603050405020304" pitchFamily="18" charset="0"/>
-                      </a:rPr>
-                      <m:t>𝑓</m:t>
-                    </m:r>
-                  </m:oMath>
-                </a14:m>
-                <a:r>
-                  <a:rPr lang="en-US" altLang="zh-CN" dirty="0"/>
-                  <a:t>’s DFT also has </a:t>
-                </a:r>
-                <a:r>
-                  <a:rPr lang="en-US" altLang="zh-CN" i="1" dirty="0">
-                    <a:latin typeface="Times New Roman" panose="02020603050405020304" pitchFamily="18" charset="0"/>
-                  </a:rPr>
-                  <a:t>M</a:t>
-                </a:r>
-                <a:r>
-                  <a:rPr lang="en-US" altLang="zh-CN" dirty="0"/>
-                  <a:t> points</a:t>
-                </a:r>
-              </a:p>
-              <a:p>
-                <a:endParaRPr lang="en-US" altLang="zh-CN" dirty="0"/>
-              </a:p>
-              <a:p>
-                <a:r>
-                  <a:rPr lang="en-US" altLang="zh-CN" dirty="0"/>
-                  <a:t>and</a:t>
-                </a:r>
-              </a:p>
-              <a:p>
-                <a:endParaRPr lang="en-US" altLang="zh-CN" dirty="0"/>
-              </a:p>
-              <a:p>
-                <a:endParaRPr lang="en-US" altLang="zh-CN" dirty="0"/>
-              </a:p>
-              <a:p>
-                <a:r>
-                  <a:rPr lang="en-US" altLang="zh-CN" dirty="0">
-                    <a:solidFill>
-                      <a:schemeClr val="tx1">
-                        <a:lumMod val="85000"/>
-                        <a:lumOff val="15000"/>
-                      </a:schemeClr>
-                    </a:solidFill>
-                  </a:rPr>
-                  <a:t>IDFT</a:t>
-                </a:r>
-              </a:p>
-              <a:p>
-                <a:endParaRPr lang="zh-CN" altLang="en-US" dirty="0"/>
-              </a:p>
-            </p:txBody>
-          </p:sp>
-        </mc:Choice>
-        <mc:Fallback xmlns="">
-          <p:sp>
-            <p:nvSpPr>
-              <p:cNvPr id="2" name="内容占位符 1">
-                <a:extLst>
-                  <a:ext uri="{FF2B5EF4-FFF2-40B4-BE49-F238E27FC236}">
-                    <a16:creationId xmlns:a16="http://schemas.microsoft.com/office/drawing/2014/main" id="{42DDF648-D2EB-43EE-9C19-F27F94E3B2B7}"/>
-                  </a:ext>
-                </a:extLst>
-              </p:cNvPr>
-              <p:cNvSpPr>
-                <a:spLocks noGrp="1" noRot="1" noChangeAspect="1" noMove="1" noResize="1" noEditPoints="1" noAdjustHandles="1" noChangeArrowheads="1" noChangeShapeType="1" noTextEdit="1"/>
-              </p:cNvSpPr>
-              <p:nvPr>
-                <p:ph idx="1"/>
-              </p:nvPr>
-            </p:nvSpPr>
-            <p:spPr>
-              <a:blipFill>
-                <a:blip r:embed="rId3"/>
-                <a:stretch>
-                  <a:fillRect l="-912" t="-1680"/>
-                </a:stretch>
-              </a:blipFill>
-            </p:spPr>
-            <p:txBody>
-              <a:bodyPr/>
-              <a:lstStyle/>
-              <a:p>
-                <a:r>
-                  <a:rPr lang="zh-CN" altLang="en-US">
-                    <a:noFill/>
-                  </a:rPr>
-                  <a:t> </a:t>
-                </a:r>
-              </a:p>
-            </p:txBody>
-          </p:sp>
-        </mc:Fallback>
-      </mc:AlternateContent>
-      <p:sp>
-        <p:nvSpPr>
-          <p:cNvPr id="20483" name="Rectangle 5">
-            <a:extLst>
-              <a:ext uri="{FF2B5EF4-FFF2-40B4-BE49-F238E27FC236}">
-                <a16:creationId xmlns:a16="http://schemas.microsoft.com/office/drawing/2014/main" id="{F58D513C-8CB9-4BD5-906F-44324DFE87ED}"/>
-              </a:ext>
-            </a:extLst>
-          </p:cNvPr>
-          <p:cNvSpPr>
-            <a:spLocks noChangeArrowheads="1"/>
-          </p:cNvSpPr>
-          <p:nvPr/>
-        </p:nvSpPr>
+          </a:blip>
+          <a:srcRect/>
+          <a:stretch>
+            <a:fillRect/>
+          </a:stretch>
+        </p:blipFill>
         <p:spPr bwMode="auto">
           <a:xfrm>
-            <a:off x="2209800" y="914400"/>
-            <a:ext cx="7772400" cy="3429000"/>
+            <a:off x="7802354" y="1652588"/>
+            <a:ext cx="463550" cy="781050"/>
           </a:xfrm>
           <a:prstGeom prst="rect">
             <a:avLst/>
@@ -20615,863 +20572,174 @@
           <a:ln>
             <a:noFill/>
           </a:ln>
-          <a:effectLst/>
           <a:extLst>
             <a:ext uri="{909E8E84-426E-40DD-AFC4-6F175D3DCCD1}">
               <a14:hiddenFill xmlns:a14="http://schemas.microsoft.com/office/drawing/2010/main">
                 <a:solidFill>
-                  <a:schemeClr val="accent1"/>
+                  <a:srgbClr val="FFFFFF"/>
                 </a:solidFill>
               </a14:hiddenFill>
             </a:ext>
             <a:ext uri="{91240B29-F687-4F45-9708-019B960494DF}">
               <a14:hiddenLine xmlns:a14="http://schemas.microsoft.com/office/drawing/2010/main" w="9525">
                 <a:solidFill>
-                  <a:schemeClr val="tx1"/>
+                  <a:srgbClr val="000000"/>
                 </a:solidFill>
                 <a:miter lim="800000"/>
                 <a:headEnd/>
                 <a:tailEnd/>
               </a14:hiddenLine>
             </a:ext>
-            <a:ext uri="{AF507438-7753-43E0-B8FC-AC1667EBCBE1}">
-              <a14:hiddenEffects xmlns:a14="http://schemas.microsoft.com/office/drawing/2010/main">
-                <a:effectLst>
-                  <a:outerShdw dist="35921" dir="2700000" algn="ctr" rotWithShape="0">
-                    <a:schemeClr val="bg2"/>
-                  </a:outerShdw>
-                </a:effectLst>
-              </a14:hiddenEffects>
-            </a:ext>
           </a:extLst>
         </p:spPr>
-        <p:txBody>
-          <a:bodyPr/>
-          <a:lstStyle>
-            <a:lvl1pPr marL="342900" indent="-342900">
-              <a:spcBef>
-                <a:spcPct val="20000"/>
-              </a:spcBef>
-              <a:defRPr sz="2800">
-                <a:solidFill>
-                  <a:schemeClr val="tx1"/>
-                </a:solidFill>
-                <a:latin typeface="Calibri" panose="020F0502020204030204" pitchFamily="34" charset="0"/>
-              </a:defRPr>
-            </a:lvl1pPr>
-            <a:lvl2pPr marL="742950" indent="-285750">
-              <a:spcBef>
-                <a:spcPct val="20000"/>
-              </a:spcBef>
-              <a:buChar char="•"/>
-              <a:defRPr sz="2000">
-                <a:solidFill>
-                  <a:schemeClr val="tx1"/>
-                </a:solidFill>
-                <a:latin typeface="Calibri" panose="020F0502020204030204" pitchFamily="34" charset="0"/>
-              </a:defRPr>
-            </a:lvl2pPr>
-            <a:lvl3pPr marL="1143000" indent="-228600">
-              <a:spcBef>
-                <a:spcPct val="20000"/>
-              </a:spcBef>
-              <a:buChar char="–"/>
-              <a:defRPr>
-                <a:solidFill>
-                  <a:schemeClr val="tx1"/>
-                </a:solidFill>
-                <a:latin typeface="Calibri" panose="020F0502020204030204" pitchFamily="34" charset="0"/>
-              </a:defRPr>
-            </a:lvl3pPr>
-            <a:lvl4pPr marL="1600200" indent="-228600">
-              <a:spcBef>
-                <a:spcPct val="20000"/>
-              </a:spcBef>
-              <a:buChar char="»"/>
-              <a:defRPr sz="1600">
-                <a:solidFill>
-                  <a:schemeClr val="tx1"/>
-                </a:solidFill>
-                <a:latin typeface="Calibri" panose="020F0502020204030204" pitchFamily="34" charset="0"/>
-              </a:defRPr>
-            </a:lvl4pPr>
-            <a:lvl5pPr marL="2057400" indent="-228600">
-              <a:spcBef>
-                <a:spcPct val="20000"/>
-              </a:spcBef>
-              <a:buChar char="»"/>
-              <a:defRPr sz="1400">
-                <a:solidFill>
-                  <a:schemeClr val="tx1"/>
-                </a:solidFill>
-                <a:latin typeface="Calibri" panose="020F0502020204030204" pitchFamily="34" charset="0"/>
-              </a:defRPr>
-            </a:lvl5pPr>
-            <a:lvl6pPr marL="2514600" indent="-228600" eaLnBrk="0" fontAlgn="base" hangingPunct="0">
-              <a:spcBef>
-                <a:spcPct val="20000"/>
-              </a:spcBef>
-              <a:spcAft>
-                <a:spcPct val="0"/>
-              </a:spcAft>
-              <a:buChar char="»"/>
-              <a:defRPr sz="1400">
-                <a:solidFill>
-                  <a:schemeClr val="tx1"/>
-                </a:solidFill>
-                <a:latin typeface="Calibri" panose="020F0502020204030204" pitchFamily="34" charset="0"/>
-              </a:defRPr>
-            </a:lvl6pPr>
-            <a:lvl7pPr marL="2971800" indent="-228600" eaLnBrk="0" fontAlgn="base" hangingPunct="0">
-              <a:spcBef>
-                <a:spcPct val="20000"/>
-              </a:spcBef>
-              <a:spcAft>
-                <a:spcPct val="0"/>
-              </a:spcAft>
-              <a:buChar char="»"/>
-              <a:defRPr sz="1400">
-                <a:solidFill>
-                  <a:schemeClr val="tx1"/>
-                </a:solidFill>
-                <a:latin typeface="Calibri" panose="020F0502020204030204" pitchFamily="34" charset="0"/>
-              </a:defRPr>
-            </a:lvl7pPr>
-            <a:lvl8pPr marL="3429000" indent="-228600" eaLnBrk="0" fontAlgn="base" hangingPunct="0">
-              <a:spcBef>
-                <a:spcPct val="20000"/>
-              </a:spcBef>
-              <a:spcAft>
-                <a:spcPct val="0"/>
-              </a:spcAft>
-              <a:buChar char="»"/>
-              <a:defRPr sz="1400">
-                <a:solidFill>
-                  <a:schemeClr val="tx1"/>
-                </a:solidFill>
-                <a:latin typeface="Calibri" panose="020F0502020204030204" pitchFamily="34" charset="0"/>
-              </a:defRPr>
-            </a:lvl8pPr>
-            <a:lvl9pPr marL="3886200" indent="-228600" eaLnBrk="0" fontAlgn="base" hangingPunct="0">
-              <a:spcBef>
-                <a:spcPct val="20000"/>
-              </a:spcBef>
-              <a:spcAft>
-                <a:spcPct val="0"/>
-              </a:spcAft>
-              <a:buChar char="»"/>
-              <a:defRPr sz="1400">
-                <a:solidFill>
-                  <a:schemeClr val="tx1"/>
-                </a:solidFill>
-                <a:latin typeface="Calibri" panose="020F0502020204030204" pitchFamily="34" charset="0"/>
-              </a:defRPr>
-            </a:lvl9pPr>
-          </a:lstStyle>
-          <a:p>
-            <a:endParaRPr lang="en-US" altLang="zh-CN" sz="2600" dirty="0">
-              <a:ea typeface="宋体" panose="02010600030101010101" pitchFamily="2" charset="-122"/>
-            </a:endParaRPr>
-          </a:p>
-        </p:txBody>
-      </p:sp>
-      <p:graphicFrame>
-        <p:nvGraphicFramePr>
-          <p:cNvPr id="20484" name="Object 7">
+      </p:pic>
+      <p:pic>
+        <p:nvPicPr>
+          <p:cNvPr id="17412" name="Picture 4" descr="https://i-blog.csdnimg.cn/blog_migrate/dff1dbf0c422f5ec806199f02bc26e62.gif">
             <a:extLst>
               <a:ext uri="{FF2B5EF4-FFF2-40B4-BE49-F238E27FC236}">
-                <a16:creationId xmlns:a16="http://schemas.microsoft.com/office/drawing/2014/main" id="{098D1188-08C1-4198-9B8F-5CD129FA1D76}"/>
+                <a16:creationId xmlns:a16="http://schemas.microsoft.com/office/drawing/2014/main" id="{9E0E7036-2B09-44D9-A16D-D3DCAA710184}"/>
               </a:ext>
             </a:extLst>
           </p:cNvPr>
-          <p:cNvGraphicFramePr>
-            <a:graphicFrameLocks noChangeAspect="1"/>
-          </p:cNvGraphicFramePr>
+          <p:cNvPicPr>
+            <a:picLocks noChangeAspect="1" noChangeArrowheads="1"/>
+          </p:cNvPicPr>
           <p:nvPr/>
-        </p:nvGraphicFramePr>
-        <p:xfrm>
-          <a:off x="4191001" y="1381126"/>
-          <a:ext cx="2805113" cy="500063"/>
-        </p:xfrm>
-        <a:graphic>
-          <a:graphicData uri="http://schemas.openxmlformats.org/presentationml/2006/ole">
-            <mc:AlternateContent xmlns:mc="http://schemas.openxmlformats.org/markup-compatibility/2006">
-              <mc:Choice xmlns:v="urn:schemas-microsoft-com:vml" Requires="v">
-                <p:oleObj spid="_x0000_s13563" name="Equation" r:id="rId4" imgW="1282700" imgH="228600" progId="Equation.DSMT4">
-                  <p:embed/>
-                </p:oleObj>
-              </mc:Choice>
-              <mc:Fallback>
-                <p:oleObj name="Equation" r:id="rId4" imgW="1282700" imgH="228600" progId="Equation.DSMT4">
-                  <p:embed/>
-                  <p:pic>
-                    <p:nvPicPr>
-                      <p:cNvPr id="20484" name="Object 7">
-                        <a:extLst>
-                          <a:ext uri="{FF2B5EF4-FFF2-40B4-BE49-F238E27FC236}">
-                            <a16:creationId xmlns:a16="http://schemas.microsoft.com/office/drawing/2014/main" id="{098D1188-08C1-4198-9B8F-5CD129FA1D76}"/>
-                          </a:ext>
-                        </a:extLst>
-                      </p:cNvPr>
-                      <p:cNvPicPr>
-                        <a:picLocks noChangeAspect="1" noChangeArrowheads="1"/>
-                      </p:cNvPicPr>
-                      <p:nvPr/>
-                    </p:nvPicPr>
-                    <p:blipFill>
-                      <a:blip r:embed="rId5">
-                        <a:extLst>
-                          <a:ext uri="{28A0092B-C50C-407E-A947-70E740481C1C}">
-                            <a14:useLocalDpi xmlns:a14="http://schemas.microsoft.com/office/drawing/2010/main" val="0"/>
-                          </a:ext>
-                        </a:extLst>
-                      </a:blip>
-                      <a:srcRect/>
-                      <a:stretch>
-                        <a:fillRect/>
-                      </a:stretch>
-                    </p:blipFill>
-                    <p:spPr bwMode="auto">
-                      <a:xfrm>
-                        <a:off x="4191001" y="1381126"/>
-                        <a:ext cx="2805113" cy="500063"/>
-                      </a:xfrm>
-                      <a:prstGeom prst="rect">
-                        <a:avLst/>
-                      </a:prstGeom>
-                      <a:noFill/>
-                      <a:ln>
-                        <a:noFill/>
-                      </a:ln>
-                      <a:effectLst/>
-                      <a:extLst>
-                        <a:ext uri="{909E8E84-426E-40DD-AFC4-6F175D3DCCD1}">
-                          <a14:hiddenFill xmlns:a14="http://schemas.microsoft.com/office/drawing/2010/main">
-                            <a:solidFill>
-                              <a:schemeClr val="accent1"/>
-                            </a:solidFill>
-                          </a14:hiddenFill>
-                        </a:ext>
-                        <a:ext uri="{91240B29-F687-4F45-9708-019B960494DF}">
-                          <a14:hiddenLine xmlns:a14="http://schemas.microsoft.com/office/drawing/2010/main" w="9525">
-                            <a:solidFill>
-                              <a:schemeClr val="tx1"/>
-                            </a:solidFill>
-                            <a:miter lim="800000"/>
-                            <a:headEnd/>
-                            <a:tailEnd/>
-                          </a14:hiddenLine>
-                        </a:ext>
-                        <a:ext uri="{AF507438-7753-43E0-B8FC-AC1667EBCBE1}">
-                          <a14:hiddenEffects xmlns:a14="http://schemas.microsoft.com/office/drawing/2010/main">
-                            <a:effectLst>
-                              <a:outerShdw dist="35921" dir="2700000" algn="ctr" rotWithShape="0">
-                                <a:schemeClr val="bg2"/>
-                              </a:outerShdw>
-                            </a:effectLst>
-                          </a14:hiddenEffects>
-                        </a:ext>
-                      </a:extLst>
-                    </p:spPr>
-                  </p:pic>
-                </p:oleObj>
-              </mc:Fallback>
-            </mc:AlternateContent>
-          </a:graphicData>
-        </a:graphic>
-      </p:graphicFrame>
-      <p:graphicFrame>
-        <p:nvGraphicFramePr>
-          <p:cNvPr id="20485" name="Object 8">
+        </p:nvPicPr>
+        <p:blipFill>
+          <a:blip r:embed="rId6">
             <a:extLst>
-              <a:ext uri="{FF2B5EF4-FFF2-40B4-BE49-F238E27FC236}">
-                <a16:creationId xmlns:a16="http://schemas.microsoft.com/office/drawing/2014/main" id="{1E9DE60A-9F3F-41A1-8838-325BD9CF8241}"/>
+              <a:ext uri="{28A0092B-C50C-407E-A947-70E740481C1C}">
+                <a14:useLocalDpi xmlns:a14="http://schemas.microsoft.com/office/drawing/2010/main" val="0"/>
               </a:ext>
             </a:extLst>
-          </p:cNvPr>
-          <p:cNvGraphicFramePr>
-            <a:graphicFrameLocks noChangeAspect="1"/>
-          </p:cNvGraphicFramePr>
-          <p:nvPr/>
-        </p:nvGraphicFramePr>
-        <p:xfrm>
-          <a:off x="3136901" y="2179638"/>
-          <a:ext cx="5832475" cy="944562"/>
-        </p:xfrm>
-        <a:graphic>
-          <a:graphicData uri="http://schemas.openxmlformats.org/presentationml/2006/ole">
-            <mc:AlternateContent xmlns:mc="http://schemas.openxmlformats.org/markup-compatibility/2006">
-              <mc:Choice xmlns:v="urn:schemas-microsoft-com:vml" Requires="v">
-                <p:oleObj spid="_x0000_s13564" name="Equation" r:id="rId6" imgW="2667000" imgH="431800" progId="Equation.DSMT4">
-                  <p:embed/>
-                </p:oleObj>
-              </mc:Choice>
-              <mc:Fallback>
-                <p:oleObj name="Equation" r:id="rId6" imgW="2667000" imgH="431800" progId="Equation.DSMT4">
-                  <p:embed/>
-                  <p:pic>
-                    <p:nvPicPr>
-                      <p:cNvPr id="20485" name="Object 8">
-                        <a:extLst>
-                          <a:ext uri="{FF2B5EF4-FFF2-40B4-BE49-F238E27FC236}">
-                            <a16:creationId xmlns:a16="http://schemas.microsoft.com/office/drawing/2014/main" id="{1E9DE60A-9F3F-41A1-8838-325BD9CF8241}"/>
-                          </a:ext>
-                        </a:extLst>
-                      </p:cNvPr>
-                      <p:cNvPicPr>
-                        <a:picLocks noChangeAspect="1" noChangeArrowheads="1"/>
-                      </p:cNvPicPr>
-                      <p:nvPr/>
-                    </p:nvPicPr>
-                    <p:blipFill>
-                      <a:blip r:embed="rId7">
-                        <a:extLst>
-                          <a:ext uri="{28A0092B-C50C-407E-A947-70E740481C1C}">
-                            <a14:useLocalDpi xmlns:a14="http://schemas.microsoft.com/office/drawing/2010/main" val="0"/>
-                          </a:ext>
-                        </a:extLst>
-                      </a:blip>
-                      <a:srcRect/>
-                      <a:stretch>
-                        <a:fillRect/>
-                      </a:stretch>
-                    </p:blipFill>
-                    <p:spPr bwMode="auto">
-                      <a:xfrm>
-                        <a:off x="3136901" y="2179638"/>
-                        <a:ext cx="5832475" cy="944562"/>
-                      </a:xfrm>
-                      <a:prstGeom prst="rect">
-                        <a:avLst/>
-                      </a:prstGeom>
-                      <a:noFill/>
-                      <a:ln>
-                        <a:noFill/>
-                      </a:ln>
-                      <a:effectLst/>
-                      <a:extLst>
-                        <a:ext uri="{909E8E84-426E-40DD-AFC4-6F175D3DCCD1}">
-                          <a14:hiddenFill xmlns:a14="http://schemas.microsoft.com/office/drawing/2010/main">
-                            <a:solidFill>
-                              <a:schemeClr val="accent1"/>
-                            </a:solidFill>
-                          </a14:hiddenFill>
-                        </a:ext>
-                        <a:ext uri="{91240B29-F687-4F45-9708-019B960494DF}">
-                          <a14:hiddenLine xmlns:a14="http://schemas.microsoft.com/office/drawing/2010/main" w="9525">
-                            <a:solidFill>
-                              <a:schemeClr val="tx1"/>
-                            </a:solidFill>
-                            <a:miter lim="800000"/>
-                            <a:headEnd/>
-                            <a:tailEnd/>
-                          </a14:hiddenLine>
-                        </a:ext>
-                        <a:ext uri="{AF507438-7753-43E0-B8FC-AC1667EBCBE1}">
-                          <a14:hiddenEffects xmlns:a14="http://schemas.microsoft.com/office/drawing/2010/main">
-                            <a:effectLst>
-                              <a:outerShdw dist="35921" dir="2700000" algn="ctr" rotWithShape="0">
-                                <a:schemeClr val="bg2"/>
-                              </a:outerShdw>
-                            </a:effectLst>
-                          </a14:hiddenEffects>
-                        </a:ext>
-                      </a:extLst>
-                    </p:spPr>
-                  </p:pic>
-                </p:oleObj>
-              </mc:Fallback>
-            </mc:AlternateContent>
-          </a:graphicData>
-        </a:graphic>
-      </p:graphicFrame>
-      <p:sp>
-        <p:nvSpPr>
-          <p:cNvPr id="2080777" name="Rectangle 9">
-            <a:extLst>
-              <a:ext uri="{FF2B5EF4-FFF2-40B4-BE49-F238E27FC236}">
-                <a16:creationId xmlns:a16="http://schemas.microsoft.com/office/drawing/2014/main" id="{FCC6BAC1-21FA-4FA3-818D-AB97B0FFA991}"/>
-              </a:ext>
-            </a:extLst>
-          </p:cNvPr>
-          <p:cNvSpPr>
-            <a:spLocks noChangeArrowheads="1"/>
-          </p:cNvSpPr>
-          <p:nvPr/>
-        </p:nvSpPr>
+          </a:blip>
+          <a:srcRect/>
+          <a:stretch>
+            <a:fillRect/>
+          </a:stretch>
+        </p:blipFill>
         <p:spPr bwMode="auto">
           <a:xfrm>
-            <a:off x="2057400" y="4340225"/>
-            <a:ext cx="8229600" cy="914400"/>
+            <a:off x="551365" y="2594941"/>
+            <a:ext cx="5334000" cy="4000500"/>
           </a:xfrm>
           <a:prstGeom prst="rect">
             <a:avLst/>
           </a:prstGeom>
           <a:noFill/>
-          <a:ln w="19050">
-            <a:solidFill>
-              <a:srgbClr val="FF0000"/>
-            </a:solidFill>
-            <a:miter lim="800000"/>
-            <a:headEnd/>
-            <a:tailEnd/>
-          </a:ln>
-          <a:effectLst/>
           <a:extLst>
             <a:ext uri="{909E8E84-426E-40DD-AFC4-6F175D3DCCD1}">
               <a14:hiddenFill xmlns:a14="http://schemas.microsoft.com/office/drawing/2010/main">
                 <a:solidFill>
-                  <a:schemeClr val="accent1"/>
+                  <a:srgbClr val="FFFFFF"/>
                 </a:solidFill>
               </a14:hiddenFill>
-            </a:ext>
-            <a:ext uri="{AF507438-7753-43E0-B8FC-AC1667EBCBE1}">
-              <a14:hiddenEffects xmlns:a14="http://schemas.microsoft.com/office/drawing/2010/main">
-                <a:effectLst>
-                  <a:outerShdw dist="35921" dir="2700000" algn="ctr" rotWithShape="0">
-                    <a:schemeClr val="bg2"/>
-                  </a:outerShdw>
-                </a:effectLst>
-              </a14:hiddenEffects>
             </a:ext>
           </a:extLst>
         </p:spPr>
-        <p:txBody>
-          <a:bodyPr/>
-          <a:lstStyle>
-            <a:lvl1pPr>
-              <a:spcBef>
-                <a:spcPct val="20000"/>
-              </a:spcBef>
-              <a:defRPr sz="2800">
-                <a:solidFill>
-                  <a:schemeClr val="tx1"/>
-                </a:solidFill>
-                <a:latin typeface="Calibri" panose="020F0502020204030204" pitchFamily="34" charset="0"/>
-              </a:defRPr>
-            </a:lvl1pPr>
-            <a:lvl2pPr marL="823913" indent="-285750">
-              <a:spcBef>
-                <a:spcPct val="20000"/>
-              </a:spcBef>
-              <a:buChar char="•"/>
-              <a:defRPr sz="2000">
-                <a:solidFill>
-                  <a:schemeClr val="tx1"/>
-                </a:solidFill>
-                <a:latin typeface="Calibri" panose="020F0502020204030204" pitchFamily="34" charset="0"/>
-              </a:defRPr>
-            </a:lvl2pPr>
-            <a:lvl3pPr marL="1231900" indent="-228600">
-              <a:spcBef>
-                <a:spcPct val="20000"/>
-              </a:spcBef>
-              <a:buChar char="–"/>
-              <a:defRPr>
-                <a:solidFill>
-                  <a:schemeClr val="tx1"/>
-                </a:solidFill>
-                <a:latin typeface="Calibri" panose="020F0502020204030204" pitchFamily="34" charset="0"/>
-              </a:defRPr>
-            </a:lvl3pPr>
-            <a:lvl4pPr marL="1639888" indent="-228600">
-              <a:spcBef>
-                <a:spcPct val="20000"/>
-              </a:spcBef>
-              <a:buChar char="»"/>
-              <a:defRPr sz="1600">
-                <a:solidFill>
-                  <a:schemeClr val="tx1"/>
-                </a:solidFill>
-                <a:latin typeface="Calibri" panose="020F0502020204030204" pitchFamily="34" charset="0"/>
-              </a:defRPr>
-            </a:lvl4pPr>
-            <a:lvl5pPr marL="2057400" indent="-228600">
-              <a:spcBef>
-                <a:spcPct val="20000"/>
-              </a:spcBef>
-              <a:buChar char="»"/>
-              <a:defRPr sz="1400">
-                <a:solidFill>
-                  <a:schemeClr val="tx1"/>
-                </a:solidFill>
-                <a:latin typeface="Calibri" panose="020F0502020204030204" pitchFamily="34" charset="0"/>
-              </a:defRPr>
-            </a:lvl5pPr>
-            <a:lvl6pPr marL="2514600" indent="-228600" eaLnBrk="0" fontAlgn="base" hangingPunct="0">
-              <a:spcBef>
-                <a:spcPct val="20000"/>
-              </a:spcBef>
-              <a:spcAft>
-                <a:spcPct val="0"/>
-              </a:spcAft>
-              <a:buChar char="»"/>
-              <a:defRPr sz="1400">
-                <a:solidFill>
-                  <a:schemeClr val="tx1"/>
-                </a:solidFill>
-                <a:latin typeface="Calibri" panose="020F0502020204030204" pitchFamily="34" charset="0"/>
-              </a:defRPr>
-            </a:lvl6pPr>
-            <a:lvl7pPr marL="2971800" indent="-228600" eaLnBrk="0" fontAlgn="base" hangingPunct="0">
-              <a:spcBef>
-                <a:spcPct val="20000"/>
-              </a:spcBef>
-              <a:spcAft>
-                <a:spcPct val="0"/>
-              </a:spcAft>
-              <a:buChar char="»"/>
-              <a:defRPr sz="1400">
-                <a:solidFill>
-                  <a:schemeClr val="tx1"/>
-                </a:solidFill>
-                <a:latin typeface="Calibri" panose="020F0502020204030204" pitchFamily="34" charset="0"/>
-              </a:defRPr>
-            </a:lvl7pPr>
-            <a:lvl8pPr marL="3429000" indent="-228600" eaLnBrk="0" fontAlgn="base" hangingPunct="0">
-              <a:spcBef>
-                <a:spcPct val="20000"/>
-              </a:spcBef>
-              <a:spcAft>
-                <a:spcPct val="0"/>
-              </a:spcAft>
-              <a:buChar char="»"/>
-              <a:defRPr sz="1400">
-                <a:solidFill>
-                  <a:schemeClr val="tx1"/>
-                </a:solidFill>
-                <a:latin typeface="Calibri" panose="020F0502020204030204" pitchFamily="34" charset="0"/>
-              </a:defRPr>
-            </a:lvl8pPr>
-            <a:lvl9pPr marL="3886200" indent="-228600" eaLnBrk="0" fontAlgn="base" hangingPunct="0">
-              <a:spcBef>
-                <a:spcPct val="20000"/>
-              </a:spcBef>
-              <a:spcAft>
-                <a:spcPct val="0"/>
-              </a:spcAft>
-              <a:buChar char="»"/>
-              <a:defRPr sz="1400">
-                <a:solidFill>
-                  <a:schemeClr val="tx1"/>
-                </a:solidFill>
-                <a:latin typeface="Calibri" panose="020F0502020204030204" pitchFamily="34" charset="0"/>
-              </a:defRPr>
-            </a:lvl9pPr>
-          </a:lstStyle>
-          <a:p>
-            <a:r>
-              <a:rPr lang="en-US" altLang="zh-CN" sz="2600" dirty="0">
-                <a:ea typeface="宋体" panose="02010600030101010101" pitchFamily="2" charset="-122"/>
-              </a:rPr>
-              <a:t>For DFT, there is a fast algorithm for computation, FFT (Fast Fourier Transform)</a:t>
-            </a:r>
-          </a:p>
-        </p:txBody>
-      </p:sp>
-      <p:graphicFrame>
-        <p:nvGraphicFramePr>
-          <p:cNvPr id="20487" name="Object 10">
+      </p:pic>
+      <p:pic>
+        <p:nvPicPr>
+          <p:cNvPr id="17414" name="Picture 6" descr="https://i-blog.csdnimg.cn/blog_migrate/37337c92913b1cf1e4c2417ace065402.gif">
             <a:extLst>
               <a:ext uri="{FF2B5EF4-FFF2-40B4-BE49-F238E27FC236}">
-                <a16:creationId xmlns:a16="http://schemas.microsoft.com/office/drawing/2014/main" id="{7FADE7F1-17FC-461C-96A4-062D514E904A}"/>
+                <a16:creationId xmlns:a16="http://schemas.microsoft.com/office/drawing/2014/main" id="{A0519E4A-21BD-4BDC-9683-7C3156D71E33}"/>
               </a:ext>
             </a:extLst>
           </p:cNvPr>
-          <p:cNvGraphicFramePr>
-            <a:graphicFrameLocks noChangeAspect="1"/>
-          </p:cNvGraphicFramePr>
+          <p:cNvPicPr>
+            <a:picLocks noChangeAspect="1" noChangeArrowheads="1"/>
+          </p:cNvPicPr>
           <p:nvPr/>
-        </p:nvGraphicFramePr>
-        <p:xfrm>
-          <a:off x="2971801" y="3273426"/>
-          <a:ext cx="6164263" cy="944563"/>
-        </p:xfrm>
-        <a:graphic>
-          <a:graphicData uri="http://schemas.openxmlformats.org/presentationml/2006/ole">
-            <mc:AlternateContent xmlns:mc="http://schemas.openxmlformats.org/markup-compatibility/2006">
-              <mc:Choice xmlns:v="urn:schemas-microsoft-com:vml" Requires="v">
-                <p:oleObj spid="_x0000_s13565" name="Equation" r:id="rId8" imgW="2819400" imgH="431800" progId="Equation.DSMT4">
-                  <p:embed/>
-                </p:oleObj>
-              </mc:Choice>
-              <mc:Fallback>
-                <p:oleObj name="Equation" r:id="rId8" imgW="2819400" imgH="431800" progId="Equation.DSMT4">
-                  <p:embed/>
-                  <p:pic>
-                    <p:nvPicPr>
-                      <p:cNvPr id="20487" name="Object 10">
-                        <a:extLst>
-                          <a:ext uri="{FF2B5EF4-FFF2-40B4-BE49-F238E27FC236}">
-                            <a16:creationId xmlns:a16="http://schemas.microsoft.com/office/drawing/2014/main" id="{7FADE7F1-17FC-461C-96A4-062D514E904A}"/>
-                          </a:ext>
-                        </a:extLst>
-                      </p:cNvPr>
-                      <p:cNvPicPr>
-                        <a:picLocks noChangeAspect="1" noChangeArrowheads="1"/>
-                      </p:cNvPicPr>
-                      <p:nvPr/>
-                    </p:nvPicPr>
-                    <p:blipFill>
-                      <a:blip r:embed="rId9">
-                        <a:extLst>
-                          <a:ext uri="{28A0092B-C50C-407E-A947-70E740481C1C}">
-                            <a14:useLocalDpi xmlns:a14="http://schemas.microsoft.com/office/drawing/2010/main" val="0"/>
-                          </a:ext>
-                        </a:extLst>
-                      </a:blip>
-                      <a:srcRect/>
-                      <a:stretch>
-                        <a:fillRect/>
-                      </a:stretch>
-                    </p:blipFill>
-                    <p:spPr bwMode="auto">
-                      <a:xfrm>
-                        <a:off x="2971801" y="3273426"/>
-                        <a:ext cx="6164263" cy="944563"/>
-                      </a:xfrm>
-                      <a:prstGeom prst="rect">
-                        <a:avLst/>
-                      </a:prstGeom>
-                      <a:noFill/>
-                      <a:ln>
-                        <a:noFill/>
-                      </a:ln>
-                      <a:effectLst/>
-                      <a:extLst>
-                        <a:ext uri="{909E8E84-426E-40DD-AFC4-6F175D3DCCD1}">
-                          <a14:hiddenFill xmlns:a14="http://schemas.microsoft.com/office/drawing/2010/main">
-                            <a:solidFill>
-                              <a:schemeClr val="accent1"/>
-                            </a:solidFill>
-                          </a14:hiddenFill>
-                        </a:ext>
-                        <a:ext uri="{91240B29-F687-4F45-9708-019B960494DF}">
-                          <a14:hiddenLine xmlns:a14="http://schemas.microsoft.com/office/drawing/2010/main" w="9525">
-                            <a:solidFill>
-                              <a:schemeClr val="tx1"/>
-                            </a:solidFill>
-                            <a:miter lim="800000"/>
-                            <a:headEnd/>
-                            <a:tailEnd/>
-                          </a14:hiddenLine>
-                        </a:ext>
-                        <a:ext uri="{AF507438-7753-43E0-B8FC-AC1667EBCBE1}">
-                          <a14:hiddenEffects xmlns:a14="http://schemas.microsoft.com/office/drawing/2010/main">
-                            <a:effectLst>
-                              <a:outerShdw dist="35921" dir="2700000" algn="ctr" rotWithShape="0">
-                                <a:schemeClr val="bg2"/>
-                              </a:outerShdw>
-                            </a:effectLst>
-                          </a14:hiddenEffects>
-                        </a:ext>
-                      </a:extLst>
-                    </p:spPr>
-                  </p:pic>
-                </p:oleObj>
-              </mc:Fallback>
-            </mc:AlternateContent>
-          </a:graphicData>
-        </a:graphic>
-      </p:graphicFrame>
-      <p:sp>
-        <p:nvSpPr>
-          <p:cNvPr id="20488" name="Rectangle 11">
+        </p:nvPicPr>
+        <p:blipFill>
+          <a:blip r:embed="rId7">
             <a:extLst>
-              <a:ext uri="{FF2B5EF4-FFF2-40B4-BE49-F238E27FC236}">
-                <a16:creationId xmlns:a16="http://schemas.microsoft.com/office/drawing/2014/main" id="{6FCAF75C-2A69-4D9F-A85E-29C5AE7F429B}"/>
+              <a:ext uri="{28A0092B-C50C-407E-A947-70E740481C1C}">
+                <a14:useLocalDpi xmlns:a14="http://schemas.microsoft.com/office/drawing/2010/main" val="0"/>
               </a:ext>
             </a:extLst>
-          </p:cNvPr>
-          <p:cNvSpPr>
-            <a:spLocks noChangeArrowheads="1"/>
-          </p:cNvSpPr>
-          <p:nvPr/>
-        </p:nvSpPr>
+          </a:blip>
+          <a:srcRect/>
+          <a:stretch>
+            <a:fillRect/>
+          </a:stretch>
+        </p:blipFill>
         <p:spPr bwMode="auto">
           <a:xfrm>
-            <a:off x="2235200" y="3306763"/>
-            <a:ext cx="1066800" cy="838200"/>
+            <a:off x="6074228" y="2594941"/>
+            <a:ext cx="5334000" cy="4000500"/>
           </a:xfrm>
           <a:prstGeom prst="rect">
             <a:avLst/>
           </a:prstGeom>
           <a:noFill/>
-          <a:ln>
-            <a:noFill/>
-          </a:ln>
-          <a:effectLst/>
           <a:extLst>
             <a:ext uri="{909E8E84-426E-40DD-AFC4-6F175D3DCCD1}">
               <a14:hiddenFill xmlns:a14="http://schemas.microsoft.com/office/drawing/2010/main">
                 <a:solidFill>
-                  <a:schemeClr val="accent1"/>
+                  <a:srgbClr val="FFFFFF"/>
                 </a:solidFill>
               </a14:hiddenFill>
-            </a:ext>
-            <a:ext uri="{91240B29-F687-4F45-9708-019B960494DF}">
-              <a14:hiddenLine xmlns:a14="http://schemas.microsoft.com/office/drawing/2010/main" w="9525">
-                <a:solidFill>
-                  <a:schemeClr val="tx1"/>
-                </a:solidFill>
-                <a:miter lim="800000"/>
-                <a:headEnd/>
-                <a:tailEnd/>
-              </a14:hiddenLine>
-            </a:ext>
-            <a:ext uri="{AF507438-7753-43E0-B8FC-AC1667EBCBE1}">
-              <a14:hiddenEffects xmlns:a14="http://schemas.microsoft.com/office/drawing/2010/main">
-                <a:effectLst>
-                  <a:outerShdw dist="35921" dir="2700000" algn="ctr" rotWithShape="0">
-                    <a:schemeClr val="bg2"/>
-                  </a:outerShdw>
-                </a:effectLst>
-              </a14:hiddenEffects>
             </a:ext>
           </a:extLst>
         </p:spPr>
-        <p:txBody>
-          <a:bodyPr anchor="ctr"/>
-          <a:lstStyle>
-            <a:lvl1pPr>
-              <a:spcBef>
-                <a:spcPct val="20000"/>
-              </a:spcBef>
-              <a:defRPr sz="2800">
-                <a:solidFill>
-                  <a:schemeClr val="tx1"/>
-                </a:solidFill>
-                <a:latin typeface="Calibri" panose="020F0502020204030204" pitchFamily="34" charset="0"/>
-              </a:defRPr>
-            </a:lvl1pPr>
-            <a:lvl2pPr marL="742950" indent="-285750">
-              <a:spcBef>
-                <a:spcPct val="20000"/>
-              </a:spcBef>
-              <a:buChar char="•"/>
-              <a:defRPr sz="2000">
-                <a:solidFill>
-                  <a:schemeClr val="tx1"/>
-                </a:solidFill>
-                <a:latin typeface="Calibri" panose="020F0502020204030204" pitchFamily="34" charset="0"/>
-              </a:defRPr>
-            </a:lvl2pPr>
-            <a:lvl3pPr marL="1143000" indent="-228600">
-              <a:spcBef>
-                <a:spcPct val="20000"/>
-              </a:spcBef>
-              <a:buChar char="–"/>
-              <a:defRPr>
-                <a:solidFill>
-                  <a:schemeClr val="tx1"/>
-                </a:solidFill>
-                <a:latin typeface="Calibri" panose="020F0502020204030204" pitchFamily="34" charset="0"/>
-              </a:defRPr>
-            </a:lvl3pPr>
-            <a:lvl4pPr marL="1600200" indent="-228600">
-              <a:spcBef>
-                <a:spcPct val="20000"/>
-              </a:spcBef>
-              <a:buChar char="»"/>
-              <a:defRPr sz="1600">
-                <a:solidFill>
-                  <a:schemeClr val="tx1"/>
-                </a:solidFill>
-                <a:latin typeface="Calibri" panose="020F0502020204030204" pitchFamily="34" charset="0"/>
-              </a:defRPr>
-            </a:lvl4pPr>
-            <a:lvl5pPr marL="2057400" indent="-228600">
-              <a:spcBef>
-                <a:spcPct val="20000"/>
-              </a:spcBef>
-              <a:buChar char="»"/>
-              <a:defRPr sz="1400">
-                <a:solidFill>
-                  <a:schemeClr val="tx1"/>
-                </a:solidFill>
-                <a:latin typeface="Calibri" panose="020F0502020204030204" pitchFamily="34" charset="0"/>
-              </a:defRPr>
-            </a:lvl5pPr>
-            <a:lvl6pPr marL="2514600" indent="-228600" eaLnBrk="0" fontAlgn="base" hangingPunct="0">
-              <a:spcBef>
-                <a:spcPct val="20000"/>
-              </a:spcBef>
-              <a:spcAft>
-                <a:spcPct val="0"/>
-              </a:spcAft>
-              <a:buChar char="»"/>
-              <a:defRPr sz="1400">
-                <a:solidFill>
-                  <a:schemeClr val="tx1"/>
-                </a:solidFill>
-                <a:latin typeface="Calibri" panose="020F0502020204030204" pitchFamily="34" charset="0"/>
-              </a:defRPr>
-            </a:lvl6pPr>
-            <a:lvl7pPr marL="2971800" indent="-228600" eaLnBrk="0" fontAlgn="base" hangingPunct="0">
-              <a:spcBef>
-                <a:spcPct val="20000"/>
-              </a:spcBef>
-              <a:spcAft>
-                <a:spcPct val="0"/>
-              </a:spcAft>
-              <a:buChar char="»"/>
-              <a:defRPr sz="1400">
-                <a:solidFill>
-                  <a:schemeClr val="tx1"/>
-                </a:solidFill>
-                <a:latin typeface="Calibri" panose="020F0502020204030204" pitchFamily="34" charset="0"/>
-              </a:defRPr>
-            </a:lvl7pPr>
-            <a:lvl8pPr marL="3429000" indent="-228600" eaLnBrk="0" fontAlgn="base" hangingPunct="0">
-              <a:spcBef>
-                <a:spcPct val="20000"/>
-              </a:spcBef>
-              <a:spcAft>
-                <a:spcPct val="0"/>
-              </a:spcAft>
-              <a:buChar char="»"/>
-              <a:defRPr sz="1400">
-                <a:solidFill>
-                  <a:schemeClr val="tx1"/>
-                </a:solidFill>
-                <a:latin typeface="Calibri" panose="020F0502020204030204" pitchFamily="34" charset="0"/>
-              </a:defRPr>
-            </a:lvl8pPr>
-            <a:lvl9pPr marL="3886200" indent="-228600" eaLnBrk="0" fontAlgn="base" hangingPunct="0">
-              <a:spcBef>
-                <a:spcPct val="20000"/>
-              </a:spcBef>
-              <a:spcAft>
-                <a:spcPct val="0"/>
-              </a:spcAft>
-              <a:buChar char="»"/>
-              <a:defRPr sz="1400">
-                <a:solidFill>
-                  <a:schemeClr val="tx1"/>
-                </a:solidFill>
-                <a:latin typeface="Calibri" panose="020F0502020204030204" pitchFamily="34" charset="0"/>
-              </a:defRPr>
-            </a:lvl9pPr>
-          </a:lstStyle>
-          <a:p>
-            <a:pPr>
-              <a:spcBef>
-                <a:spcPct val="0"/>
-              </a:spcBef>
-            </a:pPr>
-            <a:endParaRPr lang="en-US" altLang="zh-CN" sz="2600" dirty="0">
-              <a:solidFill>
-                <a:schemeClr val="tx1">
-                  <a:lumMod val="85000"/>
-                  <a:lumOff val="15000"/>
-                </a:schemeClr>
-              </a:solidFill>
-              <a:ea typeface="宋体" panose="02010600030101010101" pitchFamily="2" charset="-122"/>
-            </a:endParaRPr>
-          </a:p>
-        </p:txBody>
-      </p:sp>
+      </p:pic>
+      <p:pic>
+        <p:nvPicPr>
+          <p:cNvPr id="17419" name="Picture 11" descr="https://i-blog.csdnimg.cn/blog_migrate/5783a8cd5540418d6bb269584b7aae58.gif">
+            <a:extLst>
+              <a:ext uri="{FF2B5EF4-FFF2-40B4-BE49-F238E27FC236}">
+                <a16:creationId xmlns:a16="http://schemas.microsoft.com/office/drawing/2014/main" id="{C5FD7257-5813-4F0F-BA99-56AA0D77E143}"/>
+              </a:ext>
+            </a:extLst>
+          </p:cNvPr>
+          <p:cNvPicPr>
+            <a:picLocks noChangeAspect="1" noChangeArrowheads="1"/>
+          </p:cNvPicPr>
+          <p:nvPr/>
+        </p:nvPicPr>
+        <p:blipFill>
+          <a:blip r:embed="rId8">
+            <a:extLst>
+              <a:ext uri="{28A0092B-C50C-407E-A947-70E740481C1C}">
+                <a14:useLocalDpi xmlns:a14="http://schemas.microsoft.com/office/drawing/2010/main" val="0"/>
+              </a:ext>
+            </a:extLst>
+          </a:blip>
+          <a:srcRect/>
+          <a:stretch>
+            <a:fillRect/>
+          </a:stretch>
+        </p:blipFill>
+        <p:spPr bwMode="auto">
+          <a:xfrm>
+            <a:off x="6074228" y="2594941"/>
+            <a:ext cx="5334000" cy="4000500"/>
+          </a:xfrm>
+          <a:prstGeom prst="rect">
+            <a:avLst/>
+          </a:prstGeom>
+          <a:noFill/>
+          <a:extLst>
+            <a:ext uri="{909E8E84-426E-40DD-AFC4-6F175D3DCCD1}">
+              <a14:hiddenFill xmlns:a14="http://schemas.microsoft.com/office/drawing/2010/main">
+                <a:solidFill>
+                  <a:srgbClr val="FFFFFF"/>
+                </a:solidFill>
+              </a14:hiddenFill>
+            </a:ext>
+          </a:extLst>
+        </p:spPr>
+      </p:pic>
     </p:spTree>
+    <p:extLst>
+      <p:ext uri="{BB962C8B-B14F-4D97-AF65-F5344CB8AC3E}">
+        <p14:creationId xmlns:p14="http://schemas.microsoft.com/office/powerpoint/2010/main" val="810913258"/>
+      </p:ext>
+    </p:extLst>
   </p:cSld>
   <p:clrMapOvr>
     <a:masterClrMapping/>
@@ -21485,19 +20753,19 @@
               <p:cTn id="2" dur="indefinite" nodeType="mainSeq">
                 <p:childTnLst>
                   <p:par>
-                    <p:cTn id="3" fill="hold" nodeType="clickPar">
+                    <p:cTn id="3" fill="hold">
                       <p:stCondLst>
                         <p:cond delay="indefinite"/>
                       </p:stCondLst>
                       <p:childTnLst>
                         <p:par>
-                          <p:cTn id="4" fill="hold" nodeType="withGroup">
+                          <p:cTn id="4" fill="hold">
                             <p:stCondLst>
                               <p:cond delay="0"/>
                             </p:stCondLst>
                             <p:childTnLst>
                               <p:par>
-                                <p:cTn id="5" presetID="22" presetClass="entr" presetSubtype="8" fill="hold" grpId="0" nodeType="clickEffect">
+                                <p:cTn id="5" presetID="10" presetClass="entr" presetSubtype="0" fill="hold" nodeType="clickEffect">
                                   <p:stCondLst>
                                     <p:cond delay="0"/>
                                   </p:stCondLst>
@@ -21510,7 +20778,7 @@
                                           </p:stCondLst>
                                         </p:cTn>
                                         <p:tgtEl>
-                                          <p:spTgt spid="2080777"/>
+                                          <p:spTgt spid="17419"/>
                                         </p:tgtEl>
                                         <p:attrNameLst>
                                           <p:attrName>style.visibility</p:attrName>
@@ -21520,11 +20788,11 @@
                                         <p:strVal val="visible"/>
                                       </p:to>
                                     </p:set>
-                                    <p:animEffect transition="in" filter="wipe(left)">
+                                    <p:animEffect transition="in" filter="fade">
                                       <p:cBhvr>
                                         <p:cTn id="7" dur="500"/>
                                         <p:tgtEl>
-                                          <p:spTgt spid="2080777"/>
+                                          <p:spTgt spid="17419"/>
                                         </p:tgtEl>
                                       </p:cBhvr>
                                     </p:animEffect>
@@ -21558,9 +20826,6 @@
         </p:cTn>
       </p:par>
     </p:tnLst>
-    <p:bldLst>
-      <p:bldP spid="2080777" grpId="0" animBg="1"/>
-    </p:bldLst>
   </p:timing>
 </p:sld>
 </file>
@@ -21659,7 +20924,7 @@
               <a:pPr>
                 <a:defRPr/>
               </a:pPr>
-              <a:t>10/6/2023</a:t>
+              <a:t>10/15/2025</a:t>
             </a:fld>
             <a:endParaRPr lang="en-US" altLang="zh-TW"/>
           </a:p>
@@ -23379,6 +22644,1991 @@
       </p:grpSpPr>
       <p:sp>
         <p:nvSpPr>
+          <p:cNvPr id="19458" name="Rectangle 2">
+            <a:extLst>
+              <a:ext uri="{FF2B5EF4-FFF2-40B4-BE49-F238E27FC236}">
+                <a16:creationId xmlns:a16="http://schemas.microsoft.com/office/drawing/2014/main" id="{10D893F2-C47B-4750-855D-7998CBF53E89}"/>
+              </a:ext>
+            </a:extLst>
+          </p:cNvPr>
+          <p:cNvSpPr>
+            <a:spLocks noGrp="1" noChangeArrowheads="1"/>
+          </p:cNvSpPr>
+          <p:nvPr>
+            <p:ph type="title"/>
+          </p:nvPr>
+        </p:nvSpPr>
+        <p:spPr/>
+        <p:txBody>
+          <a:bodyPr>
+            <a:normAutofit/>
+          </a:bodyPr>
+          <a:lstStyle/>
+          <a:p>
+            <a:r>
+              <a:rPr lang="en-US" altLang="zh-CN" dirty="0">
+                <a:ea typeface="宋体" panose="02010600030101010101" pitchFamily="2" charset="-122"/>
+              </a:rPr>
+              <a:t>Discrete Fourier Transform (DFT) in 1D Case</a:t>
+            </a:r>
+          </a:p>
+        </p:txBody>
+      </p:sp>
+      <p:sp>
+        <p:nvSpPr>
+          <p:cNvPr id="2" name="内容占位符 1">
+            <a:extLst>
+              <a:ext uri="{FF2B5EF4-FFF2-40B4-BE49-F238E27FC236}">
+                <a16:creationId xmlns:a16="http://schemas.microsoft.com/office/drawing/2014/main" id="{197230B4-ED24-4105-BB5D-4C0F9C214080}"/>
+              </a:ext>
+            </a:extLst>
+          </p:cNvPr>
+          <p:cNvSpPr>
+            <a:spLocks noGrp="1"/>
+          </p:cNvSpPr>
+          <p:nvPr>
+            <p:ph idx="1"/>
+          </p:nvPr>
+        </p:nvSpPr>
+        <p:spPr/>
+        <p:txBody>
+          <a:bodyPr>
+            <a:normAutofit/>
+          </a:bodyPr>
+          <a:lstStyle/>
+          <a:p>
+            <a:r>
+              <a:rPr lang="en-US" altLang="zh-CN" dirty="0"/>
+              <a:t>Given a discrete sequence with </a:t>
+            </a:r>
+            <a:r>
+              <a:rPr lang="en-US" altLang="zh-CN" i="1" dirty="0">
+                <a:latin typeface="Times New Roman" panose="02020603050405020304" pitchFamily="18" charset="0"/>
+              </a:rPr>
+              <a:t>M</a:t>
+            </a:r>
+            <a:r>
+              <a:rPr lang="en-US" altLang="zh-CN" dirty="0"/>
+              <a:t> points</a:t>
+            </a:r>
+          </a:p>
+          <a:p>
+            <a:endParaRPr lang="en-US" altLang="zh-CN" dirty="0"/>
+          </a:p>
+          <a:p>
+            <a:r>
+              <a:rPr lang="en-US" altLang="zh-CN" dirty="0"/>
+              <a:t>Regard it as a periodic signal, thus its basis frequency is</a:t>
+            </a:r>
+          </a:p>
+          <a:p>
+            <a:r>
+              <a:rPr lang="en-US" altLang="zh-CN" dirty="0"/>
+              <a:t>For its frequency components, the frequencies are,</a:t>
+            </a:r>
+          </a:p>
+          <a:p>
+            <a:endParaRPr lang="en-US" altLang="zh-CN" dirty="0"/>
+          </a:p>
+          <a:p>
+            <a:endParaRPr lang="en-US" altLang="zh-CN" dirty="0">
+              <a:solidFill>
+                <a:srgbClr val="000000"/>
+              </a:solidFill>
+            </a:endParaRPr>
+          </a:p>
+          <a:p>
+            <a:r>
+              <a:rPr lang="en-US" altLang="zh-CN" dirty="0">
+                <a:solidFill>
+                  <a:srgbClr val="000000"/>
+                </a:solidFill>
+              </a:rPr>
+              <a:t>Its DFT is computed as</a:t>
+            </a:r>
+          </a:p>
+          <a:p>
+            <a:endParaRPr lang="en-US" altLang="zh-CN" dirty="0">
+              <a:solidFill>
+                <a:srgbClr val="000000"/>
+              </a:solidFill>
+            </a:endParaRPr>
+          </a:p>
+          <a:p>
+            <a:r>
+              <a:rPr lang="en-US" altLang="zh-CN" dirty="0">
+                <a:solidFill>
+                  <a:srgbClr val="000000"/>
+                </a:solidFill>
+              </a:rPr>
+              <a:t>Usually, we write it as, </a:t>
+            </a:r>
+          </a:p>
+          <a:p>
+            <a:endParaRPr lang="en-US" altLang="zh-CN" dirty="0"/>
+          </a:p>
+          <a:p>
+            <a:endParaRPr lang="zh-CN" altLang="en-US" dirty="0"/>
+          </a:p>
+        </p:txBody>
+      </p:sp>
+      <p:sp>
+        <p:nvSpPr>
+          <p:cNvPr id="19459" name="Rectangle 5">
+            <a:extLst>
+              <a:ext uri="{FF2B5EF4-FFF2-40B4-BE49-F238E27FC236}">
+                <a16:creationId xmlns:a16="http://schemas.microsoft.com/office/drawing/2014/main" id="{D69ECB22-44AA-43F6-B743-7492D71B5CCC}"/>
+              </a:ext>
+            </a:extLst>
+          </p:cNvPr>
+          <p:cNvSpPr>
+            <a:spLocks noChangeArrowheads="1"/>
+          </p:cNvSpPr>
+          <p:nvPr/>
+        </p:nvSpPr>
+        <p:spPr bwMode="auto">
+          <a:xfrm>
+            <a:off x="2209800" y="914400"/>
+            <a:ext cx="7772400" cy="3429000"/>
+          </a:xfrm>
+          <a:prstGeom prst="rect">
+            <a:avLst/>
+          </a:prstGeom>
+          <a:noFill/>
+          <a:ln>
+            <a:noFill/>
+          </a:ln>
+          <a:effectLst/>
+          <a:extLst>
+            <a:ext uri="{909E8E84-426E-40DD-AFC4-6F175D3DCCD1}">
+              <a14:hiddenFill xmlns:a14="http://schemas.microsoft.com/office/drawing/2010/main">
+                <a:solidFill>
+                  <a:schemeClr val="accent1"/>
+                </a:solidFill>
+              </a14:hiddenFill>
+            </a:ext>
+            <a:ext uri="{91240B29-F687-4F45-9708-019B960494DF}">
+              <a14:hiddenLine xmlns:a14="http://schemas.microsoft.com/office/drawing/2010/main" w="9525">
+                <a:solidFill>
+                  <a:schemeClr val="tx1"/>
+                </a:solidFill>
+                <a:miter lim="800000"/>
+                <a:headEnd/>
+                <a:tailEnd/>
+              </a14:hiddenLine>
+            </a:ext>
+            <a:ext uri="{AF507438-7753-43E0-B8FC-AC1667EBCBE1}">
+              <a14:hiddenEffects xmlns:a14="http://schemas.microsoft.com/office/drawing/2010/main">
+                <a:effectLst>
+                  <a:outerShdw dist="35921" dir="2700000" algn="ctr" rotWithShape="0">
+                    <a:schemeClr val="bg2"/>
+                  </a:outerShdw>
+                </a:effectLst>
+              </a14:hiddenEffects>
+            </a:ext>
+          </a:extLst>
+        </p:spPr>
+        <p:txBody>
+          <a:bodyPr/>
+          <a:lstStyle>
+            <a:lvl1pPr marL="342900" indent="-342900">
+              <a:spcBef>
+                <a:spcPct val="20000"/>
+              </a:spcBef>
+              <a:defRPr sz="2800">
+                <a:solidFill>
+                  <a:schemeClr val="tx1"/>
+                </a:solidFill>
+                <a:latin typeface="Calibri" panose="020F0502020204030204" pitchFamily="34" charset="0"/>
+              </a:defRPr>
+            </a:lvl1pPr>
+            <a:lvl2pPr marL="742950" indent="-285750">
+              <a:spcBef>
+                <a:spcPct val="20000"/>
+              </a:spcBef>
+              <a:buChar char="•"/>
+              <a:defRPr sz="2000">
+                <a:solidFill>
+                  <a:schemeClr val="tx1"/>
+                </a:solidFill>
+                <a:latin typeface="Calibri" panose="020F0502020204030204" pitchFamily="34" charset="0"/>
+              </a:defRPr>
+            </a:lvl2pPr>
+            <a:lvl3pPr marL="1143000" indent="-228600">
+              <a:spcBef>
+                <a:spcPct val="20000"/>
+              </a:spcBef>
+              <a:buChar char="–"/>
+              <a:defRPr>
+                <a:solidFill>
+                  <a:schemeClr val="tx1"/>
+                </a:solidFill>
+                <a:latin typeface="Calibri" panose="020F0502020204030204" pitchFamily="34" charset="0"/>
+              </a:defRPr>
+            </a:lvl3pPr>
+            <a:lvl4pPr marL="1600200" indent="-228600">
+              <a:spcBef>
+                <a:spcPct val="20000"/>
+              </a:spcBef>
+              <a:buChar char="»"/>
+              <a:defRPr sz="1600">
+                <a:solidFill>
+                  <a:schemeClr val="tx1"/>
+                </a:solidFill>
+                <a:latin typeface="Calibri" panose="020F0502020204030204" pitchFamily="34" charset="0"/>
+              </a:defRPr>
+            </a:lvl4pPr>
+            <a:lvl5pPr marL="2057400" indent="-228600">
+              <a:spcBef>
+                <a:spcPct val="20000"/>
+              </a:spcBef>
+              <a:buChar char="»"/>
+              <a:defRPr sz="1400">
+                <a:solidFill>
+                  <a:schemeClr val="tx1"/>
+                </a:solidFill>
+                <a:latin typeface="Calibri" panose="020F0502020204030204" pitchFamily="34" charset="0"/>
+              </a:defRPr>
+            </a:lvl5pPr>
+            <a:lvl6pPr marL="2514600" indent="-228600" eaLnBrk="0" fontAlgn="base" hangingPunct="0">
+              <a:spcBef>
+                <a:spcPct val="20000"/>
+              </a:spcBef>
+              <a:spcAft>
+                <a:spcPct val="0"/>
+              </a:spcAft>
+              <a:buChar char="»"/>
+              <a:defRPr sz="1400">
+                <a:solidFill>
+                  <a:schemeClr val="tx1"/>
+                </a:solidFill>
+                <a:latin typeface="Calibri" panose="020F0502020204030204" pitchFamily="34" charset="0"/>
+              </a:defRPr>
+            </a:lvl6pPr>
+            <a:lvl7pPr marL="2971800" indent="-228600" eaLnBrk="0" fontAlgn="base" hangingPunct="0">
+              <a:spcBef>
+                <a:spcPct val="20000"/>
+              </a:spcBef>
+              <a:spcAft>
+                <a:spcPct val="0"/>
+              </a:spcAft>
+              <a:buChar char="»"/>
+              <a:defRPr sz="1400">
+                <a:solidFill>
+                  <a:schemeClr val="tx1"/>
+                </a:solidFill>
+                <a:latin typeface="Calibri" panose="020F0502020204030204" pitchFamily="34" charset="0"/>
+              </a:defRPr>
+            </a:lvl7pPr>
+            <a:lvl8pPr marL="3429000" indent="-228600" eaLnBrk="0" fontAlgn="base" hangingPunct="0">
+              <a:spcBef>
+                <a:spcPct val="20000"/>
+              </a:spcBef>
+              <a:spcAft>
+                <a:spcPct val="0"/>
+              </a:spcAft>
+              <a:buChar char="»"/>
+              <a:defRPr sz="1400">
+                <a:solidFill>
+                  <a:schemeClr val="tx1"/>
+                </a:solidFill>
+                <a:latin typeface="Calibri" panose="020F0502020204030204" pitchFamily="34" charset="0"/>
+              </a:defRPr>
+            </a:lvl8pPr>
+            <a:lvl9pPr marL="3886200" indent="-228600" eaLnBrk="0" fontAlgn="base" hangingPunct="0">
+              <a:spcBef>
+                <a:spcPct val="20000"/>
+              </a:spcBef>
+              <a:spcAft>
+                <a:spcPct val="0"/>
+              </a:spcAft>
+              <a:buChar char="»"/>
+              <a:defRPr sz="1400">
+                <a:solidFill>
+                  <a:schemeClr val="tx1"/>
+                </a:solidFill>
+                <a:latin typeface="Calibri" panose="020F0502020204030204" pitchFamily="34" charset="0"/>
+              </a:defRPr>
+            </a:lvl9pPr>
+          </a:lstStyle>
+          <a:p>
+            <a:endParaRPr lang="en-US" altLang="zh-CN" sz="2600" dirty="0">
+              <a:ea typeface="宋体" panose="02010600030101010101" pitchFamily="2" charset="-122"/>
+            </a:endParaRPr>
+          </a:p>
+        </p:txBody>
+      </p:sp>
+      <p:graphicFrame>
+        <p:nvGraphicFramePr>
+          <p:cNvPr id="19460" name="Object 6">
+            <a:extLst>
+              <a:ext uri="{FF2B5EF4-FFF2-40B4-BE49-F238E27FC236}">
+                <a16:creationId xmlns:a16="http://schemas.microsoft.com/office/drawing/2014/main" id="{85F7E8CE-8B2C-4596-BE50-3BBC088067CA}"/>
+              </a:ext>
+            </a:extLst>
+          </p:cNvPr>
+          <p:cNvGraphicFramePr>
+            <a:graphicFrameLocks noChangeAspect="1"/>
+          </p:cNvGraphicFramePr>
+          <p:nvPr/>
+        </p:nvGraphicFramePr>
+        <p:xfrm>
+          <a:off x="4191000" y="1401763"/>
+          <a:ext cx="2749550" cy="500062"/>
+        </p:xfrm>
+        <a:graphic>
+          <a:graphicData uri="http://schemas.openxmlformats.org/presentationml/2006/ole">
+            <mc:AlternateContent xmlns:mc="http://schemas.openxmlformats.org/markup-compatibility/2006">
+              <mc:Choice xmlns:v="urn:schemas-microsoft-com:vml" Requires="v">
+                <p:oleObj spid="_x0000_s12646" name="Equation" r:id="rId3" imgW="1257300" imgH="228600" progId="Equation.DSMT4">
+                  <p:embed/>
+                </p:oleObj>
+              </mc:Choice>
+              <mc:Fallback>
+                <p:oleObj name="Equation" r:id="rId3" imgW="1257300" imgH="228600" progId="Equation.DSMT4">
+                  <p:embed/>
+                  <p:pic>
+                    <p:nvPicPr>
+                      <p:cNvPr id="19460" name="Object 6">
+                        <a:extLst>
+                          <a:ext uri="{FF2B5EF4-FFF2-40B4-BE49-F238E27FC236}">
+                            <a16:creationId xmlns:a16="http://schemas.microsoft.com/office/drawing/2014/main" id="{85F7E8CE-8B2C-4596-BE50-3BBC088067CA}"/>
+                          </a:ext>
+                        </a:extLst>
+                      </p:cNvPr>
+                      <p:cNvPicPr>
+                        <a:picLocks noChangeAspect="1" noChangeArrowheads="1"/>
+                      </p:cNvPicPr>
+                      <p:nvPr/>
+                    </p:nvPicPr>
+                    <p:blipFill>
+                      <a:blip r:embed="rId4">
+                        <a:extLst>
+                          <a:ext uri="{28A0092B-C50C-407E-A947-70E740481C1C}">
+                            <a14:useLocalDpi xmlns:a14="http://schemas.microsoft.com/office/drawing/2010/main" val="0"/>
+                          </a:ext>
+                        </a:extLst>
+                      </a:blip>
+                      <a:srcRect/>
+                      <a:stretch>
+                        <a:fillRect/>
+                      </a:stretch>
+                    </p:blipFill>
+                    <p:spPr bwMode="auto">
+                      <a:xfrm>
+                        <a:off x="4191000" y="1401763"/>
+                        <a:ext cx="2749550" cy="500062"/>
+                      </a:xfrm>
+                      <a:prstGeom prst="rect">
+                        <a:avLst/>
+                      </a:prstGeom>
+                      <a:noFill/>
+                      <a:ln>
+                        <a:noFill/>
+                      </a:ln>
+                      <a:effectLst/>
+                      <a:extLst>
+                        <a:ext uri="{909E8E84-426E-40DD-AFC4-6F175D3DCCD1}">
+                          <a14:hiddenFill xmlns:a14="http://schemas.microsoft.com/office/drawing/2010/main">
+                            <a:solidFill>
+                              <a:schemeClr val="accent1"/>
+                            </a:solidFill>
+                          </a14:hiddenFill>
+                        </a:ext>
+                        <a:ext uri="{91240B29-F687-4F45-9708-019B960494DF}">
+                          <a14:hiddenLine xmlns:a14="http://schemas.microsoft.com/office/drawing/2010/main" w="9525">
+                            <a:solidFill>
+                              <a:schemeClr val="tx1"/>
+                            </a:solidFill>
+                            <a:miter lim="800000"/>
+                            <a:headEnd/>
+                            <a:tailEnd/>
+                          </a14:hiddenLine>
+                        </a:ext>
+                        <a:ext uri="{AF507438-7753-43E0-B8FC-AC1667EBCBE1}">
+                          <a14:hiddenEffects xmlns:a14="http://schemas.microsoft.com/office/drawing/2010/main">
+                            <a:effectLst>
+                              <a:outerShdw dist="35921" dir="2700000" algn="ctr" rotWithShape="0">
+                                <a:schemeClr val="bg2"/>
+                              </a:outerShdw>
+                            </a:effectLst>
+                          </a14:hiddenEffects>
+                        </a:ext>
+                      </a:extLst>
+                    </p:spPr>
+                  </p:pic>
+                </p:oleObj>
+              </mc:Fallback>
+            </mc:AlternateContent>
+          </a:graphicData>
+        </a:graphic>
+      </p:graphicFrame>
+      <p:pic>
+        <p:nvPicPr>
+          <p:cNvPr id="19461" name="图片 3">
+            <a:extLst>
+              <a:ext uri="{FF2B5EF4-FFF2-40B4-BE49-F238E27FC236}">
+                <a16:creationId xmlns:a16="http://schemas.microsoft.com/office/drawing/2014/main" id="{BBBF2200-18AE-4F9A-84D7-51790DC294FF}"/>
+              </a:ext>
+            </a:extLst>
+          </p:cNvPr>
+          <p:cNvPicPr>
+            <a:picLocks noChangeAspect="1"/>
+          </p:cNvPicPr>
+          <p:nvPr/>
+        </p:nvPicPr>
+        <p:blipFill>
+          <a:blip r:embed="rId5">
+            <a:extLst>
+              <a:ext uri="{28A0092B-C50C-407E-A947-70E740481C1C}">
+                <a14:useLocalDpi xmlns:a14="http://schemas.microsoft.com/office/drawing/2010/main" val="0"/>
+              </a:ext>
+            </a:extLst>
+          </a:blip>
+          <a:srcRect/>
+          <a:stretch>
+            <a:fillRect/>
+          </a:stretch>
+        </p:blipFill>
+        <p:spPr bwMode="auto">
+          <a:xfrm>
+            <a:off x="7802354" y="1652588"/>
+            <a:ext cx="463550" cy="781050"/>
+          </a:xfrm>
+          <a:prstGeom prst="rect">
+            <a:avLst/>
+          </a:prstGeom>
+          <a:noFill/>
+          <a:ln>
+            <a:noFill/>
+          </a:ln>
+          <a:extLst>
+            <a:ext uri="{909E8E84-426E-40DD-AFC4-6F175D3DCCD1}">
+              <a14:hiddenFill xmlns:a14="http://schemas.microsoft.com/office/drawing/2010/main">
+                <a:solidFill>
+                  <a:srgbClr val="FFFFFF"/>
+                </a:solidFill>
+              </a14:hiddenFill>
+            </a:ext>
+            <a:ext uri="{91240B29-F687-4F45-9708-019B960494DF}">
+              <a14:hiddenLine xmlns:a14="http://schemas.microsoft.com/office/drawing/2010/main" w="9525">
+                <a:solidFill>
+                  <a:srgbClr val="000000"/>
+                </a:solidFill>
+                <a:miter lim="800000"/>
+                <a:headEnd/>
+                <a:tailEnd/>
+              </a14:hiddenLine>
+            </a:ext>
+          </a:extLst>
+        </p:spPr>
+      </p:pic>
+      <p:graphicFrame>
+        <p:nvGraphicFramePr>
+          <p:cNvPr id="19462" name="Object 8">
+            <a:extLst>
+              <a:ext uri="{FF2B5EF4-FFF2-40B4-BE49-F238E27FC236}">
+                <a16:creationId xmlns:a16="http://schemas.microsoft.com/office/drawing/2014/main" id="{71D6309F-0167-4CB8-805D-20A037586BFE}"/>
+              </a:ext>
+            </a:extLst>
+          </p:cNvPr>
+          <p:cNvGraphicFramePr>
+            <a:graphicFrameLocks noChangeAspect="1"/>
+          </p:cNvGraphicFramePr>
+          <p:nvPr/>
+        </p:nvGraphicFramePr>
+        <p:xfrm>
+          <a:off x="4013201" y="2740026"/>
+          <a:ext cx="4056063" cy="862013"/>
+        </p:xfrm>
+        <a:graphic>
+          <a:graphicData uri="http://schemas.openxmlformats.org/presentationml/2006/ole">
+            <mc:AlternateContent xmlns:mc="http://schemas.openxmlformats.org/markup-compatibility/2006">
+              <mc:Choice xmlns:v="urn:schemas-microsoft-com:vml" Requires="v">
+                <p:oleObj spid="_x0000_s12647" name="Equation" r:id="rId6" imgW="1854200" imgH="393700" progId="Equation.DSMT4">
+                  <p:embed/>
+                </p:oleObj>
+              </mc:Choice>
+              <mc:Fallback>
+                <p:oleObj name="Equation" r:id="rId6" imgW="1854200" imgH="393700" progId="Equation.DSMT4">
+                  <p:embed/>
+                  <p:pic>
+                    <p:nvPicPr>
+                      <p:cNvPr id="19462" name="Object 8">
+                        <a:extLst>
+                          <a:ext uri="{FF2B5EF4-FFF2-40B4-BE49-F238E27FC236}">
+                            <a16:creationId xmlns:a16="http://schemas.microsoft.com/office/drawing/2014/main" id="{71D6309F-0167-4CB8-805D-20A037586BFE}"/>
+                          </a:ext>
+                        </a:extLst>
+                      </p:cNvPr>
+                      <p:cNvPicPr>
+                        <a:picLocks noChangeAspect="1" noChangeArrowheads="1"/>
+                      </p:cNvPicPr>
+                      <p:nvPr/>
+                    </p:nvPicPr>
+                    <p:blipFill>
+                      <a:blip r:embed="rId7">
+                        <a:extLst>
+                          <a:ext uri="{28A0092B-C50C-407E-A947-70E740481C1C}">
+                            <a14:useLocalDpi xmlns:a14="http://schemas.microsoft.com/office/drawing/2010/main" val="0"/>
+                          </a:ext>
+                        </a:extLst>
+                      </a:blip>
+                      <a:srcRect/>
+                      <a:stretch>
+                        <a:fillRect/>
+                      </a:stretch>
+                    </p:blipFill>
+                    <p:spPr bwMode="auto">
+                      <a:xfrm>
+                        <a:off x="4013201" y="2740026"/>
+                        <a:ext cx="4056063" cy="862013"/>
+                      </a:xfrm>
+                      <a:prstGeom prst="rect">
+                        <a:avLst/>
+                      </a:prstGeom>
+                      <a:noFill/>
+                      <a:ln>
+                        <a:noFill/>
+                      </a:ln>
+                      <a:effectLst/>
+                      <a:extLst>
+                        <a:ext uri="{909E8E84-426E-40DD-AFC4-6F175D3DCCD1}">
+                          <a14:hiddenFill xmlns:a14="http://schemas.microsoft.com/office/drawing/2010/main">
+                            <a:solidFill>
+                              <a:schemeClr val="accent1"/>
+                            </a:solidFill>
+                          </a14:hiddenFill>
+                        </a:ext>
+                        <a:ext uri="{91240B29-F687-4F45-9708-019B960494DF}">
+                          <a14:hiddenLine xmlns:a14="http://schemas.microsoft.com/office/drawing/2010/main" w="9525">
+                            <a:solidFill>
+                              <a:schemeClr val="tx1"/>
+                            </a:solidFill>
+                            <a:miter lim="800000"/>
+                            <a:headEnd/>
+                            <a:tailEnd/>
+                          </a14:hiddenLine>
+                        </a:ext>
+                        <a:ext uri="{AF507438-7753-43E0-B8FC-AC1667EBCBE1}">
+                          <a14:hiddenEffects xmlns:a14="http://schemas.microsoft.com/office/drawing/2010/main">
+                            <a:effectLst>
+                              <a:outerShdw dist="35921" dir="2700000" algn="ctr" rotWithShape="0">
+                                <a:schemeClr val="bg2"/>
+                              </a:outerShdw>
+                            </a:effectLst>
+                          </a14:hiddenEffects>
+                        </a:ext>
+                      </a:extLst>
+                    </p:spPr>
+                  </p:pic>
+                </p:oleObj>
+              </mc:Fallback>
+            </mc:AlternateContent>
+          </a:graphicData>
+        </a:graphic>
+      </p:graphicFrame>
+      <p:graphicFrame>
+        <p:nvGraphicFramePr>
+          <p:cNvPr id="19463" name="Object 8">
+            <a:extLst>
+              <a:ext uri="{FF2B5EF4-FFF2-40B4-BE49-F238E27FC236}">
+                <a16:creationId xmlns:a16="http://schemas.microsoft.com/office/drawing/2014/main" id="{575627D3-DF2D-4152-BFD4-CEE0D2E5318C}"/>
+              </a:ext>
+            </a:extLst>
+          </p:cNvPr>
+          <p:cNvGraphicFramePr>
+            <a:graphicFrameLocks noChangeAspect="1"/>
+          </p:cNvGraphicFramePr>
+          <p:nvPr>
+            <p:extLst>
+              <p:ext uri="{D42A27DB-BD31-4B8C-83A1-F6EECF244321}">
+                <p14:modId xmlns:p14="http://schemas.microsoft.com/office/powerpoint/2010/main" val="1339284563"/>
+              </p:ext>
+            </p:extLst>
+          </p:nvPr>
+        </p:nvGraphicFramePr>
+        <p:xfrm>
+          <a:off x="3595689" y="4135302"/>
+          <a:ext cx="5083175" cy="973137"/>
+        </p:xfrm>
+        <a:graphic>
+          <a:graphicData uri="http://schemas.openxmlformats.org/presentationml/2006/ole">
+            <mc:AlternateContent xmlns:mc="http://schemas.openxmlformats.org/markup-compatibility/2006">
+              <mc:Choice xmlns:v="urn:schemas-microsoft-com:vml" Requires="v">
+                <p:oleObj spid="_x0000_s12648" name="Equation" r:id="rId8" imgW="2324100" imgH="444500" progId="Equation.DSMT4">
+                  <p:embed/>
+                </p:oleObj>
+              </mc:Choice>
+              <mc:Fallback>
+                <p:oleObj name="Equation" r:id="rId8" imgW="2324100" imgH="444500" progId="Equation.DSMT4">
+                  <p:embed/>
+                  <p:pic>
+                    <p:nvPicPr>
+                      <p:cNvPr id="19463" name="Object 8">
+                        <a:extLst>
+                          <a:ext uri="{FF2B5EF4-FFF2-40B4-BE49-F238E27FC236}">
+                            <a16:creationId xmlns:a16="http://schemas.microsoft.com/office/drawing/2014/main" id="{575627D3-DF2D-4152-BFD4-CEE0D2E5318C}"/>
+                          </a:ext>
+                        </a:extLst>
+                      </p:cNvPr>
+                      <p:cNvPicPr>
+                        <a:picLocks noChangeAspect="1" noChangeArrowheads="1"/>
+                      </p:cNvPicPr>
+                      <p:nvPr/>
+                    </p:nvPicPr>
+                    <p:blipFill>
+                      <a:blip r:embed="rId9">
+                        <a:extLst>
+                          <a:ext uri="{28A0092B-C50C-407E-A947-70E740481C1C}">
+                            <a14:useLocalDpi xmlns:a14="http://schemas.microsoft.com/office/drawing/2010/main" val="0"/>
+                          </a:ext>
+                        </a:extLst>
+                      </a:blip>
+                      <a:srcRect/>
+                      <a:stretch>
+                        <a:fillRect/>
+                      </a:stretch>
+                    </p:blipFill>
+                    <p:spPr bwMode="auto">
+                      <a:xfrm>
+                        <a:off x="3595689" y="4135302"/>
+                        <a:ext cx="5083175" cy="973137"/>
+                      </a:xfrm>
+                      <a:prstGeom prst="rect">
+                        <a:avLst/>
+                      </a:prstGeom>
+                      <a:noFill/>
+                      <a:ln>
+                        <a:noFill/>
+                      </a:ln>
+                      <a:effectLst/>
+                      <a:extLst>
+                        <a:ext uri="{909E8E84-426E-40DD-AFC4-6F175D3DCCD1}">
+                          <a14:hiddenFill xmlns:a14="http://schemas.microsoft.com/office/drawing/2010/main">
+                            <a:solidFill>
+                              <a:schemeClr val="accent1"/>
+                            </a:solidFill>
+                          </a14:hiddenFill>
+                        </a:ext>
+                        <a:ext uri="{91240B29-F687-4F45-9708-019B960494DF}">
+                          <a14:hiddenLine xmlns:a14="http://schemas.microsoft.com/office/drawing/2010/main" w="9525">
+                            <a:solidFill>
+                              <a:schemeClr val="tx1"/>
+                            </a:solidFill>
+                            <a:miter lim="800000"/>
+                            <a:headEnd/>
+                            <a:tailEnd/>
+                          </a14:hiddenLine>
+                        </a:ext>
+                        <a:ext uri="{AF507438-7753-43E0-B8FC-AC1667EBCBE1}">
+                          <a14:hiddenEffects xmlns:a14="http://schemas.microsoft.com/office/drawing/2010/main">
+                            <a:effectLst>
+                              <a:outerShdw dist="35921" dir="2700000" algn="ctr" rotWithShape="0">
+                                <a:schemeClr val="bg2"/>
+                              </a:outerShdw>
+                            </a:effectLst>
+                          </a14:hiddenEffects>
+                        </a:ext>
+                      </a:extLst>
+                    </p:spPr>
+                  </p:pic>
+                </p:oleObj>
+              </mc:Fallback>
+            </mc:AlternateContent>
+          </a:graphicData>
+        </a:graphic>
+      </p:graphicFrame>
+      <p:graphicFrame>
+        <p:nvGraphicFramePr>
+          <p:cNvPr id="19466" name="Object 8">
+            <a:extLst>
+              <a:ext uri="{FF2B5EF4-FFF2-40B4-BE49-F238E27FC236}">
+                <a16:creationId xmlns:a16="http://schemas.microsoft.com/office/drawing/2014/main" id="{9D4CF967-37EC-4AB5-BD9B-A2FB42427365}"/>
+              </a:ext>
+            </a:extLst>
+          </p:cNvPr>
+          <p:cNvGraphicFramePr>
+            <a:graphicFrameLocks noChangeAspect="1"/>
+          </p:cNvGraphicFramePr>
+          <p:nvPr>
+            <p:extLst>
+              <p:ext uri="{D42A27DB-BD31-4B8C-83A1-F6EECF244321}">
+                <p14:modId xmlns:p14="http://schemas.microsoft.com/office/powerpoint/2010/main" val="685721215"/>
+              </p:ext>
+            </p:extLst>
+          </p:nvPr>
+        </p:nvGraphicFramePr>
+        <p:xfrm>
+          <a:off x="3275014" y="5519602"/>
+          <a:ext cx="5749925" cy="973137"/>
+        </p:xfrm>
+        <a:graphic>
+          <a:graphicData uri="http://schemas.openxmlformats.org/presentationml/2006/ole">
+            <mc:AlternateContent xmlns:mc="http://schemas.openxmlformats.org/markup-compatibility/2006">
+              <mc:Choice xmlns:v="urn:schemas-microsoft-com:vml" Requires="v">
+                <p:oleObj spid="_x0000_s12649" name="Equation" r:id="rId10" imgW="2628900" imgH="444500" progId="Equation.DSMT4">
+                  <p:embed/>
+                </p:oleObj>
+              </mc:Choice>
+              <mc:Fallback>
+                <p:oleObj name="Equation" r:id="rId10" imgW="2628900" imgH="444500" progId="Equation.DSMT4">
+                  <p:embed/>
+                  <p:pic>
+                    <p:nvPicPr>
+                      <p:cNvPr id="19466" name="Object 8">
+                        <a:extLst>
+                          <a:ext uri="{FF2B5EF4-FFF2-40B4-BE49-F238E27FC236}">
+                            <a16:creationId xmlns:a16="http://schemas.microsoft.com/office/drawing/2014/main" id="{9D4CF967-37EC-4AB5-BD9B-A2FB42427365}"/>
+                          </a:ext>
+                        </a:extLst>
+                      </p:cNvPr>
+                      <p:cNvPicPr>
+                        <a:picLocks noChangeAspect="1" noChangeArrowheads="1"/>
+                      </p:cNvPicPr>
+                      <p:nvPr/>
+                    </p:nvPicPr>
+                    <p:blipFill>
+                      <a:blip r:embed="rId11">
+                        <a:extLst>
+                          <a:ext uri="{28A0092B-C50C-407E-A947-70E740481C1C}">
+                            <a14:useLocalDpi xmlns:a14="http://schemas.microsoft.com/office/drawing/2010/main" val="0"/>
+                          </a:ext>
+                        </a:extLst>
+                      </a:blip>
+                      <a:srcRect/>
+                      <a:stretch>
+                        <a:fillRect/>
+                      </a:stretch>
+                    </p:blipFill>
+                    <p:spPr bwMode="auto">
+                      <a:xfrm>
+                        <a:off x="3275014" y="5519602"/>
+                        <a:ext cx="5749925" cy="973137"/>
+                      </a:xfrm>
+                      <a:prstGeom prst="rect">
+                        <a:avLst/>
+                      </a:prstGeom>
+                      <a:noFill/>
+                      <a:ln>
+                        <a:noFill/>
+                      </a:ln>
+                      <a:effectLst/>
+                      <a:extLst>
+                        <a:ext uri="{909E8E84-426E-40DD-AFC4-6F175D3DCCD1}">
+                          <a14:hiddenFill xmlns:a14="http://schemas.microsoft.com/office/drawing/2010/main">
+                            <a:solidFill>
+                              <a:schemeClr val="accent1"/>
+                            </a:solidFill>
+                          </a14:hiddenFill>
+                        </a:ext>
+                        <a:ext uri="{91240B29-F687-4F45-9708-019B960494DF}">
+                          <a14:hiddenLine xmlns:a14="http://schemas.microsoft.com/office/drawing/2010/main" w="9525">
+                            <a:solidFill>
+                              <a:schemeClr val="tx1"/>
+                            </a:solidFill>
+                            <a:miter lim="800000"/>
+                            <a:headEnd/>
+                            <a:tailEnd/>
+                          </a14:hiddenLine>
+                        </a:ext>
+                        <a:ext uri="{AF507438-7753-43E0-B8FC-AC1667EBCBE1}">
+                          <a14:hiddenEffects xmlns:a14="http://schemas.microsoft.com/office/drawing/2010/main">
+                            <a:effectLst>
+                              <a:outerShdw dist="35921" dir="2700000" algn="ctr" rotWithShape="0">
+                                <a:schemeClr val="bg2"/>
+                              </a:outerShdw>
+                            </a:effectLst>
+                          </a14:hiddenEffects>
+                        </a:ext>
+                      </a:extLst>
+                    </p:spPr>
+                  </p:pic>
+                </p:oleObj>
+              </mc:Fallback>
+            </mc:AlternateContent>
+          </a:graphicData>
+        </a:graphic>
+      </p:graphicFrame>
+    </p:spTree>
+  </p:cSld>
+  <p:clrMapOvr>
+    <a:masterClrMapping/>
+  </p:clrMapOvr>
+</p:sld>
+</file>
+
+<file path=ppt/slides/slide21.xml><?xml version="1.0" encoding="utf-8"?>
+<p:sld xmlns:a="http://schemas.openxmlformats.org/drawingml/2006/main" xmlns:r="http://schemas.openxmlformats.org/officeDocument/2006/relationships" xmlns:p="http://schemas.openxmlformats.org/presentationml/2006/main">
+  <p:cSld>
+    <p:spTree>
+      <p:nvGrpSpPr>
+        <p:cNvPr id="1" name=""/>
+        <p:cNvGrpSpPr/>
+        <p:nvPr/>
+      </p:nvGrpSpPr>
+      <p:grpSpPr>
+        <a:xfrm>
+          <a:off x="0" y="0"/>
+          <a:ext cx="0" cy="0"/>
+          <a:chOff x="0" y="0"/>
+          <a:chExt cx="0" cy="0"/>
+        </a:xfrm>
+      </p:grpSpPr>
+      <p:sp>
+        <p:nvSpPr>
+          <p:cNvPr id="20482" name="Rectangle 2">
+            <a:extLst>
+              <a:ext uri="{FF2B5EF4-FFF2-40B4-BE49-F238E27FC236}">
+                <a16:creationId xmlns:a16="http://schemas.microsoft.com/office/drawing/2014/main" id="{8495A4B3-9DAA-436A-967C-DB761E7C0E8F}"/>
+              </a:ext>
+            </a:extLst>
+          </p:cNvPr>
+          <p:cNvSpPr>
+            <a:spLocks noGrp="1" noChangeArrowheads="1"/>
+          </p:cNvSpPr>
+          <p:nvPr>
+            <p:ph type="title"/>
+          </p:nvPr>
+        </p:nvSpPr>
+        <p:spPr/>
+        <p:txBody>
+          <a:bodyPr>
+            <a:normAutofit/>
+          </a:bodyPr>
+          <a:lstStyle/>
+          <a:p>
+            <a:r>
+              <a:rPr lang="en-US" altLang="zh-CN" dirty="0">
+                <a:ea typeface="宋体" panose="02010600030101010101" pitchFamily="2" charset="-122"/>
+              </a:rPr>
+              <a:t>Discrete Fourier Transform (DFT) in 1D Case</a:t>
+            </a:r>
+          </a:p>
+        </p:txBody>
+      </p:sp>
+      <mc:AlternateContent xmlns:mc="http://schemas.openxmlformats.org/markup-compatibility/2006" xmlns:a14="http://schemas.microsoft.com/office/drawing/2010/main">
+        <mc:Choice Requires="a14">
+          <p:sp>
+            <p:nvSpPr>
+              <p:cNvPr id="2" name="内容占位符 1">
+                <a:extLst>
+                  <a:ext uri="{FF2B5EF4-FFF2-40B4-BE49-F238E27FC236}">
+                    <a16:creationId xmlns:a16="http://schemas.microsoft.com/office/drawing/2014/main" id="{42DDF648-D2EB-43EE-9C19-F27F94E3B2B7}"/>
+                  </a:ext>
+                </a:extLst>
+              </p:cNvPr>
+              <p:cNvSpPr>
+                <a:spLocks noGrp="1"/>
+              </p:cNvSpPr>
+              <p:nvPr>
+                <p:ph idx="1"/>
+              </p:nvPr>
+            </p:nvSpPr>
+            <p:spPr/>
+            <p:txBody>
+              <a:bodyPr/>
+              <a:lstStyle/>
+              <a:p>
+                <a:r>
+                  <a:rPr lang="en-US" altLang="zh-CN" dirty="0"/>
+                  <a:t>Thus, </a:t>
+                </a:r>
+                <a14:m>
+                  <m:oMath xmlns:m="http://schemas.openxmlformats.org/officeDocument/2006/math">
+                    <m:r>
+                      <a:rPr lang="en-US" altLang="zh-CN" i="1" dirty="0">
+                        <a:latin typeface="Cambria Math" panose="02040503050406030204" pitchFamily="18" charset="0"/>
+                        <a:cs typeface="Times New Roman" panose="02020603050405020304" pitchFamily="18" charset="0"/>
+                      </a:rPr>
+                      <m:t>𝑓</m:t>
+                    </m:r>
+                  </m:oMath>
+                </a14:m>
+                <a:r>
+                  <a:rPr lang="en-US" altLang="zh-CN" dirty="0"/>
+                  <a:t>’s DFT also has </a:t>
+                </a:r>
+                <a:r>
+                  <a:rPr lang="en-US" altLang="zh-CN" i="1" dirty="0">
+                    <a:latin typeface="Times New Roman" panose="02020603050405020304" pitchFamily="18" charset="0"/>
+                  </a:rPr>
+                  <a:t>M</a:t>
+                </a:r>
+                <a:r>
+                  <a:rPr lang="en-US" altLang="zh-CN" dirty="0"/>
+                  <a:t> points</a:t>
+                </a:r>
+              </a:p>
+              <a:p>
+                <a:endParaRPr lang="en-US" altLang="zh-CN" dirty="0"/>
+              </a:p>
+              <a:p>
+                <a:r>
+                  <a:rPr lang="en-US" altLang="zh-CN" dirty="0"/>
+                  <a:t>and</a:t>
+                </a:r>
+              </a:p>
+              <a:p>
+                <a:endParaRPr lang="en-US" altLang="zh-CN" dirty="0"/>
+              </a:p>
+              <a:p>
+                <a:endParaRPr lang="en-US" altLang="zh-CN" dirty="0"/>
+              </a:p>
+              <a:p>
+                <a:r>
+                  <a:rPr lang="en-US" altLang="zh-CN" dirty="0">
+                    <a:solidFill>
+                      <a:schemeClr val="tx1">
+                        <a:lumMod val="85000"/>
+                        <a:lumOff val="15000"/>
+                      </a:schemeClr>
+                    </a:solidFill>
+                  </a:rPr>
+                  <a:t>IDFT</a:t>
+                </a:r>
+              </a:p>
+              <a:p>
+                <a:endParaRPr lang="zh-CN" altLang="en-US" dirty="0"/>
+              </a:p>
+            </p:txBody>
+          </p:sp>
+        </mc:Choice>
+        <mc:Fallback xmlns="">
+          <p:sp>
+            <p:nvSpPr>
+              <p:cNvPr id="2" name="内容占位符 1">
+                <a:extLst>
+                  <a:ext uri="{FF2B5EF4-FFF2-40B4-BE49-F238E27FC236}">
+                    <a16:creationId xmlns:a16="http://schemas.microsoft.com/office/drawing/2014/main" id="{42DDF648-D2EB-43EE-9C19-F27F94E3B2B7}"/>
+                  </a:ext>
+                </a:extLst>
+              </p:cNvPr>
+              <p:cNvSpPr>
+                <a:spLocks noGrp="1" noRot="1" noChangeAspect="1" noMove="1" noResize="1" noEditPoints="1" noAdjustHandles="1" noChangeArrowheads="1" noChangeShapeType="1" noTextEdit="1"/>
+              </p:cNvSpPr>
+              <p:nvPr>
+                <p:ph idx="1"/>
+              </p:nvPr>
+            </p:nvSpPr>
+            <p:spPr>
+              <a:blipFill>
+                <a:blip r:embed="rId3"/>
+                <a:stretch>
+                  <a:fillRect l="-912" t="-1680"/>
+                </a:stretch>
+              </a:blipFill>
+            </p:spPr>
+            <p:txBody>
+              <a:bodyPr/>
+              <a:lstStyle/>
+              <a:p>
+                <a:r>
+                  <a:rPr lang="zh-CN" altLang="en-US">
+                    <a:noFill/>
+                  </a:rPr>
+                  <a:t> </a:t>
+                </a:r>
+              </a:p>
+            </p:txBody>
+          </p:sp>
+        </mc:Fallback>
+      </mc:AlternateContent>
+      <p:sp>
+        <p:nvSpPr>
+          <p:cNvPr id="20483" name="Rectangle 5">
+            <a:extLst>
+              <a:ext uri="{FF2B5EF4-FFF2-40B4-BE49-F238E27FC236}">
+                <a16:creationId xmlns:a16="http://schemas.microsoft.com/office/drawing/2014/main" id="{F58D513C-8CB9-4BD5-906F-44324DFE87ED}"/>
+              </a:ext>
+            </a:extLst>
+          </p:cNvPr>
+          <p:cNvSpPr>
+            <a:spLocks noChangeArrowheads="1"/>
+          </p:cNvSpPr>
+          <p:nvPr/>
+        </p:nvSpPr>
+        <p:spPr bwMode="auto">
+          <a:xfrm>
+            <a:off x="2209800" y="914400"/>
+            <a:ext cx="7772400" cy="3429000"/>
+          </a:xfrm>
+          <a:prstGeom prst="rect">
+            <a:avLst/>
+          </a:prstGeom>
+          <a:noFill/>
+          <a:ln>
+            <a:noFill/>
+          </a:ln>
+          <a:effectLst/>
+          <a:extLst>
+            <a:ext uri="{909E8E84-426E-40DD-AFC4-6F175D3DCCD1}">
+              <a14:hiddenFill xmlns:a14="http://schemas.microsoft.com/office/drawing/2010/main">
+                <a:solidFill>
+                  <a:schemeClr val="accent1"/>
+                </a:solidFill>
+              </a14:hiddenFill>
+            </a:ext>
+            <a:ext uri="{91240B29-F687-4F45-9708-019B960494DF}">
+              <a14:hiddenLine xmlns:a14="http://schemas.microsoft.com/office/drawing/2010/main" w="9525">
+                <a:solidFill>
+                  <a:schemeClr val="tx1"/>
+                </a:solidFill>
+                <a:miter lim="800000"/>
+                <a:headEnd/>
+                <a:tailEnd/>
+              </a14:hiddenLine>
+            </a:ext>
+            <a:ext uri="{AF507438-7753-43E0-B8FC-AC1667EBCBE1}">
+              <a14:hiddenEffects xmlns:a14="http://schemas.microsoft.com/office/drawing/2010/main">
+                <a:effectLst>
+                  <a:outerShdw dist="35921" dir="2700000" algn="ctr" rotWithShape="0">
+                    <a:schemeClr val="bg2"/>
+                  </a:outerShdw>
+                </a:effectLst>
+              </a14:hiddenEffects>
+            </a:ext>
+          </a:extLst>
+        </p:spPr>
+        <p:txBody>
+          <a:bodyPr/>
+          <a:lstStyle>
+            <a:lvl1pPr marL="342900" indent="-342900">
+              <a:spcBef>
+                <a:spcPct val="20000"/>
+              </a:spcBef>
+              <a:defRPr sz="2800">
+                <a:solidFill>
+                  <a:schemeClr val="tx1"/>
+                </a:solidFill>
+                <a:latin typeface="Calibri" panose="020F0502020204030204" pitchFamily="34" charset="0"/>
+              </a:defRPr>
+            </a:lvl1pPr>
+            <a:lvl2pPr marL="742950" indent="-285750">
+              <a:spcBef>
+                <a:spcPct val="20000"/>
+              </a:spcBef>
+              <a:buChar char="•"/>
+              <a:defRPr sz="2000">
+                <a:solidFill>
+                  <a:schemeClr val="tx1"/>
+                </a:solidFill>
+                <a:latin typeface="Calibri" panose="020F0502020204030204" pitchFamily="34" charset="0"/>
+              </a:defRPr>
+            </a:lvl2pPr>
+            <a:lvl3pPr marL="1143000" indent="-228600">
+              <a:spcBef>
+                <a:spcPct val="20000"/>
+              </a:spcBef>
+              <a:buChar char="–"/>
+              <a:defRPr>
+                <a:solidFill>
+                  <a:schemeClr val="tx1"/>
+                </a:solidFill>
+                <a:latin typeface="Calibri" panose="020F0502020204030204" pitchFamily="34" charset="0"/>
+              </a:defRPr>
+            </a:lvl3pPr>
+            <a:lvl4pPr marL="1600200" indent="-228600">
+              <a:spcBef>
+                <a:spcPct val="20000"/>
+              </a:spcBef>
+              <a:buChar char="»"/>
+              <a:defRPr sz="1600">
+                <a:solidFill>
+                  <a:schemeClr val="tx1"/>
+                </a:solidFill>
+                <a:latin typeface="Calibri" panose="020F0502020204030204" pitchFamily="34" charset="0"/>
+              </a:defRPr>
+            </a:lvl4pPr>
+            <a:lvl5pPr marL="2057400" indent="-228600">
+              <a:spcBef>
+                <a:spcPct val="20000"/>
+              </a:spcBef>
+              <a:buChar char="»"/>
+              <a:defRPr sz="1400">
+                <a:solidFill>
+                  <a:schemeClr val="tx1"/>
+                </a:solidFill>
+                <a:latin typeface="Calibri" panose="020F0502020204030204" pitchFamily="34" charset="0"/>
+              </a:defRPr>
+            </a:lvl5pPr>
+            <a:lvl6pPr marL="2514600" indent="-228600" eaLnBrk="0" fontAlgn="base" hangingPunct="0">
+              <a:spcBef>
+                <a:spcPct val="20000"/>
+              </a:spcBef>
+              <a:spcAft>
+                <a:spcPct val="0"/>
+              </a:spcAft>
+              <a:buChar char="»"/>
+              <a:defRPr sz="1400">
+                <a:solidFill>
+                  <a:schemeClr val="tx1"/>
+                </a:solidFill>
+                <a:latin typeface="Calibri" panose="020F0502020204030204" pitchFamily="34" charset="0"/>
+              </a:defRPr>
+            </a:lvl6pPr>
+            <a:lvl7pPr marL="2971800" indent="-228600" eaLnBrk="0" fontAlgn="base" hangingPunct="0">
+              <a:spcBef>
+                <a:spcPct val="20000"/>
+              </a:spcBef>
+              <a:spcAft>
+                <a:spcPct val="0"/>
+              </a:spcAft>
+              <a:buChar char="»"/>
+              <a:defRPr sz="1400">
+                <a:solidFill>
+                  <a:schemeClr val="tx1"/>
+                </a:solidFill>
+                <a:latin typeface="Calibri" panose="020F0502020204030204" pitchFamily="34" charset="0"/>
+              </a:defRPr>
+            </a:lvl7pPr>
+            <a:lvl8pPr marL="3429000" indent="-228600" eaLnBrk="0" fontAlgn="base" hangingPunct="0">
+              <a:spcBef>
+                <a:spcPct val="20000"/>
+              </a:spcBef>
+              <a:spcAft>
+                <a:spcPct val="0"/>
+              </a:spcAft>
+              <a:buChar char="»"/>
+              <a:defRPr sz="1400">
+                <a:solidFill>
+                  <a:schemeClr val="tx1"/>
+                </a:solidFill>
+                <a:latin typeface="Calibri" panose="020F0502020204030204" pitchFamily="34" charset="0"/>
+              </a:defRPr>
+            </a:lvl8pPr>
+            <a:lvl9pPr marL="3886200" indent="-228600" eaLnBrk="0" fontAlgn="base" hangingPunct="0">
+              <a:spcBef>
+                <a:spcPct val="20000"/>
+              </a:spcBef>
+              <a:spcAft>
+                <a:spcPct val="0"/>
+              </a:spcAft>
+              <a:buChar char="»"/>
+              <a:defRPr sz="1400">
+                <a:solidFill>
+                  <a:schemeClr val="tx1"/>
+                </a:solidFill>
+                <a:latin typeface="Calibri" panose="020F0502020204030204" pitchFamily="34" charset="0"/>
+              </a:defRPr>
+            </a:lvl9pPr>
+          </a:lstStyle>
+          <a:p>
+            <a:endParaRPr lang="en-US" altLang="zh-CN" sz="2600" dirty="0">
+              <a:ea typeface="宋体" panose="02010600030101010101" pitchFamily="2" charset="-122"/>
+            </a:endParaRPr>
+          </a:p>
+        </p:txBody>
+      </p:sp>
+      <p:graphicFrame>
+        <p:nvGraphicFramePr>
+          <p:cNvPr id="20484" name="Object 7">
+            <a:extLst>
+              <a:ext uri="{FF2B5EF4-FFF2-40B4-BE49-F238E27FC236}">
+                <a16:creationId xmlns:a16="http://schemas.microsoft.com/office/drawing/2014/main" id="{098D1188-08C1-4198-9B8F-5CD129FA1D76}"/>
+              </a:ext>
+            </a:extLst>
+          </p:cNvPr>
+          <p:cNvGraphicFramePr>
+            <a:graphicFrameLocks noChangeAspect="1"/>
+          </p:cNvGraphicFramePr>
+          <p:nvPr/>
+        </p:nvGraphicFramePr>
+        <p:xfrm>
+          <a:off x="4191001" y="1381126"/>
+          <a:ext cx="2805113" cy="500063"/>
+        </p:xfrm>
+        <a:graphic>
+          <a:graphicData uri="http://schemas.openxmlformats.org/presentationml/2006/ole">
+            <mc:AlternateContent xmlns:mc="http://schemas.openxmlformats.org/markup-compatibility/2006">
+              <mc:Choice xmlns:v="urn:schemas-microsoft-com:vml" Requires="v">
+                <p:oleObj spid="_x0000_s13581" name="Equation" r:id="rId4" imgW="1282700" imgH="228600" progId="Equation.DSMT4">
+                  <p:embed/>
+                </p:oleObj>
+              </mc:Choice>
+              <mc:Fallback>
+                <p:oleObj name="Equation" r:id="rId4" imgW="1282700" imgH="228600" progId="Equation.DSMT4">
+                  <p:embed/>
+                  <p:pic>
+                    <p:nvPicPr>
+                      <p:cNvPr id="20484" name="Object 7">
+                        <a:extLst>
+                          <a:ext uri="{FF2B5EF4-FFF2-40B4-BE49-F238E27FC236}">
+                            <a16:creationId xmlns:a16="http://schemas.microsoft.com/office/drawing/2014/main" id="{098D1188-08C1-4198-9B8F-5CD129FA1D76}"/>
+                          </a:ext>
+                        </a:extLst>
+                      </p:cNvPr>
+                      <p:cNvPicPr>
+                        <a:picLocks noChangeAspect="1" noChangeArrowheads="1"/>
+                      </p:cNvPicPr>
+                      <p:nvPr/>
+                    </p:nvPicPr>
+                    <p:blipFill>
+                      <a:blip r:embed="rId5">
+                        <a:extLst>
+                          <a:ext uri="{28A0092B-C50C-407E-A947-70E740481C1C}">
+                            <a14:useLocalDpi xmlns:a14="http://schemas.microsoft.com/office/drawing/2010/main" val="0"/>
+                          </a:ext>
+                        </a:extLst>
+                      </a:blip>
+                      <a:srcRect/>
+                      <a:stretch>
+                        <a:fillRect/>
+                      </a:stretch>
+                    </p:blipFill>
+                    <p:spPr bwMode="auto">
+                      <a:xfrm>
+                        <a:off x="4191001" y="1381126"/>
+                        <a:ext cx="2805113" cy="500063"/>
+                      </a:xfrm>
+                      <a:prstGeom prst="rect">
+                        <a:avLst/>
+                      </a:prstGeom>
+                      <a:noFill/>
+                      <a:ln>
+                        <a:noFill/>
+                      </a:ln>
+                      <a:effectLst/>
+                      <a:extLst>
+                        <a:ext uri="{909E8E84-426E-40DD-AFC4-6F175D3DCCD1}">
+                          <a14:hiddenFill xmlns:a14="http://schemas.microsoft.com/office/drawing/2010/main">
+                            <a:solidFill>
+                              <a:schemeClr val="accent1"/>
+                            </a:solidFill>
+                          </a14:hiddenFill>
+                        </a:ext>
+                        <a:ext uri="{91240B29-F687-4F45-9708-019B960494DF}">
+                          <a14:hiddenLine xmlns:a14="http://schemas.microsoft.com/office/drawing/2010/main" w="9525">
+                            <a:solidFill>
+                              <a:schemeClr val="tx1"/>
+                            </a:solidFill>
+                            <a:miter lim="800000"/>
+                            <a:headEnd/>
+                            <a:tailEnd/>
+                          </a14:hiddenLine>
+                        </a:ext>
+                        <a:ext uri="{AF507438-7753-43E0-B8FC-AC1667EBCBE1}">
+                          <a14:hiddenEffects xmlns:a14="http://schemas.microsoft.com/office/drawing/2010/main">
+                            <a:effectLst>
+                              <a:outerShdw dist="35921" dir="2700000" algn="ctr" rotWithShape="0">
+                                <a:schemeClr val="bg2"/>
+                              </a:outerShdw>
+                            </a:effectLst>
+                          </a14:hiddenEffects>
+                        </a:ext>
+                      </a:extLst>
+                    </p:spPr>
+                  </p:pic>
+                </p:oleObj>
+              </mc:Fallback>
+            </mc:AlternateContent>
+          </a:graphicData>
+        </a:graphic>
+      </p:graphicFrame>
+      <p:graphicFrame>
+        <p:nvGraphicFramePr>
+          <p:cNvPr id="20485" name="Object 8">
+            <a:extLst>
+              <a:ext uri="{FF2B5EF4-FFF2-40B4-BE49-F238E27FC236}">
+                <a16:creationId xmlns:a16="http://schemas.microsoft.com/office/drawing/2014/main" id="{1E9DE60A-9F3F-41A1-8838-325BD9CF8241}"/>
+              </a:ext>
+            </a:extLst>
+          </p:cNvPr>
+          <p:cNvGraphicFramePr>
+            <a:graphicFrameLocks noChangeAspect="1"/>
+          </p:cNvGraphicFramePr>
+          <p:nvPr/>
+        </p:nvGraphicFramePr>
+        <p:xfrm>
+          <a:off x="3136901" y="2179638"/>
+          <a:ext cx="5832475" cy="944562"/>
+        </p:xfrm>
+        <a:graphic>
+          <a:graphicData uri="http://schemas.openxmlformats.org/presentationml/2006/ole">
+            <mc:AlternateContent xmlns:mc="http://schemas.openxmlformats.org/markup-compatibility/2006">
+              <mc:Choice xmlns:v="urn:schemas-microsoft-com:vml" Requires="v">
+                <p:oleObj spid="_x0000_s13582" name="Equation" r:id="rId6" imgW="2667000" imgH="431800" progId="Equation.DSMT4">
+                  <p:embed/>
+                </p:oleObj>
+              </mc:Choice>
+              <mc:Fallback>
+                <p:oleObj name="Equation" r:id="rId6" imgW="2667000" imgH="431800" progId="Equation.DSMT4">
+                  <p:embed/>
+                  <p:pic>
+                    <p:nvPicPr>
+                      <p:cNvPr id="20485" name="Object 8">
+                        <a:extLst>
+                          <a:ext uri="{FF2B5EF4-FFF2-40B4-BE49-F238E27FC236}">
+                            <a16:creationId xmlns:a16="http://schemas.microsoft.com/office/drawing/2014/main" id="{1E9DE60A-9F3F-41A1-8838-325BD9CF8241}"/>
+                          </a:ext>
+                        </a:extLst>
+                      </p:cNvPr>
+                      <p:cNvPicPr>
+                        <a:picLocks noChangeAspect="1" noChangeArrowheads="1"/>
+                      </p:cNvPicPr>
+                      <p:nvPr/>
+                    </p:nvPicPr>
+                    <p:blipFill>
+                      <a:blip r:embed="rId7">
+                        <a:extLst>
+                          <a:ext uri="{28A0092B-C50C-407E-A947-70E740481C1C}">
+                            <a14:useLocalDpi xmlns:a14="http://schemas.microsoft.com/office/drawing/2010/main" val="0"/>
+                          </a:ext>
+                        </a:extLst>
+                      </a:blip>
+                      <a:srcRect/>
+                      <a:stretch>
+                        <a:fillRect/>
+                      </a:stretch>
+                    </p:blipFill>
+                    <p:spPr bwMode="auto">
+                      <a:xfrm>
+                        <a:off x="3136901" y="2179638"/>
+                        <a:ext cx="5832475" cy="944562"/>
+                      </a:xfrm>
+                      <a:prstGeom prst="rect">
+                        <a:avLst/>
+                      </a:prstGeom>
+                      <a:noFill/>
+                      <a:ln>
+                        <a:noFill/>
+                      </a:ln>
+                      <a:effectLst/>
+                      <a:extLst>
+                        <a:ext uri="{909E8E84-426E-40DD-AFC4-6F175D3DCCD1}">
+                          <a14:hiddenFill xmlns:a14="http://schemas.microsoft.com/office/drawing/2010/main">
+                            <a:solidFill>
+                              <a:schemeClr val="accent1"/>
+                            </a:solidFill>
+                          </a14:hiddenFill>
+                        </a:ext>
+                        <a:ext uri="{91240B29-F687-4F45-9708-019B960494DF}">
+                          <a14:hiddenLine xmlns:a14="http://schemas.microsoft.com/office/drawing/2010/main" w="9525">
+                            <a:solidFill>
+                              <a:schemeClr val="tx1"/>
+                            </a:solidFill>
+                            <a:miter lim="800000"/>
+                            <a:headEnd/>
+                            <a:tailEnd/>
+                          </a14:hiddenLine>
+                        </a:ext>
+                        <a:ext uri="{AF507438-7753-43E0-B8FC-AC1667EBCBE1}">
+                          <a14:hiddenEffects xmlns:a14="http://schemas.microsoft.com/office/drawing/2010/main">
+                            <a:effectLst>
+                              <a:outerShdw dist="35921" dir="2700000" algn="ctr" rotWithShape="0">
+                                <a:schemeClr val="bg2"/>
+                              </a:outerShdw>
+                            </a:effectLst>
+                          </a14:hiddenEffects>
+                        </a:ext>
+                      </a:extLst>
+                    </p:spPr>
+                  </p:pic>
+                </p:oleObj>
+              </mc:Fallback>
+            </mc:AlternateContent>
+          </a:graphicData>
+        </a:graphic>
+      </p:graphicFrame>
+      <p:sp>
+        <p:nvSpPr>
+          <p:cNvPr id="2080777" name="Rectangle 9">
+            <a:extLst>
+              <a:ext uri="{FF2B5EF4-FFF2-40B4-BE49-F238E27FC236}">
+                <a16:creationId xmlns:a16="http://schemas.microsoft.com/office/drawing/2014/main" id="{FCC6BAC1-21FA-4FA3-818D-AB97B0FFA991}"/>
+              </a:ext>
+            </a:extLst>
+          </p:cNvPr>
+          <p:cNvSpPr>
+            <a:spLocks noChangeArrowheads="1"/>
+          </p:cNvSpPr>
+          <p:nvPr/>
+        </p:nvSpPr>
+        <p:spPr bwMode="auto">
+          <a:xfrm>
+            <a:off x="2057400" y="4340225"/>
+            <a:ext cx="8229600" cy="914400"/>
+          </a:xfrm>
+          <a:prstGeom prst="rect">
+            <a:avLst/>
+          </a:prstGeom>
+          <a:noFill/>
+          <a:ln w="19050">
+            <a:solidFill>
+              <a:srgbClr val="FF0000"/>
+            </a:solidFill>
+            <a:miter lim="800000"/>
+            <a:headEnd/>
+            <a:tailEnd/>
+          </a:ln>
+          <a:effectLst/>
+          <a:extLst>
+            <a:ext uri="{909E8E84-426E-40DD-AFC4-6F175D3DCCD1}">
+              <a14:hiddenFill xmlns:a14="http://schemas.microsoft.com/office/drawing/2010/main">
+                <a:solidFill>
+                  <a:schemeClr val="accent1"/>
+                </a:solidFill>
+              </a14:hiddenFill>
+            </a:ext>
+            <a:ext uri="{AF507438-7753-43E0-B8FC-AC1667EBCBE1}">
+              <a14:hiddenEffects xmlns:a14="http://schemas.microsoft.com/office/drawing/2010/main">
+                <a:effectLst>
+                  <a:outerShdw dist="35921" dir="2700000" algn="ctr" rotWithShape="0">
+                    <a:schemeClr val="bg2"/>
+                  </a:outerShdw>
+                </a:effectLst>
+              </a14:hiddenEffects>
+            </a:ext>
+          </a:extLst>
+        </p:spPr>
+        <p:txBody>
+          <a:bodyPr/>
+          <a:lstStyle>
+            <a:lvl1pPr>
+              <a:spcBef>
+                <a:spcPct val="20000"/>
+              </a:spcBef>
+              <a:defRPr sz="2800">
+                <a:solidFill>
+                  <a:schemeClr val="tx1"/>
+                </a:solidFill>
+                <a:latin typeface="Calibri" panose="020F0502020204030204" pitchFamily="34" charset="0"/>
+              </a:defRPr>
+            </a:lvl1pPr>
+            <a:lvl2pPr marL="823913" indent="-285750">
+              <a:spcBef>
+                <a:spcPct val="20000"/>
+              </a:spcBef>
+              <a:buChar char="•"/>
+              <a:defRPr sz="2000">
+                <a:solidFill>
+                  <a:schemeClr val="tx1"/>
+                </a:solidFill>
+                <a:latin typeface="Calibri" panose="020F0502020204030204" pitchFamily="34" charset="0"/>
+              </a:defRPr>
+            </a:lvl2pPr>
+            <a:lvl3pPr marL="1231900" indent="-228600">
+              <a:spcBef>
+                <a:spcPct val="20000"/>
+              </a:spcBef>
+              <a:buChar char="–"/>
+              <a:defRPr>
+                <a:solidFill>
+                  <a:schemeClr val="tx1"/>
+                </a:solidFill>
+                <a:latin typeface="Calibri" panose="020F0502020204030204" pitchFamily="34" charset="0"/>
+              </a:defRPr>
+            </a:lvl3pPr>
+            <a:lvl4pPr marL="1639888" indent="-228600">
+              <a:spcBef>
+                <a:spcPct val="20000"/>
+              </a:spcBef>
+              <a:buChar char="»"/>
+              <a:defRPr sz="1600">
+                <a:solidFill>
+                  <a:schemeClr val="tx1"/>
+                </a:solidFill>
+                <a:latin typeface="Calibri" panose="020F0502020204030204" pitchFamily="34" charset="0"/>
+              </a:defRPr>
+            </a:lvl4pPr>
+            <a:lvl5pPr marL="2057400" indent="-228600">
+              <a:spcBef>
+                <a:spcPct val="20000"/>
+              </a:spcBef>
+              <a:buChar char="»"/>
+              <a:defRPr sz="1400">
+                <a:solidFill>
+                  <a:schemeClr val="tx1"/>
+                </a:solidFill>
+                <a:latin typeface="Calibri" panose="020F0502020204030204" pitchFamily="34" charset="0"/>
+              </a:defRPr>
+            </a:lvl5pPr>
+            <a:lvl6pPr marL="2514600" indent="-228600" eaLnBrk="0" fontAlgn="base" hangingPunct="0">
+              <a:spcBef>
+                <a:spcPct val="20000"/>
+              </a:spcBef>
+              <a:spcAft>
+                <a:spcPct val="0"/>
+              </a:spcAft>
+              <a:buChar char="»"/>
+              <a:defRPr sz="1400">
+                <a:solidFill>
+                  <a:schemeClr val="tx1"/>
+                </a:solidFill>
+                <a:latin typeface="Calibri" panose="020F0502020204030204" pitchFamily="34" charset="0"/>
+              </a:defRPr>
+            </a:lvl6pPr>
+            <a:lvl7pPr marL="2971800" indent="-228600" eaLnBrk="0" fontAlgn="base" hangingPunct="0">
+              <a:spcBef>
+                <a:spcPct val="20000"/>
+              </a:spcBef>
+              <a:spcAft>
+                <a:spcPct val="0"/>
+              </a:spcAft>
+              <a:buChar char="»"/>
+              <a:defRPr sz="1400">
+                <a:solidFill>
+                  <a:schemeClr val="tx1"/>
+                </a:solidFill>
+                <a:latin typeface="Calibri" panose="020F0502020204030204" pitchFamily="34" charset="0"/>
+              </a:defRPr>
+            </a:lvl7pPr>
+            <a:lvl8pPr marL="3429000" indent="-228600" eaLnBrk="0" fontAlgn="base" hangingPunct="0">
+              <a:spcBef>
+                <a:spcPct val="20000"/>
+              </a:spcBef>
+              <a:spcAft>
+                <a:spcPct val="0"/>
+              </a:spcAft>
+              <a:buChar char="»"/>
+              <a:defRPr sz="1400">
+                <a:solidFill>
+                  <a:schemeClr val="tx1"/>
+                </a:solidFill>
+                <a:latin typeface="Calibri" panose="020F0502020204030204" pitchFamily="34" charset="0"/>
+              </a:defRPr>
+            </a:lvl8pPr>
+            <a:lvl9pPr marL="3886200" indent="-228600" eaLnBrk="0" fontAlgn="base" hangingPunct="0">
+              <a:spcBef>
+                <a:spcPct val="20000"/>
+              </a:spcBef>
+              <a:spcAft>
+                <a:spcPct val="0"/>
+              </a:spcAft>
+              <a:buChar char="»"/>
+              <a:defRPr sz="1400">
+                <a:solidFill>
+                  <a:schemeClr val="tx1"/>
+                </a:solidFill>
+                <a:latin typeface="Calibri" panose="020F0502020204030204" pitchFamily="34" charset="0"/>
+              </a:defRPr>
+            </a:lvl9pPr>
+          </a:lstStyle>
+          <a:p>
+            <a:r>
+              <a:rPr lang="en-US" altLang="zh-CN" sz="2600" dirty="0">
+                <a:ea typeface="宋体" panose="02010600030101010101" pitchFamily="2" charset="-122"/>
+              </a:rPr>
+              <a:t>For DFT, there is a fast algorithm for computation, FFT (Fast Fourier Transform)</a:t>
+            </a:r>
+          </a:p>
+        </p:txBody>
+      </p:sp>
+      <p:graphicFrame>
+        <p:nvGraphicFramePr>
+          <p:cNvPr id="20487" name="Object 10">
+            <a:extLst>
+              <a:ext uri="{FF2B5EF4-FFF2-40B4-BE49-F238E27FC236}">
+                <a16:creationId xmlns:a16="http://schemas.microsoft.com/office/drawing/2014/main" id="{7FADE7F1-17FC-461C-96A4-062D514E904A}"/>
+              </a:ext>
+            </a:extLst>
+          </p:cNvPr>
+          <p:cNvGraphicFramePr>
+            <a:graphicFrameLocks noChangeAspect="1"/>
+          </p:cNvGraphicFramePr>
+          <p:nvPr/>
+        </p:nvGraphicFramePr>
+        <p:xfrm>
+          <a:off x="2971801" y="3273426"/>
+          <a:ext cx="6164263" cy="944563"/>
+        </p:xfrm>
+        <a:graphic>
+          <a:graphicData uri="http://schemas.openxmlformats.org/presentationml/2006/ole">
+            <mc:AlternateContent xmlns:mc="http://schemas.openxmlformats.org/markup-compatibility/2006">
+              <mc:Choice xmlns:v="urn:schemas-microsoft-com:vml" Requires="v">
+                <p:oleObj spid="_x0000_s13583" name="Equation" r:id="rId8" imgW="2819400" imgH="431800" progId="Equation.DSMT4">
+                  <p:embed/>
+                </p:oleObj>
+              </mc:Choice>
+              <mc:Fallback>
+                <p:oleObj name="Equation" r:id="rId8" imgW="2819400" imgH="431800" progId="Equation.DSMT4">
+                  <p:embed/>
+                  <p:pic>
+                    <p:nvPicPr>
+                      <p:cNvPr id="20487" name="Object 10">
+                        <a:extLst>
+                          <a:ext uri="{FF2B5EF4-FFF2-40B4-BE49-F238E27FC236}">
+                            <a16:creationId xmlns:a16="http://schemas.microsoft.com/office/drawing/2014/main" id="{7FADE7F1-17FC-461C-96A4-062D514E904A}"/>
+                          </a:ext>
+                        </a:extLst>
+                      </p:cNvPr>
+                      <p:cNvPicPr>
+                        <a:picLocks noChangeAspect="1" noChangeArrowheads="1"/>
+                      </p:cNvPicPr>
+                      <p:nvPr/>
+                    </p:nvPicPr>
+                    <p:blipFill>
+                      <a:blip r:embed="rId9">
+                        <a:extLst>
+                          <a:ext uri="{28A0092B-C50C-407E-A947-70E740481C1C}">
+                            <a14:useLocalDpi xmlns:a14="http://schemas.microsoft.com/office/drawing/2010/main" val="0"/>
+                          </a:ext>
+                        </a:extLst>
+                      </a:blip>
+                      <a:srcRect/>
+                      <a:stretch>
+                        <a:fillRect/>
+                      </a:stretch>
+                    </p:blipFill>
+                    <p:spPr bwMode="auto">
+                      <a:xfrm>
+                        <a:off x="2971801" y="3273426"/>
+                        <a:ext cx="6164263" cy="944563"/>
+                      </a:xfrm>
+                      <a:prstGeom prst="rect">
+                        <a:avLst/>
+                      </a:prstGeom>
+                      <a:noFill/>
+                      <a:ln>
+                        <a:noFill/>
+                      </a:ln>
+                      <a:effectLst/>
+                      <a:extLst>
+                        <a:ext uri="{909E8E84-426E-40DD-AFC4-6F175D3DCCD1}">
+                          <a14:hiddenFill xmlns:a14="http://schemas.microsoft.com/office/drawing/2010/main">
+                            <a:solidFill>
+                              <a:schemeClr val="accent1"/>
+                            </a:solidFill>
+                          </a14:hiddenFill>
+                        </a:ext>
+                        <a:ext uri="{91240B29-F687-4F45-9708-019B960494DF}">
+                          <a14:hiddenLine xmlns:a14="http://schemas.microsoft.com/office/drawing/2010/main" w="9525">
+                            <a:solidFill>
+                              <a:schemeClr val="tx1"/>
+                            </a:solidFill>
+                            <a:miter lim="800000"/>
+                            <a:headEnd/>
+                            <a:tailEnd/>
+                          </a14:hiddenLine>
+                        </a:ext>
+                        <a:ext uri="{AF507438-7753-43E0-B8FC-AC1667EBCBE1}">
+                          <a14:hiddenEffects xmlns:a14="http://schemas.microsoft.com/office/drawing/2010/main">
+                            <a:effectLst>
+                              <a:outerShdw dist="35921" dir="2700000" algn="ctr" rotWithShape="0">
+                                <a:schemeClr val="bg2"/>
+                              </a:outerShdw>
+                            </a:effectLst>
+                          </a14:hiddenEffects>
+                        </a:ext>
+                      </a:extLst>
+                    </p:spPr>
+                  </p:pic>
+                </p:oleObj>
+              </mc:Fallback>
+            </mc:AlternateContent>
+          </a:graphicData>
+        </a:graphic>
+      </p:graphicFrame>
+      <p:sp>
+        <p:nvSpPr>
+          <p:cNvPr id="20488" name="Rectangle 11">
+            <a:extLst>
+              <a:ext uri="{FF2B5EF4-FFF2-40B4-BE49-F238E27FC236}">
+                <a16:creationId xmlns:a16="http://schemas.microsoft.com/office/drawing/2014/main" id="{6FCAF75C-2A69-4D9F-A85E-29C5AE7F429B}"/>
+              </a:ext>
+            </a:extLst>
+          </p:cNvPr>
+          <p:cNvSpPr>
+            <a:spLocks noChangeArrowheads="1"/>
+          </p:cNvSpPr>
+          <p:nvPr/>
+        </p:nvSpPr>
+        <p:spPr bwMode="auto">
+          <a:xfrm>
+            <a:off x="2235200" y="3306763"/>
+            <a:ext cx="1066800" cy="838200"/>
+          </a:xfrm>
+          <a:prstGeom prst="rect">
+            <a:avLst/>
+          </a:prstGeom>
+          <a:noFill/>
+          <a:ln>
+            <a:noFill/>
+          </a:ln>
+          <a:effectLst/>
+          <a:extLst>
+            <a:ext uri="{909E8E84-426E-40DD-AFC4-6F175D3DCCD1}">
+              <a14:hiddenFill xmlns:a14="http://schemas.microsoft.com/office/drawing/2010/main">
+                <a:solidFill>
+                  <a:schemeClr val="accent1"/>
+                </a:solidFill>
+              </a14:hiddenFill>
+            </a:ext>
+            <a:ext uri="{91240B29-F687-4F45-9708-019B960494DF}">
+              <a14:hiddenLine xmlns:a14="http://schemas.microsoft.com/office/drawing/2010/main" w="9525">
+                <a:solidFill>
+                  <a:schemeClr val="tx1"/>
+                </a:solidFill>
+                <a:miter lim="800000"/>
+                <a:headEnd/>
+                <a:tailEnd/>
+              </a14:hiddenLine>
+            </a:ext>
+            <a:ext uri="{AF507438-7753-43E0-B8FC-AC1667EBCBE1}">
+              <a14:hiddenEffects xmlns:a14="http://schemas.microsoft.com/office/drawing/2010/main">
+                <a:effectLst>
+                  <a:outerShdw dist="35921" dir="2700000" algn="ctr" rotWithShape="0">
+                    <a:schemeClr val="bg2"/>
+                  </a:outerShdw>
+                </a:effectLst>
+              </a14:hiddenEffects>
+            </a:ext>
+          </a:extLst>
+        </p:spPr>
+        <p:txBody>
+          <a:bodyPr anchor="ctr"/>
+          <a:lstStyle>
+            <a:lvl1pPr>
+              <a:spcBef>
+                <a:spcPct val="20000"/>
+              </a:spcBef>
+              <a:defRPr sz="2800">
+                <a:solidFill>
+                  <a:schemeClr val="tx1"/>
+                </a:solidFill>
+                <a:latin typeface="Calibri" panose="020F0502020204030204" pitchFamily="34" charset="0"/>
+              </a:defRPr>
+            </a:lvl1pPr>
+            <a:lvl2pPr marL="742950" indent="-285750">
+              <a:spcBef>
+                <a:spcPct val="20000"/>
+              </a:spcBef>
+              <a:buChar char="•"/>
+              <a:defRPr sz="2000">
+                <a:solidFill>
+                  <a:schemeClr val="tx1"/>
+                </a:solidFill>
+                <a:latin typeface="Calibri" panose="020F0502020204030204" pitchFamily="34" charset="0"/>
+              </a:defRPr>
+            </a:lvl2pPr>
+            <a:lvl3pPr marL="1143000" indent="-228600">
+              <a:spcBef>
+                <a:spcPct val="20000"/>
+              </a:spcBef>
+              <a:buChar char="–"/>
+              <a:defRPr>
+                <a:solidFill>
+                  <a:schemeClr val="tx1"/>
+                </a:solidFill>
+                <a:latin typeface="Calibri" panose="020F0502020204030204" pitchFamily="34" charset="0"/>
+              </a:defRPr>
+            </a:lvl3pPr>
+            <a:lvl4pPr marL="1600200" indent="-228600">
+              <a:spcBef>
+                <a:spcPct val="20000"/>
+              </a:spcBef>
+              <a:buChar char="»"/>
+              <a:defRPr sz="1600">
+                <a:solidFill>
+                  <a:schemeClr val="tx1"/>
+                </a:solidFill>
+                <a:latin typeface="Calibri" panose="020F0502020204030204" pitchFamily="34" charset="0"/>
+              </a:defRPr>
+            </a:lvl4pPr>
+            <a:lvl5pPr marL="2057400" indent="-228600">
+              <a:spcBef>
+                <a:spcPct val="20000"/>
+              </a:spcBef>
+              <a:buChar char="»"/>
+              <a:defRPr sz="1400">
+                <a:solidFill>
+                  <a:schemeClr val="tx1"/>
+                </a:solidFill>
+                <a:latin typeface="Calibri" panose="020F0502020204030204" pitchFamily="34" charset="0"/>
+              </a:defRPr>
+            </a:lvl5pPr>
+            <a:lvl6pPr marL="2514600" indent="-228600" eaLnBrk="0" fontAlgn="base" hangingPunct="0">
+              <a:spcBef>
+                <a:spcPct val="20000"/>
+              </a:spcBef>
+              <a:spcAft>
+                <a:spcPct val="0"/>
+              </a:spcAft>
+              <a:buChar char="»"/>
+              <a:defRPr sz="1400">
+                <a:solidFill>
+                  <a:schemeClr val="tx1"/>
+                </a:solidFill>
+                <a:latin typeface="Calibri" panose="020F0502020204030204" pitchFamily="34" charset="0"/>
+              </a:defRPr>
+            </a:lvl6pPr>
+            <a:lvl7pPr marL="2971800" indent="-228600" eaLnBrk="0" fontAlgn="base" hangingPunct="0">
+              <a:spcBef>
+                <a:spcPct val="20000"/>
+              </a:spcBef>
+              <a:spcAft>
+                <a:spcPct val="0"/>
+              </a:spcAft>
+              <a:buChar char="»"/>
+              <a:defRPr sz="1400">
+                <a:solidFill>
+                  <a:schemeClr val="tx1"/>
+                </a:solidFill>
+                <a:latin typeface="Calibri" panose="020F0502020204030204" pitchFamily="34" charset="0"/>
+              </a:defRPr>
+            </a:lvl7pPr>
+            <a:lvl8pPr marL="3429000" indent="-228600" eaLnBrk="0" fontAlgn="base" hangingPunct="0">
+              <a:spcBef>
+                <a:spcPct val="20000"/>
+              </a:spcBef>
+              <a:spcAft>
+                <a:spcPct val="0"/>
+              </a:spcAft>
+              <a:buChar char="»"/>
+              <a:defRPr sz="1400">
+                <a:solidFill>
+                  <a:schemeClr val="tx1"/>
+                </a:solidFill>
+                <a:latin typeface="Calibri" panose="020F0502020204030204" pitchFamily="34" charset="0"/>
+              </a:defRPr>
+            </a:lvl8pPr>
+            <a:lvl9pPr marL="3886200" indent="-228600" eaLnBrk="0" fontAlgn="base" hangingPunct="0">
+              <a:spcBef>
+                <a:spcPct val="20000"/>
+              </a:spcBef>
+              <a:spcAft>
+                <a:spcPct val="0"/>
+              </a:spcAft>
+              <a:buChar char="»"/>
+              <a:defRPr sz="1400">
+                <a:solidFill>
+                  <a:schemeClr val="tx1"/>
+                </a:solidFill>
+                <a:latin typeface="Calibri" panose="020F0502020204030204" pitchFamily="34" charset="0"/>
+              </a:defRPr>
+            </a:lvl9pPr>
+          </a:lstStyle>
+          <a:p>
+            <a:pPr>
+              <a:spcBef>
+                <a:spcPct val="0"/>
+              </a:spcBef>
+            </a:pPr>
+            <a:endParaRPr lang="en-US" altLang="zh-CN" sz="2600" dirty="0">
+              <a:solidFill>
+                <a:schemeClr val="tx1">
+                  <a:lumMod val="85000"/>
+                  <a:lumOff val="15000"/>
+                </a:schemeClr>
+              </a:solidFill>
+              <a:ea typeface="宋体" panose="02010600030101010101" pitchFamily="2" charset="-122"/>
+            </a:endParaRPr>
+          </a:p>
+        </p:txBody>
+      </p:sp>
+    </p:spTree>
+  </p:cSld>
+  <p:clrMapOvr>
+    <a:masterClrMapping/>
+  </p:clrMapOvr>
+  <p:timing>
+    <p:tnLst>
+      <p:par>
+        <p:cTn id="1" dur="indefinite" restart="never" nodeType="tmRoot">
+          <p:childTnLst>
+            <p:seq concurrent="1" nextAc="seek">
+              <p:cTn id="2" dur="indefinite" nodeType="mainSeq">
+                <p:childTnLst>
+                  <p:par>
+                    <p:cTn id="3" fill="hold" nodeType="clickPar">
+                      <p:stCondLst>
+                        <p:cond delay="indefinite"/>
+                      </p:stCondLst>
+                      <p:childTnLst>
+                        <p:par>
+                          <p:cTn id="4" fill="hold" nodeType="withGroup">
+                            <p:stCondLst>
+                              <p:cond delay="0"/>
+                            </p:stCondLst>
+                            <p:childTnLst>
+                              <p:par>
+                                <p:cTn id="5" presetID="22" presetClass="entr" presetSubtype="8" fill="hold" grpId="0" nodeType="clickEffect">
+                                  <p:stCondLst>
+                                    <p:cond delay="0"/>
+                                  </p:stCondLst>
+                                  <p:childTnLst>
+                                    <p:set>
+                                      <p:cBhvr>
+                                        <p:cTn id="6" dur="1" fill="hold">
+                                          <p:stCondLst>
+                                            <p:cond delay="0"/>
+                                          </p:stCondLst>
+                                        </p:cTn>
+                                        <p:tgtEl>
+                                          <p:spTgt spid="2080777"/>
+                                        </p:tgtEl>
+                                        <p:attrNameLst>
+                                          <p:attrName>style.visibility</p:attrName>
+                                        </p:attrNameLst>
+                                      </p:cBhvr>
+                                      <p:to>
+                                        <p:strVal val="visible"/>
+                                      </p:to>
+                                    </p:set>
+                                    <p:animEffect transition="in" filter="wipe(left)">
+                                      <p:cBhvr>
+                                        <p:cTn id="7" dur="500"/>
+                                        <p:tgtEl>
+                                          <p:spTgt spid="2080777"/>
+                                        </p:tgtEl>
+                                      </p:cBhvr>
+                                    </p:animEffect>
+                                  </p:childTnLst>
+                                </p:cTn>
+                              </p:par>
+                            </p:childTnLst>
+                          </p:cTn>
+                        </p:par>
+                      </p:childTnLst>
+                    </p:cTn>
+                  </p:par>
+                </p:childTnLst>
+              </p:cTn>
+              <p:prevCondLst>
+                <p:cond evt="onPrev" delay="0">
+                  <p:tgtEl>
+                    <p:sldTgt/>
+                  </p:tgtEl>
+                </p:cond>
+              </p:prevCondLst>
+              <p:nextCondLst>
+                <p:cond evt="onNext" delay="0">
+                  <p:tgtEl>
+                    <p:sldTgt/>
+                  </p:tgtEl>
+                </p:cond>
+              </p:nextCondLst>
+            </p:seq>
+          </p:childTnLst>
+        </p:cTn>
+      </p:par>
+    </p:tnLst>
+    <p:bldLst>
+      <p:bldP spid="2080777" grpId="0" animBg="1"/>
+    </p:bldLst>
+  </p:timing>
+</p:sld>
+</file>
+
+<file path=ppt/slides/slide22.xml><?xml version="1.0" encoding="utf-8"?>
+<p:sld xmlns:a="http://schemas.openxmlformats.org/drawingml/2006/main" xmlns:r="http://schemas.openxmlformats.org/officeDocument/2006/relationships" xmlns:p="http://schemas.openxmlformats.org/presentationml/2006/main">
+  <p:cSld>
+    <p:spTree>
+      <p:nvGrpSpPr>
+        <p:cNvPr id="1" name=""/>
+        <p:cNvGrpSpPr/>
+        <p:nvPr/>
+      </p:nvGrpSpPr>
+      <p:grpSpPr>
+        <a:xfrm>
+          <a:off x="0" y="0"/>
+          <a:ext cx="0" cy="0"/>
+          <a:chOff x="0" y="0"/>
+          <a:chExt cx="0" cy="0"/>
+        </a:xfrm>
+      </p:grpSpPr>
+      <p:sp>
+        <p:nvSpPr>
           <p:cNvPr id="2" name="标题 1"/>
           <p:cNvSpPr>
             <a:spLocks noGrp="1"/>
@@ -23468,7 +24718,7 @@
               <a:pPr>
                 <a:defRPr/>
               </a:pPr>
-              <a:t>10/6/2023</a:t>
+              <a:t>10/15/2025</a:t>
             </a:fld>
             <a:endParaRPr lang="en-US" altLang="zh-TW"/>
           </a:p>
@@ -23522,7 +24772,7 @@
               <a:pPr>
                 <a:defRPr/>
               </a:pPr>
-              <a:t>20</a:t>
+              <a:t>22</a:t>
             </a:fld>
             <a:endParaRPr lang="en-US" altLang="zh-TW"/>
           </a:p>
@@ -23612,7 +24862,7 @@
 </p:sld>
 </file>
 
-<file path=ppt/slides/slide21.xml><?xml version="1.0" encoding="utf-8"?>
+<file path=ppt/slides/slide23.xml><?xml version="1.0" encoding="utf-8"?>
 <p:sld xmlns:a="http://schemas.openxmlformats.org/drawingml/2006/main" xmlns:r="http://schemas.openxmlformats.org/officeDocument/2006/relationships" xmlns:p="http://schemas.openxmlformats.org/presentationml/2006/main">
   <p:cSld>
     <p:spTree>
@@ -23866,7 +25116,7 @@
               <a:pPr>
                 <a:defRPr/>
               </a:pPr>
-              <a:t>10/6/2023</a:t>
+              <a:t>10/15/2025</a:t>
             </a:fld>
             <a:endParaRPr lang="en-US" altLang="zh-TW"/>
           </a:p>
@@ -23920,7 +25170,7 @@
               <a:pPr>
                 <a:defRPr/>
               </a:pPr>
-              <a:t>21</a:t>
+              <a:t>23</a:t>
             </a:fld>
             <a:endParaRPr lang="en-US" altLang="zh-TW"/>
           </a:p>
@@ -25316,7 +26566,7 @@
 </p:sld>
 </file>
 
-<file path=ppt/slides/slide22.xml><?xml version="1.0" encoding="utf-8"?>
+<file path=ppt/slides/slide24.xml><?xml version="1.0" encoding="utf-8"?>
 <p:sld xmlns:a="http://schemas.openxmlformats.org/drawingml/2006/main" xmlns:r="http://schemas.openxmlformats.org/officeDocument/2006/relationships" xmlns:p="http://schemas.openxmlformats.org/presentationml/2006/main">
   <p:cSld>
     <p:spTree>
@@ -25404,7 +26654,7 @@
               <a:pPr>
                 <a:defRPr/>
               </a:pPr>
-              <a:t>10/6/2023</a:t>
+              <a:t>10/15/2025</a:t>
             </a:fld>
             <a:endParaRPr lang="en-US" altLang="zh-TW"/>
           </a:p>
@@ -25458,7 +26708,7 @@
               <a:pPr>
                 <a:defRPr/>
               </a:pPr>
-              <a:t>22</a:t>
+              <a:t>24</a:t>
             </a:fld>
             <a:endParaRPr lang="en-US" altLang="zh-TW"/>
           </a:p>
@@ -25477,7 +26727,7 @@
 </p:sld>
 </file>
 
-<file path=ppt/slides/slide23.xml><?xml version="1.0" encoding="utf-8"?>
+<file path=ppt/slides/slide25.xml><?xml version="1.0" encoding="utf-8"?>
 <p:sld xmlns:a="http://schemas.openxmlformats.org/drawingml/2006/main" xmlns:r="http://schemas.openxmlformats.org/officeDocument/2006/relationships" xmlns:p="http://schemas.openxmlformats.org/presentationml/2006/main">
   <p:cSld>
     <p:spTree>
@@ -25568,7 +26818,7 @@
               <a:pPr>
                 <a:defRPr/>
               </a:pPr>
-              <a:t>10/6/2023</a:t>
+              <a:t>10/15/2025</a:t>
             </a:fld>
             <a:endParaRPr lang="en-US" altLang="zh-TW"/>
           </a:p>
@@ -25622,7 +26872,7 @@
               <a:pPr>
                 <a:defRPr/>
               </a:pPr>
-              <a:t>23</a:t>
+              <a:t>25</a:t>
             </a:fld>
             <a:endParaRPr lang="en-US" altLang="zh-TW"/>
           </a:p>
@@ -26248,7 +27498,7 @@
 </p:sld>
 </file>
 
-<file path=ppt/slides/slide24.xml><?xml version="1.0" encoding="utf-8"?>
+<file path=ppt/slides/slide26.xml><?xml version="1.0" encoding="utf-8"?>
 <p:sld xmlns:a="http://schemas.openxmlformats.org/drawingml/2006/main" xmlns:r="http://schemas.openxmlformats.org/officeDocument/2006/relationships" xmlns:p="http://schemas.openxmlformats.org/presentationml/2006/main">
   <p:cSld>
     <p:spTree>
@@ -27724,7 +28974,7 @@
 </p:sld>
 </file>
 
-<file path=ppt/slides/slide25.xml><?xml version="1.0" encoding="utf-8"?>
+<file path=ppt/slides/slide27.xml><?xml version="1.0" encoding="utf-8"?>
 <p:sld xmlns:a="http://schemas.openxmlformats.org/drawingml/2006/main" xmlns:r="http://schemas.openxmlformats.org/officeDocument/2006/relationships" xmlns:p="http://schemas.openxmlformats.org/presentationml/2006/main">
   <p:cSld>
     <p:spTree>
@@ -27787,7 +29037,7 @@
               <a:pPr>
                 <a:defRPr/>
               </a:pPr>
-              <a:t>10/6/2023</a:t>
+              <a:t>10/15/2025</a:t>
             </a:fld>
             <a:endParaRPr lang="en-US" altLang="zh-TW"/>
           </a:p>
@@ -27841,7 +29091,7 @@
               <a:pPr>
                 <a:defRPr/>
               </a:pPr>
-              <a:t>25</a:t>
+              <a:t>27</a:t>
             </a:fld>
             <a:endParaRPr lang="en-US" altLang="zh-TW"/>
           </a:p>
@@ -28069,7 +29319,7 @@
 </p:sld>
 </file>
 
-<file path=ppt/slides/slide26.xml><?xml version="1.0" encoding="utf-8"?>
+<file path=ppt/slides/slide28.xml><?xml version="1.0" encoding="utf-8"?>
 <p:sld xmlns:a="http://schemas.openxmlformats.org/drawingml/2006/main" xmlns:r="http://schemas.openxmlformats.org/officeDocument/2006/relationships" xmlns:p="http://schemas.openxmlformats.org/presentationml/2006/main">
   <p:cSld>
     <p:spTree>
@@ -28132,7 +29382,7 @@
               <a:pPr>
                 <a:defRPr/>
               </a:pPr>
-              <a:t>10/6/2023</a:t>
+              <a:t>10/15/2025</a:t>
             </a:fld>
             <a:endParaRPr lang="en-US" altLang="zh-TW"/>
           </a:p>
@@ -28186,7 +29436,7 @@
               <a:pPr>
                 <a:defRPr/>
               </a:pPr>
-              <a:t>26</a:t>
+              <a:t>28</a:t>
             </a:fld>
             <a:endParaRPr lang="en-US" altLang="zh-TW"/>
           </a:p>
@@ -28205,7 +29455,7 @@
 </p:sld>
 </file>
 
-<file path=ppt/slides/slide27.xml><?xml version="1.0" encoding="utf-8"?>
+<file path=ppt/slides/slide29.xml><?xml version="1.0" encoding="utf-8"?>
 <p:sld xmlns:a="http://schemas.openxmlformats.org/drawingml/2006/main" xmlns:r="http://schemas.openxmlformats.org/officeDocument/2006/relationships" xmlns:p="http://schemas.openxmlformats.org/presentationml/2006/main">
   <p:cSld>
     <p:spTree>
@@ -28319,7 +29569,7 @@
               <a:pPr>
                 <a:defRPr/>
               </a:pPr>
-              <a:t>10/6/2023</a:t>
+              <a:t>10/15/2025</a:t>
             </a:fld>
             <a:endParaRPr lang="en-US" altLang="zh-TW"/>
           </a:p>
@@ -28373,7 +29623,7 @@
               <a:pPr>
                 <a:defRPr/>
               </a:pPr>
-              <a:t>27</a:t>
+              <a:t>29</a:t>
             </a:fld>
             <a:endParaRPr lang="en-US" altLang="zh-TW"/>
           </a:p>
@@ -29019,7 +30269,338 @@
 </p:sld>
 </file>
 
-<file path=ppt/slides/slide28.xml><?xml version="1.0" encoding="utf-8"?>
+<file path=ppt/slides/slide3.xml><?xml version="1.0" encoding="utf-8"?>
+<p:sld xmlns:a="http://schemas.openxmlformats.org/drawingml/2006/main" xmlns:r="http://schemas.openxmlformats.org/officeDocument/2006/relationships" xmlns:p="http://schemas.openxmlformats.org/presentationml/2006/main">
+  <p:cSld>
+    <p:spTree>
+      <p:nvGrpSpPr>
+        <p:cNvPr id="1" name=""/>
+        <p:cNvGrpSpPr/>
+        <p:nvPr/>
+      </p:nvGrpSpPr>
+      <p:grpSpPr>
+        <a:xfrm>
+          <a:off x="0" y="0"/>
+          <a:ext cx="0" cy="0"/>
+          <a:chOff x="0" y="0"/>
+          <a:chExt cx="0" cy="0"/>
+        </a:xfrm>
+      </p:grpSpPr>
+      <p:sp>
+        <p:nvSpPr>
+          <p:cNvPr id="5122" name="Rectangle 2">
+            <a:extLst>
+              <a:ext uri="{FF2B5EF4-FFF2-40B4-BE49-F238E27FC236}">
+                <a16:creationId xmlns:a16="http://schemas.microsoft.com/office/drawing/2014/main" id="{BEE5686F-A834-480B-BFB9-42BAFC398747}"/>
+              </a:ext>
+            </a:extLst>
+          </p:cNvPr>
+          <p:cNvSpPr>
+            <a:spLocks noGrp="1" noChangeArrowheads="1"/>
+          </p:cNvSpPr>
+          <p:nvPr>
+            <p:ph type="title"/>
+          </p:nvPr>
+        </p:nvSpPr>
+        <p:spPr/>
+        <p:txBody>
+          <a:bodyPr>
+            <a:normAutofit/>
+          </a:bodyPr>
+          <a:lstStyle/>
+          <a:p>
+            <a:r>
+              <a:rPr lang="en-US" altLang="zh-CN" dirty="0"/>
+              <a:t>Fourier Series</a:t>
+            </a:r>
+          </a:p>
+        </p:txBody>
+      </p:sp>
+      <mc:AlternateContent xmlns:mc="http://schemas.openxmlformats.org/markup-compatibility/2006" xmlns:a14="http://schemas.microsoft.com/office/drawing/2010/main">
+        <mc:Choice Requires="a14">
+          <p:sp>
+            <p:nvSpPr>
+              <p:cNvPr id="3" name="内容占位符 2">
+                <a:extLst>
+                  <a:ext uri="{FF2B5EF4-FFF2-40B4-BE49-F238E27FC236}">
+                    <a16:creationId xmlns:a16="http://schemas.microsoft.com/office/drawing/2014/main" id="{2ADB8727-980F-4BAE-9549-5EB43BE01AAF}"/>
+                  </a:ext>
+                </a:extLst>
+              </p:cNvPr>
+              <p:cNvSpPr>
+                <a:spLocks noGrp="1"/>
+              </p:cNvSpPr>
+              <p:nvPr>
+                <p:ph idx="1"/>
+              </p:nvPr>
+            </p:nvSpPr>
+            <p:spPr/>
+            <p:txBody>
+              <a:bodyPr/>
+              <a:lstStyle/>
+              <a:p>
+                <a:r>
+                  <a:rPr lang="en-US" altLang="zh-CN" dirty="0">
+                    <a:ea typeface="ＭＳ Ｐゴシック" panose="020B0600070205080204" pitchFamily="34" charset="-128"/>
+                  </a:rPr>
+                  <a:t>For any periodic function </a:t>
+                </a:r>
+                <a14:m>
+                  <m:oMath xmlns:m="http://schemas.openxmlformats.org/officeDocument/2006/math">
+                    <m:r>
+                      <a:rPr lang="en-US" altLang="zh-CN" i="1" dirty="0">
+                        <a:latin typeface="Cambria Math" panose="02040503050406030204" pitchFamily="18" charset="0"/>
+                        <a:ea typeface="ＭＳ Ｐゴシック" panose="020B0600070205080204" pitchFamily="34" charset="-128"/>
+                      </a:rPr>
+                      <m:t>𝑓</m:t>
+                    </m:r>
+                    <m:r>
+                      <a:rPr lang="en-US" altLang="zh-CN" i="1" dirty="0">
+                        <a:latin typeface="Cambria Math" panose="02040503050406030204" pitchFamily="18" charset="0"/>
+                        <a:ea typeface="ＭＳ Ｐゴシック" panose="020B0600070205080204" pitchFamily="34" charset="-128"/>
+                      </a:rPr>
+                      <m:t>(</m:t>
+                    </m:r>
+                    <m:r>
+                      <a:rPr lang="en-US" altLang="zh-CN" i="1" dirty="0">
+                        <a:latin typeface="Cambria Math" panose="02040503050406030204" pitchFamily="18" charset="0"/>
+                        <a:ea typeface="ＭＳ Ｐゴシック" panose="020B0600070205080204" pitchFamily="34" charset="-128"/>
+                      </a:rPr>
+                      <m:t>𝑡</m:t>
+                    </m:r>
+                    <m:r>
+                      <a:rPr lang="en-US" altLang="zh-CN" i="1" dirty="0">
+                        <a:latin typeface="Cambria Math" panose="02040503050406030204" pitchFamily="18" charset="0"/>
+                        <a:ea typeface="ＭＳ Ｐゴシック" panose="020B0600070205080204" pitchFamily="34" charset="-128"/>
+                      </a:rPr>
+                      <m:t>)</m:t>
+                    </m:r>
+                  </m:oMath>
+                </a14:m>
+                <a:r>
+                  <a:rPr lang="en-US" altLang="zh-CN" dirty="0">
+                    <a:ea typeface="ＭＳ Ｐゴシック" panose="020B0600070205080204" pitchFamily="34" charset="-128"/>
+                  </a:rPr>
+                  <a:t>, how to extract the component of </a:t>
+                </a:r>
+                <a14:m>
+                  <m:oMath xmlns:m="http://schemas.openxmlformats.org/officeDocument/2006/math">
+                    <m:r>
+                      <a:rPr lang="en-US" altLang="zh-CN" i="1" dirty="0">
+                        <a:latin typeface="Cambria Math" panose="02040503050406030204" pitchFamily="18" charset="0"/>
+                        <a:ea typeface="ＭＳ Ｐゴシック" panose="020B0600070205080204" pitchFamily="34" charset="-128"/>
+                      </a:rPr>
+                      <m:t>𝑓</m:t>
+                    </m:r>
+                  </m:oMath>
+                </a14:m>
+                <a:r>
+                  <a:rPr lang="en-US" altLang="zh-CN" dirty="0">
+                    <a:ea typeface="ＭＳ Ｐゴシック" panose="020B0600070205080204" pitchFamily="34" charset="-128"/>
+                  </a:rPr>
+                  <a:t> at a specific frequency?</a:t>
+                </a:r>
+              </a:p>
+              <a:p>
+                <a:endParaRPr lang="en-US" altLang="zh-CN" dirty="0"/>
+              </a:p>
+              <a:p>
+                <a:endParaRPr lang="en-US" altLang="zh-CN" dirty="0"/>
+              </a:p>
+              <a:p>
+                <a:endParaRPr lang="en-US" altLang="zh-CN" dirty="0"/>
+              </a:p>
+              <a:p>
+                <a:endParaRPr lang="en-US" altLang="zh-CN" dirty="0"/>
+              </a:p>
+              <a:p>
+                <a:r>
+                  <a:rPr lang="en-US" altLang="zh-CN" dirty="0">
+                    <a:solidFill>
+                      <a:schemeClr val="tx1">
+                        <a:lumMod val="85000"/>
+                        <a:lumOff val="15000"/>
+                      </a:schemeClr>
+                    </a:solidFill>
+                  </a:rPr>
+                  <a:t>is composed of the following components</a:t>
+                </a:r>
+              </a:p>
+              <a:p>
+                <a:endParaRPr lang="zh-CN" altLang="en-US" dirty="0"/>
+              </a:p>
+            </p:txBody>
+          </p:sp>
+        </mc:Choice>
+        <mc:Fallback xmlns="">
+          <p:sp>
+            <p:nvSpPr>
+              <p:cNvPr id="3" name="内容占位符 2">
+                <a:extLst>
+                  <a:ext uri="{FF2B5EF4-FFF2-40B4-BE49-F238E27FC236}">
+                    <a16:creationId xmlns:a16="http://schemas.microsoft.com/office/drawing/2014/main" id="{2ADB8727-980F-4BAE-9549-5EB43BE01AAF}"/>
+                  </a:ext>
+                </a:extLst>
+              </p:cNvPr>
+              <p:cNvSpPr>
+                <a:spLocks noGrp="1" noRot="1" noChangeAspect="1" noMove="1" noResize="1" noEditPoints="1" noAdjustHandles="1" noChangeArrowheads="1" noChangeShapeType="1" noTextEdit="1"/>
+              </p:cNvSpPr>
+              <p:nvPr>
+                <p:ph idx="1"/>
+              </p:nvPr>
+            </p:nvSpPr>
+            <p:spPr>
+              <a:blipFill>
+                <a:blip r:embed="rId2"/>
+                <a:stretch>
+                  <a:fillRect l="-912" t="-1568"/>
+                </a:stretch>
+              </a:blipFill>
+            </p:spPr>
+            <p:txBody>
+              <a:bodyPr/>
+              <a:lstStyle/>
+              <a:p>
+                <a:r>
+                  <a:rPr lang="zh-CN" altLang="en-US">
+                    <a:noFill/>
+                  </a:rPr>
+                  <a:t> </a:t>
+                </a:r>
+              </a:p>
+            </p:txBody>
+          </p:sp>
+        </mc:Fallback>
+      </mc:AlternateContent>
+      <p:pic>
+        <p:nvPicPr>
+          <p:cNvPr id="5125" name="Picture 5">
+            <a:extLst>
+              <a:ext uri="{FF2B5EF4-FFF2-40B4-BE49-F238E27FC236}">
+                <a16:creationId xmlns:a16="http://schemas.microsoft.com/office/drawing/2014/main" id="{5149C120-996B-4775-9014-8015DFFD69C6}"/>
+              </a:ext>
+            </a:extLst>
+          </p:cNvPr>
+          <p:cNvPicPr>
+            <a:picLocks noChangeAspect="1" noChangeArrowheads="1"/>
+          </p:cNvPicPr>
+          <p:nvPr/>
+        </p:nvPicPr>
+        <p:blipFill>
+          <a:blip r:embed="rId3">
+            <a:extLst>
+              <a:ext uri="{28A0092B-C50C-407E-A947-70E740481C1C}">
+                <a14:useLocalDpi xmlns:a14="http://schemas.microsoft.com/office/drawing/2010/main" val="0"/>
+              </a:ext>
+            </a:extLst>
+          </a:blip>
+          <a:srcRect/>
+          <a:stretch>
+            <a:fillRect/>
+          </a:stretch>
+        </p:blipFill>
+        <p:spPr bwMode="auto">
+          <a:xfrm>
+            <a:off x="4822826" y="1935163"/>
+            <a:ext cx="2557463" cy="1744662"/>
+          </a:xfrm>
+          <a:prstGeom prst="rect">
+            <a:avLst/>
+          </a:prstGeom>
+          <a:noFill/>
+          <a:ln>
+            <a:noFill/>
+          </a:ln>
+          <a:extLst>
+            <a:ext uri="{909E8E84-426E-40DD-AFC4-6F175D3DCCD1}">
+              <a14:hiddenFill xmlns:a14="http://schemas.microsoft.com/office/drawing/2010/main">
+                <a:solidFill>
+                  <a:srgbClr val="FFFFFF"/>
+                </a:solidFill>
+              </a14:hiddenFill>
+            </a:ext>
+            <a:ext uri="{91240B29-F687-4F45-9708-019B960494DF}">
+              <a14:hiddenLine xmlns:a14="http://schemas.microsoft.com/office/drawing/2010/main" w="9525">
+                <a:solidFill>
+                  <a:srgbClr val="000000"/>
+                </a:solidFill>
+                <a:miter lim="800000"/>
+                <a:headEnd/>
+                <a:tailEnd/>
+              </a14:hiddenLine>
+            </a:ext>
+          </a:extLst>
+        </p:spPr>
+      </p:pic>
+      <p:pic>
+        <p:nvPicPr>
+          <p:cNvPr id="5126" name="Picture 6">
+            <a:extLst>
+              <a:ext uri="{FF2B5EF4-FFF2-40B4-BE49-F238E27FC236}">
+                <a16:creationId xmlns:a16="http://schemas.microsoft.com/office/drawing/2014/main" id="{915DD610-385C-497C-AE7C-97F681030C30}"/>
+              </a:ext>
+            </a:extLst>
+          </p:cNvPr>
+          <p:cNvPicPr>
+            <a:picLocks noChangeAspect="1" noChangeArrowheads="1"/>
+          </p:cNvPicPr>
+          <p:nvPr/>
+        </p:nvPicPr>
+        <p:blipFill>
+          <a:blip r:embed="rId4">
+            <a:extLst>
+              <a:ext uri="{28A0092B-C50C-407E-A947-70E740481C1C}">
+                <a14:useLocalDpi xmlns:a14="http://schemas.microsoft.com/office/drawing/2010/main" val="0"/>
+              </a:ext>
+            </a:extLst>
+          </a:blip>
+          <a:srcRect/>
+          <a:stretch>
+            <a:fillRect/>
+          </a:stretch>
+        </p:blipFill>
+        <p:spPr bwMode="auto">
+          <a:xfrm>
+            <a:off x="1708150" y="4489450"/>
+            <a:ext cx="8763000" cy="1722438"/>
+          </a:xfrm>
+          <a:prstGeom prst="rect">
+            <a:avLst/>
+          </a:prstGeom>
+          <a:noFill/>
+          <a:ln>
+            <a:noFill/>
+          </a:ln>
+          <a:extLst>
+            <a:ext uri="{909E8E84-426E-40DD-AFC4-6F175D3DCCD1}">
+              <a14:hiddenFill xmlns:a14="http://schemas.microsoft.com/office/drawing/2010/main">
+                <a:solidFill>
+                  <a:srgbClr val="FFFFFF"/>
+                </a:solidFill>
+              </a14:hiddenFill>
+            </a:ext>
+            <a:ext uri="{91240B29-F687-4F45-9708-019B960494DF}">
+              <a14:hiddenLine xmlns:a14="http://schemas.microsoft.com/office/drawing/2010/main" w="9525">
+                <a:solidFill>
+                  <a:srgbClr val="000000"/>
+                </a:solidFill>
+                <a:miter lim="800000"/>
+                <a:headEnd/>
+                <a:tailEnd/>
+              </a14:hiddenLine>
+            </a:ext>
+          </a:extLst>
+        </p:spPr>
+      </p:pic>
+    </p:spTree>
+  </p:cSld>
+  <p:clrMapOvr>
+    <a:masterClrMapping/>
+  </p:clrMapOvr>
+</p:sld>
+</file>
+
+<file path=ppt/slides/slide30.xml><?xml version="1.0" encoding="utf-8"?>
 <p:sld xmlns:a="http://schemas.openxmlformats.org/drawingml/2006/main" xmlns:r="http://schemas.openxmlformats.org/officeDocument/2006/relationships" xmlns:p="http://schemas.openxmlformats.org/presentationml/2006/main">
   <p:cSld>
     <p:spTree>
@@ -29082,7 +30663,7 @@
               <a:pPr>
                 <a:defRPr/>
               </a:pPr>
-              <a:t>10/6/2023</a:t>
+              <a:t>10/15/2025</a:t>
             </a:fld>
             <a:endParaRPr lang="en-US" altLang="zh-TW"/>
           </a:p>
@@ -29136,7 +30717,7 @@
               <a:pPr>
                 <a:defRPr/>
               </a:pPr>
-              <a:t>28</a:t>
+              <a:t>30</a:t>
             </a:fld>
             <a:endParaRPr lang="en-US" altLang="zh-TW"/>
           </a:p>
@@ -29906,7 +31487,7 @@
 </p:sld>
 </file>
 
-<file path=ppt/slides/slide29.xml><?xml version="1.0" encoding="utf-8"?>
+<file path=ppt/slides/slide31.xml><?xml version="1.0" encoding="utf-8"?>
 <p:sld xmlns:a="http://schemas.openxmlformats.org/drawingml/2006/main" xmlns:r="http://schemas.openxmlformats.org/officeDocument/2006/relationships" xmlns:p="http://schemas.openxmlformats.org/presentationml/2006/main">
   <p:cSld>
     <p:spTree>
@@ -29998,7 +31579,7 @@
               <a:pPr>
                 <a:defRPr/>
               </a:pPr>
-              <a:t>10/6/2023</a:t>
+              <a:t>10/15/2025</a:t>
             </a:fld>
             <a:endParaRPr lang="en-US" altLang="zh-TW"/>
           </a:p>
@@ -30052,7 +31633,7 @@
               <a:pPr>
                 <a:defRPr/>
               </a:pPr>
-              <a:t>29</a:t>
+              <a:t>31</a:t>
             </a:fld>
             <a:endParaRPr lang="en-US" altLang="zh-TW"/>
           </a:p>
@@ -30180,338 +31761,7 @@
 </p:sld>
 </file>
 
-<file path=ppt/slides/slide3.xml><?xml version="1.0" encoding="utf-8"?>
-<p:sld xmlns:a="http://schemas.openxmlformats.org/drawingml/2006/main" xmlns:r="http://schemas.openxmlformats.org/officeDocument/2006/relationships" xmlns:p="http://schemas.openxmlformats.org/presentationml/2006/main">
-  <p:cSld>
-    <p:spTree>
-      <p:nvGrpSpPr>
-        <p:cNvPr id="1" name=""/>
-        <p:cNvGrpSpPr/>
-        <p:nvPr/>
-      </p:nvGrpSpPr>
-      <p:grpSpPr>
-        <a:xfrm>
-          <a:off x="0" y="0"/>
-          <a:ext cx="0" cy="0"/>
-          <a:chOff x="0" y="0"/>
-          <a:chExt cx="0" cy="0"/>
-        </a:xfrm>
-      </p:grpSpPr>
-      <p:sp>
-        <p:nvSpPr>
-          <p:cNvPr id="5122" name="Rectangle 2">
-            <a:extLst>
-              <a:ext uri="{FF2B5EF4-FFF2-40B4-BE49-F238E27FC236}">
-                <a16:creationId xmlns:a16="http://schemas.microsoft.com/office/drawing/2014/main" id="{BEE5686F-A834-480B-BFB9-42BAFC398747}"/>
-              </a:ext>
-            </a:extLst>
-          </p:cNvPr>
-          <p:cNvSpPr>
-            <a:spLocks noGrp="1" noChangeArrowheads="1"/>
-          </p:cNvSpPr>
-          <p:nvPr>
-            <p:ph type="title"/>
-          </p:nvPr>
-        </p:nvSpPr>
-        <p:spPr/>
-        <p:txBody>
-          <a:bodyPr>
-            <a:normAutofit/>
-          </a:bodyPr>
-          <a:lstStyle/>
-          <a:p>
-            <a:r>
-              <a:rPr lang="en-US" altLang="zh-CN" dirty="0"/>
-              <a:t>Fourier Series</a:t>
-            </a:r>
-          </a:p>
-        </p:txBody>
-      </p:sp>
-      <mc:AlternateContent xmlns:mc="http://schemas.openxmlformats.org/markup-compatibility/2006" xmlns:a14="http://schemas.microsoft.com/office/drawing/2010/main">
-        <mc:Choice Requires="a14">
-          <p:sp>
-            <p:nvSpPr>
-              <p:cNvPr id="3" name="内容占位符 2">
-                <a:extLst>
-                  <a:ext uri="{FF2B5EF4-FFF2-40B4-BE49-F238E27FC236}">
-                    <a16:creationId xmlns:a16="http://schemas.microsoft.com/office/drawing/2014/main" id="{2ADB8727-980F-4BAE-9549-5EB43BE01AAF}"/>
-                  </a:ext>
-                </a:extLst>
-              </p:cNvPr>
-              <p:cNvSpPr>
-                <a:spLocks noGrp="1"/>
-              </p:cNvSpPr>
-              <p:nvPr>
-                <p:ph idx="1"/>
-              </p:nvPr>
-            </p:nvSpPr>
-            <p:spPr/>
-            <p:txBody>
-              <a:bodyPr/>
-              <a:lstStyle/>
-              <a:p>
-                <a:r>
-                  <a:rPr lang="en-US" altLang="zh-CN" dirty="0">
-                    <a:ea typeface="ＭＳ Ｐゴシック" panose="020B0600070205080204" pitchFamily="34" charset="-128"/>
-                  </a:rPr>
-                  <a:t>For any periodic function </a:t>
-                </a:r>
-                <a14:m>
-                  <m:oMath xmlns:m="http://schemas.openxmlformats.org/officeDocument/2006/math">
-                    <m:r>
-                      <a:rPr lang="en-US" altLang="zh-CN" i="1" dirty="0">
-                        <a:latin typeface="Cambria Math" panose="02040503050406030204" pitchFamily="18" charset="0"/>
-                        <a:ea typeface="ＭＳ Ｐゴシック" panose="020B0600070205080204" pitchFamily="34" charset="-128"/>
-                      </a:rPr>
-                      <m:t>𝑓</m:t>
-                    </m:r>
-                    <m:r>
-                      <a:rPr lang="en-US" altLang="zh-CN" i="1" dirty="0">
-                        <a:latin typeface="Cambria Math" panose="02040503050406030204" pitchFamily="18" charset="0"/>
-                        <a:ea typeface="ＭＳ Ｐゴシック" panose="020B0600070205080204" pitchFamily="34" charset="-128"/>
-                      </a:rPr>
-                      <m:t>(</m:t>
-                    </m:r>
-                    <m:r>
-                      <a:rPr lang="en-US" altLang="zh-CN" i="1" dirty="0">
-                        <a:latin typeface="Cambria Math" panose="02040503050406030204" pitchFamily="18" charset="0"/>
-                        <a:ea typeface="ＭＳ Ｐゴシック" panose="020B0600070205080204" pitchFamily="34" charset="-128"/>
-                      </a:rPr>
-                      <m:t>𝑡</m:t>
-                    </m:r>
-                    <m:r>
-                      <a:rPr lang="en-US" altLang="zh-CN" i="1" dirty="0">
-                        <a:latin typeface="Cambria Math" panose="02040503050406030204" pitchFamily="18" charset="0"/>
-                        <a:ea typeface="ＭＳ Ｐゴシック" panose="020B0600070205080204" pitchFamily="34" charset="-128"/>
-                      </a:rPr>
-                      <m:t>)</m:t>
-                    </m:r>
-                  </m:oMath>
-                </a14:m>
-                <a:r>
-                  <a:rPr lang="en-US" altLang="zh-CN" dirty="0">
-                    <a:ea typeface="ＭＳ Ｐゴシック" panose="020B0600070205080204" pitchFamily="34" charset="-128"/>
-                  </a:rPr>
-                  <a:t>, how to extract the component of </a:t>
-                </a:r>
-                <a14:m>
-                  <m:oMath xmlns:m="http://schemas.openxmlformats.org/officeDocument/2006/math">
-                    <m:r>
-                      <a:rPr lang="en-US" altLang="zh-CN" i="1" dirty="0">
-                        <a:latin typeface="Cambria Math" panose="02040503050406030204" pitchFamily="18" charset="0"/>
-                        <a:ea typeface="ＭＳ Ｐゴシック" panose="020B0600070205080204" pitchFamily="34" charset="-128"/>
-                      </a:rPr>
-                      <m:t>𝑓</m:t>
-                    </m:r>
-                  </m:oMath>
-                </a14:m>
-                <a:r>
-                  <a:rPr lang="en-US" altLang="zh-CN" dirty="0">
-                    <a:ea typeface="ＭＳ Ｐゴシック" panose="020B0600070205080204" pitchFamily="34" charset="-128"/>
-                  </a:rPr>
-                  <a:t> at a specific frequency?</a:t>
-                </a:r>
-              </a:p>
-              <a:p>
-                <a:endParaRPr lang="en-US" altLang="zh-CN" dirty="0"/>
-              </a:p>
-              <a:p>
-                <a:endParaRPr lang="en-US" altLang="zh-CN" dirty="0"/>
-              </a:p>
-              <a:p>
-                <a:endParaRPr lang="en-US" altLang="zh-CN" dirty="0"/>
-              </a:p>
-              <a:p>
-                <a:endParaRPr lang="en-US" altLang="zh-CN" dirty="0"/>
-              </a:p>
-              <a:p>
-                <a:r>
-                  <a:rPr lang="en-US" altLang="zh-CN" dirty="0">
-                    <a:solidFill>
-                      <a:schemeClr val="tx1">
-                        <a:lumMod val="85000"/>
-                        <a:lumOff val="15000"/>
-                      </a:schemeClr>
-                    </a:solidFill>
-                  </a:rPr>
-                  <a:t>is composed of the following components</a:t>
-                </a:r>
-              </a:p>
-              <a:p>
-                <a:endParaRPr lang="zh-CN" altLang="en-US" dirty="0"/>
-              </a:p>
-            </p:txBody>
-          </p:sp>
-        </mc:Choice>
-        <mc:Fallback xmlns="">
-          <p:sp>
-            <p:nvSpPr>
-              <p:cNvPr id="3" name="内容占位符 2">
-                <a:extLst>
-                  <a:ext uri="{FF2B5EF4-FFF2-40B4-BE49-F238E27FC236}">
-                    <a16:creationId xmlns:a16="http://schemas.microsoft.com/office/drawing/2014/main" id="{2ADB8727-980F-4BAE-9549-5EB43BE01AAF}"/>
-                  </a:ext>
-                </a:extLst>
-              </p:cNvPr>
-              <p:cNvSpPr>
-                <a:spLocks noGrp="1" noRot="1" noChangeAspect="1" noMove="1" noResize="1" noEditPoints="1" noAdjustHandles="1" noChangeArrowheads="1" noChangeShapeType="1" noTextEdit="1"/>
-              </p:cNvSpPr>
-              <p:nvPr>
-                <p:ph idx="1"/>
-              </p:nvPr>
-            </p:nvSpPr>
-            <p:spPr>
-              <a:blipFill>
-                <a:blip r:embed="rId2"/>
-                <a:stretch>
-                  <a:fillRect l="-912" t="-1568"/>
-                </a:stretch>
-              </a:blipFill>
-            </p:spPr>
-            <p:txBody>
-              <a:bodyPr/>
-              <a:lstStyle/>
-              <a:p>
-                <a:r>
-                  <a:rPr lang="zh-CN" altLang="en-US">
-                    <a:noFill/>
-                  </a:rPr>
-                  <a:t> </a:t>
-                </a:r>
-              </a:p>
-            </p:txBody>
-          </p:sp>
-        </mc:Fallback>
-      </mc:AlternateContent>
-      <p:pic>
-        <p:nvPicPr>
-          <p:cNvPr id="5125" name="Picture 5">
-            <a:extLst>
-              <a:ext uri="{FF2B5EF4-FFF2-40B4-BE49-F238E27FC236}">
-                <a16:creationId xmlns:a16="http://schemas.microsoft.com/office/drawing/2014/main" id="{5149C120-996B-4775-9014-8015DFFD69C6}"/>
-              </a:ext>
-            </a:extLst>
-          </p:cNvPr>
-          <p:cNvPicPr>
-            <a:picLocks noChangeAspect="1" noChangeArrowheads="1"/>
-          </p:cNvPicPr>
-          <p:nvPr/>
-        </p:nvPicPr>
-        <p:blipFill>
-          <a:blip r:embed="rId3">
-            <a:extLst>
-              <a:ext uri="{28A0092B-C50C-407E-A947-70E740481C1C}">
-                <a14:useLocalDpi xmlns:a14="http://schemas.microsoft.com/office/drawing/2010/main" val="0"/>
-              </a:ext>
-            </a:extLst>
-          </a:blip>
-          <a:srcRect/>
-          <a:stretch>
-            <a:fillRect/>
-          </a:stretch>
-        </p:blipFill>
-        <p:spPr bwMode="auto">
-          <a:xfrm>
-            <a:off x="4822826" y="1935163"/>
-            <a:ext cx="2557463" cy="1744662"/>
-          </a:xfrm>
-          <a:prstGeom prst="rect">
-            <a:avLst/>
-          </a:prstGeom>
-          <a:noFill/>
-          <a:ln>
-            <a:noFill/>
-          </a:ln>
-          <a:extLst>
-            <a:ext uri="{909E8E84-426E-40DD-AFC4-6F175D3DCCD1}">
-              <a14:hiddenFill xmlns:a14="http://schemas.microsoft.com/office/drawing/2010/main">
-                <a:solidFill>
-                  <a:srgbClr val="FFFFFF"/>
-                </a:solidFill>
-              </a14:hiddenFill>
-            </a:ext>
-            <a:ext uri="{91240B29-F687-4F45-9708-019B960494DF}">
-              <a14:hiddenLine xmlns:a14="http://schemas.microsoft.com/office/drawing/2010/main" w="9525">
-                <a:solidFill>
-                  <a:srgbClr val="000000"/>
-                </a:solidFill>
-                <a:miter lim="800000"/>
-                <a:headEnd/>
-                <a:tailEnd/>
-              </a14:hiddenLine>
-            </a:ext>
-          </a:extLst>
-        </p:spPr>
-      </p:pic>
-      <p:pic>
-        <p:nvPicPr>
-          <p:cNvPr id="5126" name="Picture 6">
-            <a:extLst>
-              <a:ext uri="{FF2B5EF4-FFF2-40B4-BE49-F238E27FC236}">
-                <a16:creationId xmlns:a16="http://schemas.microsoft.com/office/drawing/2014/main" id="{915DD610-385C-497C-AE7C-97F681030C30}"/>
-              </a:ext>
-            </a:extLst>
-          </p:cNvPr>
-          <p:cNvPicPr>
-            <a:picLocks noChangeAspect="1" noChangeArrowheads="1"/>
-          </p:cNvPicPr>
-          <p:nvPr/>
-        </p:nvPicPr>
-        <p:blipFill>
-          <a:blip r:embed="rId4">
-            <a:extLst>
-              <a:ext uri="{28A0092B-C50C-407E-A947-70E740481C1C}">
-                <a14:useLocalDpi xmlns:a14="http://schemas.microsoft.com/office/drawing/2010/main" val="0"/>
-              </a:ext>
-            </a:extLst>
-          </a:blip>
-          <a:srcRect/>
-          <a:stretch>
-            <a:fillRect/>
-          </a:stretch>
-        </p:blipFill>
-        <p:spPr bwMode="auto">
-          <a:xfrm>
-            <a:off x="1708150" y="4489450"/>
-            <a:ext cx="8763000" cy="1722438"/>
-          </a:xfrm>
-          <a:prstGeom prst="rect">
-            <a:avLst/>
-          </a:prstGeom>
-          <a:noFill/>
-          <a:ln>
-            <a:noFill/>
-          </a:ln>
-          <a:extLst>
-            <a:ext uri="{909E8E84-426E-40DD-AFC4-6F175D3DCCD1}">
-              <a14:hiddenFill xmlns:a14="http://schemas.microsoft.com/office/drawing/2010/main">
-                <a:solidFill>
-                  <a:srgbClr val="FFFFFF"/>
-                </a:solidFill>
-              </a14:hiddenFill>
-            </a:ext>
-            <a:ext uri="{91240B29-F687-4F45-9708-019B960494DF}">
-              <a14:hiddenLine xmlns:a14="http://schemas.microsoft.com/office/drawing/2010/main" w="9525">
-                <a:solidFill>
-                  <a:srgbClr val="000000"/>
-                </a:solidFill>
-                <a:miter lim="800000"/>
-                <a:headEnd/>
-                <a:tailEnd/>
-              </a14:hiddenLine>
-            </a:ext>
-          </a:extLst>
-        </p:spPr>
-      </p:pic>
-    </p:spTree>
-  </p:cSld>
-  <p:clrMapOvr>
-    <a:masterClrMapping/>
-  </p:clrMapOvr>
-</p:sld>
-</file>
-
-<file path=ppt/slides/slide30.xml><?xml version="1.0" encoding="utf-8"?>
+<file path=ppt/slides/slide32.xml><?xml version="1.0" encoding="utf-8"?>
 <p:sld xmlns:a="http://schemas.openxmlformats.org/drawingml/2006/main" xmlns:r="http://schemas.openxmlformats.org/officeDocument/2006/relationships" xmlns:p="http://schemas.openxmlformats.org/presentationml/2006/main">
   <p:cSld>
     <p:spTree>
@@ -30603,7 +31853,7 @@
               <a:pPr>
                 <a:defRPr/>
               </a:pPr>
-              <a:t>10/6/2023</a:t>
+              <a:t>10/15/2025</a:t>
             </a:fld>
             <a:endParaRPr lang="en-US" altLang="zh-TW"/>
           </a:p>
@@ -30657,7 +31907,7 @@
               <a:pPr>
                 <a:defRPr/>
               </a:pPr>
-              <a:t>30</a:t>
+              <a:t>32</a:t>
             </a:fld>
             <a:endParaRPr lang="en-US" altLang="zh-TW"/>
           </a:p>
@@ -30837,7 +32087,7 @@
 </p:sld>
 </file>
 
-<file path=ppt/slides/slide31.xml><?xml version="1.0" encoding="utf-8"?>
+<file path=ppt/slides/slide33.xml><?xml version="1.0" encoding="utf-8"?>
 <p:sld xmlns:a="http://schemas.openxmlformats.org/drawingml/2006/main" xmlns:r="http://schemas.openxmlformats.org/officeDocument/2006/relationships" xmlns:p="http://schemas.openxmlformats.org/presentationml/2006/main">
   <p:cSld>
     <p:spTree>
@@ -30902,7 +32152,7 @@
               <a:pPr>
                 <a:defRPr/>
               </a:pPr>
-              <a:t>10/6/2023</a:t>
+              <a:t>10/15/2025</a:t>
             </a:fld>
             <a:endParaRPr lang="en-US" altLang="zh-TW"/>
           </a:p>
@@ -30956,7 +32206,7 @@
               <a:pPr>
                 <a:defRPr/>
               </a:pPr>
-              <a:t>31</a:t>
+              <a:t>33</a:t>
             </a:fld>
             <a:endParaRPr lang="en-US" altLang="zh-TW"/>
           </a:p>
@@ -30975,7 +32225,7 @@
 </p:sld>
 </file>
 
-<file path=ppt/slides/slide32.xml><?xml version="1.0" encoding="utf-8"?>
+<file path=ppt/slides/slide34.xml><?xml version="1.0" encoding="utf-8"?>
 <p:sld xmlns:a="http://schemas.openxmlformats.org/drawingml/2006/main" xmlns:r="http://schemas.openxmlformats.org/officeDocument/2006/relationships" xmlns:p="http://schemas.openxmlformats.org/presentationml/2006/main">
   <p:cSld>
     <p:spTree>
@@ -31073,7 +32323,7 @@
               <a:pPr>
                 <a:defRPr/>
               </a:pPr>
-              <a:t>10/6/2023</a:t>
+              <a:t>10/15/2025</a:t>
             </a:fld>
             <a:endParaRPr lang="en-US" altLang="zh-TW"/>
           </a:p>
@@ -31127,7 +32377,7 @@
               <a:pPr>
                 <a:defRPr/>
               </a:pPr>
-              <a:t>32</a:t>
+              <a:t>34</a:t>
             </a:fld>
             <a:endParaRPr lang="en-US" altLang="zh-TW"/>
           </a:p>
@@ -31422,7 +32672,7 @@
 </p:sld>
 </file>
 
-<file path=ppt/slides/slide33.xml><?xml version="1.0" encoding="utf-8"?>
+<file path=ppt/slides/slide35.xml><?xml version="1.0" encoding="utf-8"?>
 <p:sld xmlns:a="http://schemas.openxmlformats.org/drawingml/2006/main" xmlns:r="http://schemas.openxmlformats.org/officeDocument/2006/relationships" xmlns:p="http://schemas.openxmlformats.org/presentationml/2006/main">
   <p:cSld>
     <p:spTree>
@@ -31534,7 +32784,7 @@
               <a:pPr>
                 <a:defRPr/>
               </a:pPr>
-              <a:t>10/6/2023</a:t>
+              <a:t>10/15/2025</a:t>
             </a:fld>
             <a:endParaRPr lang="en-US" altLang="zh-TW"/>
           </a:p>
@@ -31563,7 +32813,7 @@
               <a:pPr>
                 <a:defRPr/>
               </a:pPr>
-              <a:t>33</a:t>
+              <a:t>35</a:t>
             </a:fld>
             <a:endParaRPr lang="en-US" altLang="zh-TW"/>
           </a:p>
@@ -32593,7 +33843,7 @@
 </p:sld>
 </file>
 
-<file path=ppt/slides/slide34.xml><?xml version="1.0" encoding="utf-8"?>
+<file path=ppt/slides/slide36.xml><?xml version="1.0" encoding="utf-8"?>
 <p:sld xmlns:a="http://schemas.openxmlformats.org/drawingml/2006/main" xmlns:r="http://schemas.openxmlformats.org/officeDocument/2006/relationships" xmlns:p="http://schemas.openxmlformats.org/presentationml/2006/main">
   <p:cSld>
     <p:spTree>
@@ -32675,7 +33925,7 @@
               <a:pPr>
                 <a:defRPr/>
               </a:pPr>
-              <a:t>10/6/2023</a:t>
+              <a:t>10/15/2025</a:t>
             </a:fld>
             <a:endParaRPr lang="en-US" altLang="zh-TW"/>
           </a:p>
@@ -32729,7 +33979,7 @@
               <a:pPr>
                 <a:defRPr/>
               </a:pPr>
-              <a:t>34</a:t>
+              <a:t>36</a:t>
             </a:fld>
             <a:endParaRPr lang="en-US" altLang="zh-TW"/>
           </a:p>
@@ -33008,7 +34258,7 @@
 </p:sld>
 </file>
 
-<file path=ppt/slides/slide35.xml><?xml version="1.0" encoding="utf-8"?>
+<file path=ppt/slides/slide37.xml><?xml version="1.0" encoding="utf-8"?>
 <p:sld xmlns:a="http://schemas.openxmlformats.org/drawingml/2006/main" xmlns:r="http://schemas.openxmlformats.org/officeDocument/2006/relationships" xmlns:p="http://schemas.openxmlformats.org/presentationml/2006/main">
   <p:cSld>
     <p:spTree>
@@ -33071,7 +34321,7 @@
               <a:pPr>
                 <a:defRPr/>
               </a:pPr>
-              <a:t>10/6/2023</a:t>
+              <a:t>10/15/2025</a:t>
             </a:fld>
             <a:endParaRPr lang="en-US" altLang="zh-TW"/>
           </a:p>
@@ -33125,7 +34375,7 @@
               <a:pPr>
                 <a:defRPr/>
               </a:pPr>
-              <a:t>35</a:t>
+              <a:t>37</a:t>
             </a:fld>
             <a:endParaRPr lang="en-US" altLang="zh-TW"/>
           </a:p>
@@ -33370,7 +34620,7 @@
 </p:sld>
 </file>
 
-<file path=ppt/slides/slide36.xml><?xml version="1.0" encoding="utf-8"?>
+<file path=ppt/slides/slide38.xml><?xml version="1.0" encoding="utf-8"?>
 <p:sld xmlns:a="http://schemas.openxmlformats.org/drawingml/2006/main" xmlns:r="http://schemas.openxmlformats.org/officeDocument/2006/relationships" xmlns:p="http://schemas.openxmlformats.org/presentationml/2006/main">
   <p:cSld>
     <p:spTree>
@@ -33462,7 +34712,7 @@
               <a:pPr>
                 <a:defRPr/>
               </a:pPr>
-              <a:t>10/6/2023</a:t>
+              <a:t>10/15/2025</a:t>
             </a:fld>
             <a:endParaRPr lang="en-US" altLang="zh-TW"/>
           </a:p>
@@ -33516,7 +34766,7 @@
               <a:pPr>
                 <a:defRPr/>
               </a:pPr>
-              <a:t>36</a:t>
+              <a:t>38</a:t>
             </a:fld>
             <a:endParaRPr lang="en-US" altLang="zh-TW"/>
           </a:p>
@@ -34653,7 +35903,7 @@
           <a:graphicData uri="http://schemas.openxmlformats.org/presentationml/2006/ole">
             <mc:AlternateContent xmlns:mc="http://schemas.openxmlformats.org/markup-compatibility/2006">
               <mc:Choice xmlns:v="urn:schemas-microsoft-com:vml" Requires="v">
-                <p:oleObj spid="_x0000_s14438" name="Equation" r:id="rId4" imgW="1498600" imgH="330200" progId="Equation.DSMT4">
+                <p:oleObj spid="_x0000_s14450" name="Equation" r:id="rId4" imgW="1498600" imgH="330200" progId="Equation.DSMT4">
                   <p:embed/>
                 </p:oleObj>
               </mc:Choice>
@@ -34764,7 +36014,7 @@
           <a:graphicData uri="http://schemas.openxmlformats.org/presentationml/2006/ole">
             <mc:AlternateContent xmlns:mc="http://schemas.openxmlformats.org/markup-compatibility/2006">
               <mc:Choice xmlns:v="urn:schemas-microsoft-com:vml" Requires="v">
-                <p:oleObj spid="_x0000_s14439" name="Equation" r:id="rId6" imgW="1511300" imgH="330200" progId="Equation.DSMT4">
+                <p:oleObj spid="_x0000_s14451" name="Equation" r:id="rId6" imgW="1511300" imgH="330200" progId="Equation.DSMT4">
                   <p:embed/>
                 </p:oleObj>
               </mc:Choice>
@@ -35875,7 +37125,7 @@
               <a:pPr>
                 <a:defRPr/>
               </a:pPr>
-              <a:t>10/6/2023</a:t>
+              <a:t>10/15/2025</a:t>
             </a:fld>
             <a:endParaRPr lang="en-US" altLang="zh-TW"/>
           </a:p>
@@ -36241,7 +37491,7 @@
           <a:graphicData uri="http://schemas.openxmlformats.org/presentationml/2006/ole">
             <mc:AlternateContent xmlns:mc="http://schemas.openxmlformats.org/markup-compatibility/2006">
               <mc:Choice xmlns:v="urn:schemas-microsoft-com:vml" Requires="v">
-                <p:oleObj spid="_x0000_s1111" name="Equation" r:id="rId4" imgW="2374900" imgH="431800" progId="Equation.DSMT4">
+                <p:oleObj spid="_x0000_s1117" name="Equation" r:id="rId4" imgW="2374900" imgH="431800" progId="Equation.DSMT4">
                   <p:embed/>
                 </p:oleObj>
               </mc:Choice>
@@ -37563,7 +38813,7 @@
           <a:graphicData uri="http://schemas.openxmlformats.org/presentationml/2006/ole">
             <mc:AlternateContent xmlns:mc="http://schemas.openxmlformats.org/markup-compatibility/2006">
               <mc:Choice xmlns:v="urn:schemas-microsoft-com:vml" Requires="v">
-                <p:oleObj spid="_x0000_s2303" name="Equation" r:id="rId4" imgW="2374900" imgH="431800" progId="Equation.DSMT4">
+                <p:oleObj spid="_x0000_s2321" name="Equation" r:id="rId4" imgW="2374900" imgH="431800" progId="Equation.DSMT4">
                   <p:embed/>
                 </p:oleObj>
               </mc:Choice>
@@ -37658,7 +38908,7 @@
           <a:graphicData uri="http://schemas.openxmlformats.org/presentationml/2006/ole">
             <mc:AlternateContent xmlns:mc="http://schemas.openxmlformats.org/markup-compatibility/2006">
               <mc:Choice xmlns:v="urn:schemas-microsoft-com:vml" Requires="v">
-                <p:oleObj spid="_x0000_s2304" name="Equation" r:id="rId6" imgW="1536700" imgH="1333500" progId="Equation.DSMT4">
+                <p:oleObj spid="_x0000_s2322" name="Equation" r:id="rId6" imgW="1536700" imgH="1333500" progId="Equation.DSMT4">
                   <p:embed/>
                 </p:oleObj>
               </mc:Choice>
@@ -37753,7 +39003,7 @@
           <a:graphicData uri="http://schemas.openxmlformats.org/presentationml/2006/ole">
             <mc:AlternateContent xmlns:mc="http://schemas.openxmlformats.org/markup-compatibility/2006">
               <mc:Choice xmlns:v="urn:schemas-microsoft-com:vml" Requires="v">
-                <p:oleObj spid="_x0000_s2305" name="Equation" r:id="rId8" imgW="1066800" imgH="457200" progId="Equation.DSMT4">
+                <p:oleObj spid="_x0000_s2323" name="Equation" r:id="rId8" imgW="1066800" imgH="457200" progId="Equation.DSMT4">
                   <p:embed/>
                 </p:oleObj>
               </mc:Choice>
